--- a/doc/slides/db-review.pptx
+++ b/doc/slides/db-review.pptx
@@ -48838,7 +48838,7 @@
                           <a:cs typeface="Meiryo"/>
                           <a:ea typeface="Meiryo"/>
                         </a:rPr>
-                        <a:t>世帯構成員(子ども等)</a:t>
+                        <a:t>世帯構成員。アレルギーは専用の2列</a:t>
                       </a:r>
                     </a:p>
                   </a:txBody>
@@ -48868,7 +48868,7 @@
                           <a:cs typeface="Meiryo"/>
                           <a:ea typeface="Meiryo"/>
                         </a:rPr>
-                        <a:t>customers への複合FK。生年月日は date + 元表記</a:t>
+                        <a:t>customers への複合FK。未確認/なし/ありを区別</a:t>
                       </a:r>
                     </a:p>
                   </a:txBody>

--- a/doc/slides/db-review.pptx
+++ b/doc/slides/db-review.pptx
@@ -10594,7 +10594,7 @@
                 <a:cs typeface="Meiryo"/>
                 <a:ea typeface="Meiryo"/>
               </a:rPr>
-              <a:t>クーポンの3枚(customer_coupons / coupon_redemptions)も同じ形で customers・coupons・daily_reports を指しています。先行整備の18枚も同じ規約に載せてあり、複合外部キーは全部で50本です。参照先には UNIQUE(tenant_id, id) を張ってあります。ON DELETE は全て no action(親を消せない)にしており、廃棄はテナント単位の物理削除で行う方針です。</a:t>
+              <a:t>クーポンの2枚(customer_coupons / coupon_redemptions)も同じ形で customers・coupons・daily_reports を指しています。先行整備の18枚も同じ規約に載せてあり、複合外部キーは全部で50本です。参照先には UNIQUE(tenant_id, id) を張ってあります。ON DELETE は全て no action(親を消せない)にしており、廃棄はテナント単位の物理削除で行う方針です。</a:t>
             </a:r>
           </a:p>
         </p:txBody>

--- a/doc/slides/db-review.pptx
+++ b/doc/slides/db-review.pptx
@@ -3510,7 +3510,7 @@
                 <a:cs typeface="Meiryo"/>
                 <a:ea typeface="Meiryo"/>
               </a:rPr>
-              <a:t>テーブル一覧② — 先行整備の27枚(1/2)</a:t>
+              <a:t>テーブル一覧② — 先行整備の18枚</a:t>
             </a:r>
             <a:r>
               <a:rPr sz="1250" b="0" i="0">
@@ -5458,7 +5458,7 @@
                 <a:cs typeface="Meiryo"/>
                 <a:ea typeface="Meiryo"/>
               </a:rPr>
-              <a:t>この18枚も既存17枚と同じ規約(tenant_id + RLS + 複合外部キー + CHECK + updated_at トリガー)に載せてあります。残りの9枚(日報AIのプロンプト調整)は次ページ。先に作った理由と迷った判断は第4章(P27・P28)で扱います。</a:t>
+              <a:t>この18枚も既存17枚と同じ規約(tenant_id + RLS + 複合外部キー + CHECK + updated_at トリガー)に載せてあります。この5領域はスキーマまで。次ページの日報AIの3軸は実装まで進んでいます。先に作った理由と迷った判断は第4章(P27・P28)で扱います。</a:t>
             </a:r>
           </a:p>
         </p:txBody>
@@ -5496,7 +5496,7 @@
             <a:avLst/>
           </a:prstGeom>
           <a:solidFill>
-            <a:srgbClr val="C2410C"/>
+            <a:srgbClr val="6D28D9"/>
           </a:solidFill>
           <a:ln>
             <a:noFill/>
@@ -5562,7 +5562,7 @@
                 <a:cs typeface="Meiryo"/>
                 <a:ea typeface="Meiryo"/>
               </a:rPr>
-              <a:t>テーブル一覧③ — 先行整備の27枚(2/2)</a:t>
+              <a:t>テーブル一覧③ — 稼働中: 日報AIの3軸(10枚)</a:t>
             </a:r>
             <a:r>
               <a:rPr sz="1250" b="0" i="0">
@@ -5573,7 +5573,7 @@
                 <a:cs typeface="Meiryo"/>
                 <a:ea typeface="Meiryo"/>
               </a:rPr>
-              <a:t>   日報AIのプロンプト調整の9枚。文面は一覧①(稼働中)</a:t>
+              <a:t>   年齢帯・教育関心度★・ストレス度PSIの表と、生成記録。生成まで接続済み</a:t>
             </a:r>
           </a:p>
         </p:txBody>
@@ -7078,7 +7078,7 @@
                 <a:cs typeface="Meiryo"/>
                 <a:ea typeface="Meiryo"/>
               </a:rPr>
-              <a:t>低いほど負担が大きい。訪問ごとにスタッフが評価(既存の risk_rating)</a:t>
+              <a:t>低いほど負担が大きい。訪問ごとにスタッフが評価(daily_reports.stress_level)</a:t>
             </a:r>
           </a:p>
         </p:txBody>
@@ -12389,7 +12389,7 @@
                 <a:cs typeface="Meiryo"/>
                 <a:ea typeface="Meiryo"/>
               </a:rPr>
-              <a:t>クーポンの2枚(customer_coupons / coupon_redemptions)も同じ形で customers・coupons・daily_reports を指しています。先行整備の27枚も同じ規約に載せてあり、複合外部キーは全部で63本です。参照先には UNIQUE(tenant_id, id) を張ってあります。ON DELETE は全て no action(親を消せない)にしており、廃棄はテナント単位の物理削除で行う方針です。</a:t>
+              <a:t>クーポンの2枚(customer_coupons / coupon_redemptions)も同じ形で customers・coupons・daily_reports を指しています。先行整備の18枚・稼働中の日報AI3軸の10枚も同じ規約に載せてあり、複合外部キーは全部で63本です。参照先には UNIQUE(tenant_id, id) を張ってあります。ON DELETE は全て no action(親を消せない)にしており、廃棄はテナント単位の物理削除で行う方針です。</a:t>
             </a:r>
           </a:p>
         </p:txBody>
@@ -20125,7 +20125,7 @@
                 <a:cs typeface="Meiryo"/>
                 <a:ea typeface="Meiryo"/>
               </a:rPr>
-              <a:t>新しい表を足すときに考えることが少ない(同じ形をコピーすればよい)。RLSとupdated_atトリガーの張り忘れはCIが機械的に検出する。第4章の27枚も、この形にそのまま載せてあります。</a:t>
+              <a:t>新しい表を足すときに考えることが少ない(同じ形をコピーすればよい)。RLSとupdated_atトリガーの張り忘れはCIが機械的に検出する。第4章の18枚・日報AIの10枚も、この形にそのまま載せてあります。</a:t>
             </a:r>
           </a:p>
         </p:txBody>
@@ -34234,7 +34234,7 @@
                 <a:cs typeface="Meiryo"/>
                 <a:ea typeface="Meiryo"/>
               </a:rPr>
-              <a:t>実装より先にDBの形だけ固めた6領域。そこで迷った判断と、まとめての相談事項</a:t>
+              <a:t>実装より先にDBの形だけ固めた5領域。そこで迷った判断と、まとめての相談事項</a:t>
             </a:r>
           </a:p>
         </p:txBody>
@@ -34338,7 +34338,7 @@
                 <a:cs typeface="Meiryo"/>
                 <a:ea typeface="Meiryo"/>
               </a:rPr>
-              <a:t>実装より先に、DBの形だけ固めた6領域</a:t>
+              <a:t>実装より先に、DBの形だけ固めた5領域</a:t>
             </a:r>
             <a:r>
               <a:rPr sz="1250" b="0" i="0">
@@ -34349,7 +34349,7 @@
                 <a:cs typeface="Meiryo"/>
                 <a:ea typeface="Meiryo"/>
               </a:rPr>
-              <a:t>   27テーブル。リポジトリ実装・API・画面はまだ無い(日報AIの文面だけ先に稼働)</a:t>
+              <a:t>   18テーブル。リポジトリ実装・API・画面はまだ無い(日報AIの3軸は実装済みでここには含めない)</a:t>
             </a:r>
           </a:p>
         </p:txBody>
@@ -34525,7 +34525,7 @@
         <p:spPr>
           <a:xfrm>
             <a:off x="457200" y="1481328"/>
-            <a:ext cx="1757629" cy="3657600"/>
+            <a:ext cx="2138415" cy="3657600"/>
           </a:xfrm>
           <a:prstGeom prst="roundRect">
             <a:avLst>
@@ -34573,7 +34573,7 @@
         <p:spPr>
           <a:xfrm>
             <a:off x="457200" y="1481328"/>
-            <a:ext cx="1757629" cy="384048"/>
+            <a:ext cx="2138415" cy="384048"/>
           </a:xfrm>
           <a:prstGeom prst="rect">
             <a:avLst/>
@@ -34633,7 +34633,7 @@
         <p:spPr>
           <a:xfrm>
             <a:off x="557784" y="1920240"/>
-            <a:ext cx="1556461" cy="294386"/>
+            <a:ext cx="1937247" cy="294386"/>
           </a:xfrm>
           <a:prstGeom prst="rect">
             <a:avLst/>
@@ -34676,7 +34676,7 @@
         <p:spPr>
           <a:xfrm>
             <a:off x="557784" y="2269490"/>
-            <a:ext cx="1556461" cy="2805429"/>
+            <a:ext cx="1937247" cy="2805429"/>
           </a:xfrm>
           <a:prstGeom prst="rect">
             <a:avLst/>
@@ -34776,8 +34776,8 @@
         </p:nvSpPr>
         <p:spPr>
           <a:xfrm>
-            <a:off x="2361133" y="1481328"/>
-            <a:ext cx="1757629" cy="3657600"/>
+            <a:off x="2741919" y="1481328"/>
+            <a:ext cx="2138415" cy="3657600"/>
           </a:xfrm>
           <a:prstGeom prst="roundRect">
             <a:avLst>
@@ -34824,8 +34824,8 @@
         </p:nvSpPr>
         <p:spPr>
           <a:xfrm>
-            <a:off x="2361133" y="1481328"/>
-            <a:ext cx="1757629" cy="384048"/>
+            <a:off x="2741919" y="1481328"/>
+            <a:ext cx="2138415" cy="384048"/>
           </a:xfrm>
           <a:prstGeom prst="rect">
             <a:avLst/>
@@ -34884,8 +34884,8 @@
         </p:nvSpPr>
         <p:spPr>
           <a:xfrm>
-            <a:off x="2461717" y="1920240"/>
-            <a:ext cx="1556461" cy="552196"/>
+            <a:off x="2842503" y="1920240"/>
+            <a:ext cx="1937247" cy="552196"/>
           </a:xfrm>
           <a:prstGeom prst="rect">
             <a:avLst/>
@@ -34929,8 +34929,8 @@
         </p:nvSpPr>
         <p:spPr>
           <a:xfrm>
-            <a:off x="2461717" y="2527300"/>
-            <a:ext cx="1556461" cy="2547620"/>
+            <a:off x="2842503" y="2527300"/>
+            <a:ext cx="1937247" cy="2547620"/>
           </a:xfrm>
           <a:prstGeom prst="rect">
             <a:avLst/>
@@ -35030,8 +35030,8 @@
         </p:nvSpPr>
         <p:spPr>
           <a:xfrm>
-            <a:off x="4265066" y="1481328"/>
-            <a:ext cx="1757629" cy="3657600"/>
+            <a:off x="5026639" y="1481328"/>
+            <a:ext cx="2138415" cy="3657600"/>
           </a:xfrm>
           <a:prstGeom prst="roundRect">
             <a:avLst>
@@ -35078,8 +35078,8 @@
         </p:nvSpPr>
         <p:spPr>
           <a:xfrm>
-            <a:off x="4265066" y="1481328"/>
-            <a:ext cx="1757629" cy="384048"/>
+            <a:off x="5026639" y="1481328"/>
+            <a:ext cx="2138415" cy="384048"/>
           </a:xfrm>
           <a:prstGeom prst="rect">
             <a:avLst/>
@@ -35138,8 +35138,8 @@
         </p:nvSpPr>
         <p:spPr>
           <a:xfrm>
-            <a:off x="4365650" y="1920240"/>
-            <a:ext cx="1556461" cy="681101"/>
+            <a:off x="5127223" y="1920240"/>
+            <a:ext cx="1937247" cy="681101"/>
           </a:xfrm>
           <a:prstGeom prst="rect">
             <a:avLst/>
@@ -35184,8 +35184,8 @@
         </p:nvSpPr>
         <p:spPr>
           <a:xfrm>
-            <a:off x="4365650" y="2656205"/>
-            <a:ext cx="1556461" cy="2418714"/>
+            <a:off x="5127223" y="2656205"/>
+            <a:ext cx="1937247" cy="2418714"/>
           </a:xfrm>
           <a:prstGeom prst="rect">
             <a:avLst/>
@@ -35285,8 +35285,8 @@
         </p:nvSpPr>
         <p:spPr>
           <a:xfrm>
-            <a:off x="6168999" y="1481328"/>
-            <a:ext cx="1757629" cy="3657600"/>
+            <a:off x="7311359" y="1481328"/>
+            <a:ext cx="2138415" cy="3657600"/>
           </a:xfrm>
           <a:prstGeom prst="roundRect">
             <a:avLst>
@@ -35333,8 +35333,8 @@
         </p:nvSpPr>
         <p:spPr>
           <a:xfrm>
-            <a:off x="6168999" y="1481328"/>
-            <a:ext cx="1757629" cy="384048"/>
+            <a:off x="7311359" y="1481328"/>
+            <a:ext cx="2138415" cy="384048"/>
           </a:xfrm>
           <a:prstGeom prst="rect">
             <a:avLst/>
@@ -35393,8 +35393,8 @@
         </p:nvSpPr>
         <p:spPr>
           <a:xfrm>
-            <a:off x="6269583" y="1920240"/>
-            <a:ext cx="1556461" cy="681101"/>
+            <a:off x="7411943" y="1920240"/>
+            <a:ext cx="1937247" cy="681101"/>
           </a:xfrm>
           <a:prstGeom prst="rect">
             <a:avLst/>
@@ -35439,8 +35439,8 @@
         </p:nvSpPr>
         <p:spPr>
           <a:xfrm>
-            <a:off x="6269583" y="2656205"/>
-            <a:ext cx="1556461" cy="2418714"/>
+            <a:off x="7411943" y="2656205"/>
+            <a:ext cx="1937247" cy="2418714"/>
           </a:xfrm>
           <a:prstGeom prst="rect">
             <a:avLst/>
@@ -35540,8 +35540,8 @@
         </p:nvSpPr>
         <p:spPr>
           <a:xfrm>
-            <a:off x="8072932" y="1481328"/>
-            <a:ext cx="1757629" cy="3657600"/>
+            <a:off x="9596079" y="1481328"/>
+            <a:ext cx="2138415" cy="3657600"/>
           </a:xfrm>
           <a:prstGeom prst="roundRect">
             <a:avLst>
@@ -35588,8 +35588,8 @@
         </p:nvSpPr>
         <p:spPr>
           <a:xfrm>
-            <a:off x="8072932" y="1481328"/>
-            <a:ext cx="1757629" cy="384048"/>
+            <a:off x="9596079" y="1481328"/>
+            <a:ext cx="2138415" cy="384048"/>
           </a:xfrm>
           <a:prstGeom prst="rect">
             <a:avLst/>
@@ -35648,8 +35648,8 @@
         </p:nvSpPr>
         <p:spPr>
           <a:xfrm>
-            <a:off x="8173516" y="1920240"/>
-            <a:ext cx="1556461" cy="294386"/>
+            <a:off x="9696663" y="1920240"/>
+            <a:ext cx="1937247" cy="294386"/>
           </a:xfrm>
           <a:prstGeom prst="rect">
             <a:avLst/>
@@ -35691,8 +35691,8 @@
         </p:nvSpPr>
         <p:spPr>
           <a:xfrm>
-            <a:off x="8173516" y="2269490"/>
-            <a:ext cx="1556461" cy="2805429"/>
+            <a:off x="9696663" y="2269490"/>
+            <a:ext cx="1937247" cy="2805429"/>
           </a:xfrm>
           <a:prstGeom prst="rect">
             <a:avLst/>
@@ -35787,292 +35787,6 @@
       <p:sp>
         <p:nvSpPr>
           <p:cNvPr id="28" name="Rounded Rectangle 27"/>
-          <p:cNvSpPr/>
-          <p:nvPr/>
-        </p:nvSpPr>
-        <p:spPr>
-          <a:xfrm>
-            <a:off x="9976866" y="1481328"/>
-            <a:ext cx="1757629" cy="3657600"/>
-          </a:xfrm>
-          <a:prstGeom prst="roundRect">
-            <a:avLst>
-              <a:gd name="adj" fmla="val 12000"/>
-            </a:avLst>
-          </a:prstGeom>
-          <a:solidFill>
-            <a:srgbClr val="FFFFFF"/>
-          </a:solidFill>
-          <a:ln w="16510">
-            <a:solidFill>
-              <a:srgbClr val="0F766E"/>
-            </a:solidFill>
-          </a:ln>
-          <a:effectLst/>
-        </p:spPr>
-        <p:style>
-          <a:lnRef idx="1">
-            <a:schemeClr val="accent1"/>
-          </a:lnRef>
-          <a:fillRef idx="3">
-            <a:schemeClr val="accent1"/>
-          </a:fillRef>
-          <a:effectRef idx="2">
-            <a:schemeClr val="accent1"/>
-          </a:effectRef>
-          <a:fontRef idx="minor">
-            <a:schemeClr val="lt1"/>
-          </a:fontRef>
-        </p:style>
-        <p:txBody>
-          <a:bodyPr rtlCol="0" anchor="ctr" wrap="square"/>
-          <a:lstStyle/>
-          <a:p>
-            <a:pPr algn="ctr"/>
-          </a:p>
-        </p:txBody>
-      </p:sp>
-      <p:sp>
-        <p:nvSpPr>
-          <p:cNvPr id="29" name="Rectangle 28"/>
-          <p:cNvSpPr/>
-          <p:nvPr/>
-        </p:nvSpPr>
-        <p:spPr>
-          <a:xfrm>
-            <a:off x="9976866" y="1481328"/>
-            <a:ext cx="1757629" cy="384048"/>
-          </a:xfrm>
-          <a:prstGeom prst="rect">
-            <a:avLst/>
-          </a:prstGeom>
-          <a:solidFill>
-            <a:srgbClr val="0F766E"/>
-          </a:solidFill>
-          <a:ln>
-            <a:noFill/>
-          </a:ln>
-          <a:effectLst/>
-        </p:spPr>
-        <p:style>
-          <a:lnRef idx="1">
-            <a:schemeClr val="accent1"/>
-          </a:lnRef>
-          <a:fillRef idx="3">
-            <a:schemeClr val="accent1"/>
-          </a:fillRef>
-          <a:effectRef idx="2">
-            <a:schemeClr val="accent1"/>
-          </a:effectRef>
-          <a:fontRef idx="minor">
-            <a:schemeClr val="lt1"/>
-          </a:fontRef>
-        </p:style>
-        <p:txBody>
-          <a:bodyPr rtlCol="0" anchor="ctr" wrap="square" lIns="41148" rIns="41148" tIns="18288" bIns="18288"/>
-          <a:lstStyle/>
-          <a:p>
-            <a:pPr algn="ctr">
-              <a:lnSpc>
-                <a:spcPct val="116000"/>
-              </a:lnSpc>
-              <a:buNone/>
-            </a:pPr>
-            <a:r>
-              <a:rPr sz="1000" b="1">
-                <a:solidFill>
-                  <a:srgbClr val="FFFFFF"/>
-                </a:solidFill>
-                <a:latin typeface="Meiryo"/>
-                <a:cs typeface="Meiryo"/>
-                <a:ea typeface="Meiryo"/>
-              </a:rPr>
-              <a:t>日報AIの文面調整</a:t>
-            </a:r>
-          </a:p>
-        </p:txBody>
-      </p:sp>
-      <p:sp>
-        <p:nvSpPr>
-          <p:cNvPr id="30" name="TextBox 29"/>
-          <p:cNvSpPr txBox="1"/>
-          <p:nvPr/>
-        </p:nvSpPr>
-        <p:spPr>
-          <a:xfrm>
-            <a:off x="10077449" y="1920240"/>
-            <a:ext cx="1556461" cy="1325626"/>
-          </a:xfrm>
-          <a:prstGeom prst="rect">
-            <a:avLst/>
-          </a:prstGeom>
-          <a:noFill/>
-        </p:spPr>
-        <p:txBody>
-          <a:bodyPr wrap="square" lIns="0" rIns="0" tIns="0" bIns="0" anchor="t">
-            <a:spAutoFit/>
-          </a:bodyPr>
-          <a:lstStyle/>
-          <a:p>
-            <a:pPr algn="l">
-              <a:lnSpc>
-                <a:spcPct val="145000"/>
-              </a:lnSpc>
-              <a:buNone/>
-            </a:pPr>
-            <a:r>
-              <a:rPr sz="700" b="0" i="0">
-                <a:solidFill>
-                  <a:srgbClr val="0F766E"/>
-                </a:solidFill>
-                <a:latin typeface="Consolas"/>
-                <a:cs typeface="Consolas"/>
-                <a:ea typeface="Consolas"/>
-              </a:rPr>
-              <a:t>prompt_templates
-report_age_bands
-report_keywords
-report_age_band_keywords
-report_phrases
-report_education_levels
-report_stress_levels
-customer_report_profiles
-report_ai_generations
-report_ai_generation_keywords</a:t>
-            </a:r>
-          </a:p>
-        </p:txBody>
-      </p:sp>
-      <p:sp>
-        <p:nvSpPr>
-          <p:cNvPr id="31" name="TextBox 30"/>
-          <p:cNvSpPr txBox="1"/>
-          <p:nvPr/>
-        </p:nvSpPr>
-        <p:spPr>
-          <a:xfrm>
-            <a:off x="10077449" y="3300730"/>
-            <a:ext cx="1556461" cy="1774189"/>
-          </a:xfrm>
-          <a:prstGeom prst="rect">
-            <a:avLst/>
-          </a:prstGeom>
-          <a:noFill/>
-        </p:spPr>
-        <p:txBody>
-          <a:bodyPr wrap="square" lIns="0" rIns="0" tIns="0" bIns="0">
-            <a:spAutoFit/>
-          </a:bodyPr>
-          <a:lstStyle/>
-          <a:p>
-            <a:pPr marL="182880" indent="-182880">
-              <a:lnSpc>
-                <a:spcPct val="130000"/>
-              </a:lnSpc>
-              <a:spcBef>
-                <a:spcPts val="0"/>
-              </a:spcBef>
-              <a:buClr>
-                <a:srgbClr val="0F766E"/>
-              </a:buClr>
-              <a:buFont typeface="Meiryo"/>
-              <a:buChar char="▪"/>
-            </a:pPr>
-            <a:r>
-              <a:rPr sz="850" b="0">
-                <a:solidFill>
-                  <a:srgbClr val="14223A"/>
-                </a:solidFill>
-                <a:latin typeface="Meiryo"/>
-                <a:cs typeface="Meiryo"/>
-                <a:ea typeface="Meiryo"/>
-              </a:rPr>
-              <a:t>文面は版を積む。生成記録が版を指すので消せない</a:t>
-            </a:r>
-          </a:p>
-          <a:p>
-            <a:pPr marL="182880" indent="-182880">
-              <a:lnSpc>
-                <a:spcPct val="130000"/>
-              </a:lnSpc>
-              <a:spcBef>
-                <a:spcPts val="500"/>
-              </a:spcBef>
-              <a:buClr>
-                <a:srgbClr val="0F766E"/>
-              </a:buClr>
-              <a:buFont typeface="Meiryo"/>
-              <a:buChar char="▪"/>
-            </a:pPr>
-            <a:r>
-              <a:rPr sz="850" b="0">
-                <a:solidFill>
-                  <a:srgbClr val="14223A"/>
-                </a:solidFill>
-                <a:latin typeface="Meiryo"/>
-                <a:cs typeface="Meiryo"/>
-                <a:ea typeface="Meiryo"/>
-              </a:rPr>
-              <a:t>年齢帯 × 教育関心度★ × ストレス度の3軸で組み替える</a:t>
-            </a:r>
-          </a:p>
-          <a:p>
-            <a:pPr marL="182880" indent="-182880">
-              <a:lnSpc>
-                <a:spcPct val="130000"/>
-              </a:lnSpc>
-              <a:spcBef>
-                <a:spcPts val="500"/>
-              </a:spcBef>
-              <a:buClr>
-                <a:srgbClr val="0F766E"/>
-              </a:buClr>
-              <a:buFont typeface="Meiryo"/>
-              <a:buChar char="▪"/>
-            </a:pPr>
-            <a:r>
-              <a:rPr sz="850" b="0">
-                <a:solidFill>
-                  <a:srgbClr val="14223A"/>
-                </a:solidFill>
-                <a:latin typeface="Meiryo"/>
-                <a:cs typeface="Meiryo"/>
-                <a:ea typeface="Meiryo"/>
-              </a:rPr>
-              <a:t>ストレス度は★より優先。安全弁は列で持ち、★は customers に置かない</a:t>
-            </a:r>
-          </a:p>
-          <a:p>
-            <a:pPr marL="182880" indent="-182880">
-              <a:lnSpc>
-                <a:spcPct val="130000"/>
-              </a:lnSpc>
-              <a:spcBef>
-                <a:spcPts val="500"/>
-              </a:spcBef>
-              <a:buClr>
-                <a:srgbClr val="0F766E"/>
-              </a:buClr>
-              <a:buFont typeface="Meiryo"/>
-              <a:buChar char="▪"/>
-            </a:pPr>
-            <a:r>
-              <a:rPr sz="850" b="0">
-                <a:solidFill>
-                  <a:srgbClr val="14223A"/>
-                </a:solidFill>
-                <a:latin typeface="Meiryo"/>
-                <a:cs typeface="Meiryo"/>
-                <a:ea typeface="Meiryo"/>
-              </a:rPr>
-              <a:t>どの文面・どの語で作ったかを生成1回ごとに残す</a:t>
-            </a:r>
-          </a:p>
-        </p:txBody>
-      </p:sp>
-      <p:sp>
-        <p:nvSpPr>
-          <p:cNvPr id="32" name="Rounded Rectangle 31"/>
           <p:cNvSpPr/>
           <p:nvPr/>
         </p:nvSpPr>
@@ -36120,7 +35834,7 @@
       </p:sp>
       <p:sp>
         <p:nvSpPr>
-          <p:cNvPr id="33" name="Rectangle 32"/>
+          <p:cNvPr id="29" name="Rectangle 28"/>
           <p:cNvSpPr/>
           <p:nvPr/>
         </p:nvSpPr>
@@ -36164,7 +35878,7 @@
       </p:sp>
       <p:sp>
         <p:nvSpPr>
-          <p:cNvPr id="34" name="TextBox 33"/>
+          <p:cNvPr id="30" name="TextBox 29"/>
           <p:cNvSpPr txBox="1"/>
           <p:nvPr/>
         </p:nvSpPr>
@@ -36206,7 +35920,7 @@
       </p:sp>
       <p:sp>
         <p:nvSpPr>
-          <p:cNvPr id="35" name="TextBox 34"/>
+          <p:cNvPr id="31" name="TextBox 30"/>
           <p:cNvSpPr txBox="1"/>
           <p:nvPr/>
         </p:nvSpPr>
@@ -36255,7 +35969,7 @@
       </p:sp>
       <p:sp>
         <p:nvSpPr>
-          <p:cNvPr id="36" name="Rounded Rectangle 35"/>
+          <p:cNvPr id="32" name="Rounded Rectangle 31"/>
           <p:cNvSpPr/>
           <p:nvPr/>
         </p:nvSpPr>
@@ -36301,7 +36015,7 @@
       </p:sp>
       <p:sp>
         <p:nvSpPr>
-          <p:cNvPr id="37" name="Rectangle 36"/>
+          <p:cNvPr id="33" name="Rectangle 32"/>
           <p:cNvSpPr/>
           <p:nvPr/>
         </p:nvSpPr>
@@ -36345,7 +36059,7 @@
       </p:sp>
       <p:sp>
         <p:nvSpPr>
-          <p:cNvPr id="38" name="TextBox 37"/>
+          <p:cNvPr id="34" name="TextBox 33"/>
           <p:cNvSpPr txBox="1"/>
           <p:nvPr/>
         </p:nvSpPr>
@@ -36387,7 +36101,7 @@
       </p:sp>
       <p:sp>
         <p:nvSpPr>
-          <p:cNvPr id="39" name="TextBox 38"/>
+          <p:cNvPr id="35" name="TextBox 34"/>
           <p:cNvSpPr txBox="1"/>
           <p:nvPr/>
         </p:nvSpPr>
@@ -36526,7 +36240,7 @@
                 <a:cs typeface="Meiryo"/>
                 <a:ea typeface="Meiryo"/>
               </a:rPr>
-              <a:t>追加した6領域で迷った判断</a:t>
+              <a:t>追加した5領域で迷った判断</a:t>
             </a:r>
             <a:r>
               <a:rPr sz="1250" b="0" i="0">
@@ -36672,7 +36386,7 @@
         </p:nvGraphicFramePr>
         <p:xfrm>
           <a:off x="457200" y="1115568"/>
-          <a:ext cx="11277293" cy="4297680"/>
+          <a:ext cx="11277293" cy="3291840"/>
         </p:xfrm>
         <a:graphic>
           <a:graphicData uri="http://schemas.openxmlformats.org/drawingml/2006/table">
@@ -37540,250 +37254,6 @@
                   </a:tcPr>
                 </a:tc>
               </a:tr>
-              <a:tr h="502920">
-                <a:tc>
-                  <a:txBody>
-                    <a:bodyPr wrap="square"/>
-                    <a:lstStyle/>
-                    <a:p>
-                      <a:pPr algn="l">
-                        <a:lnSpc>
-                          <a:spcPct val="115000"/>
-                        </a:lnSpc>
-                        <a:buNone/>
-                      </a:pPr>
-                      <a:r>
-                        <a:rPr sz="900" b="1">
-                          <a:solidFill>
-                            <a:srgbClr val="14223A"/>
-                          </a:solidFill>
-                          <a:latin typeface="Meiryo"/>
-                          <a:cs typeface="Meiryo"/>
-                          <a:ea typeface="Meiryo"/>
-                        </a:rPr>
-                        <a:t>ストレス度を既存の risk_rating 列に載せた</a:t>
-                      </a:r>
-                    </a:p>
-                  </a:txBody>
-                  <a:tcPr marL="64008" marR="64008" marT="27432" marB="27432" anchor="ctr">
-                    <a:solidFill>
-                      <a:srgbClr val="FFFFFF"/>
-                    </a:solidFill>
-                  </a:tcPr>
-                </a:tc>
-                <a:tc>
-                  <a:txBody>
-                    <a:bodyPr wrap="square"/>
-                    <a:lstStyle/>
-                    <a:p>
-                      <a:pPr algn="ctr">
-                        <a:lnSpc>
-                          <a:spcPct val="115000"/>
-                        </a:lnSpc>
-                        <a:buNone/>
-                      </a:pPr>
-                      <a:r>
-                        <a:rPr sz="900" b="0">
-                          <a:solidFill>
-                            <a:srgbClr val="0F766E"/>
-                          </a:solidFill>
-                          <a:latin typeface="Meiryo"/>
-                          <a:cs typeface="Meiryo"/>
-                          <a:ea typeface="Meiryo"/>
-                        </a:rPr>
-                        <a:t>日報AI</a:t>
-                      </a:r>
-                    </a:p>
-                  </a:txBody>
-                  <a:tcPr marL="64008" marR="64008" marT="27432" marB="27432" anchor="ctr">
-                    <a:solidFill>
-                      <a:srgbClr val="FFFFFF"/>
-                    </a:solidFill>
-                  </a:tcPr>
-                </a:tc>
-                <a:tc>
-                  <a:txBody>
-                    <a:bodyPr wrap="square"/>
-                    <a:lstStyle/>
-                    <a:p>
-                      <a:pPr algn="l">
-                        <a:lnSpc>
-                          <a:spcPct val="115000"/>
-                        </a:lnSpc>
-                        <a:buNone/>
-                      </a:pPr>
-                      <a:r>
-                        <a:rPr sz="900" b="0">
-                          <a:solidFill>
-                            <a:srgbClr val="14223A"/>
-                          </a:solidFill>
-                          <a:latin typeface="Meiryo"/>
-                          <a:cs typeface="Meiryo"/>
-                          <a:ea typeface="Meiryo"/>
-                        </a:rPr>
-                        <a:t>GAS版のRisk列(PSI評価)をそのまま使い、列名は変えていない(ミラー送信と画面が参照するため)</a:t>
-                      </a:r>
-                    </a:p>
-                  </a:txBody>
-                  <a:tcPr marL="64008" marR="64008" marT="27432" marB="27432" anchor="ctr">
-                    <a:solidFill>
-                      <a:srgbClr val="FFFFFF"/>
-                    </a:solidFill>
-                  </a:tcPr>
-                </a:tc>
-                <a:tc>
-                  <a:txBody>
-                    <a:bodyPr wrap="square"/>
-                    <a:lstStyle/>
-                    <a:p>
-                      <a:pPr algn="l">
-                        <a:lnSpc>
-                          <a:spcPct val="115000"/>
-                        </a:lnSpc>
-                        <a:buNone/>
-                      </a:pPr>
-                      <a:r>
-                        <a:rPr sz="900" b="0">
-                          <a:solidFill>
-                            <a:srgbClr val="14223A"/>
-                          </a:solidFill>
-                          <a:latin typeface="Meiryo"/>
-                          <a:cs typeface="Meiryo"/>
-                          <a:ea typeface="Meiryo"/>
-                        </a:rPr>
-                        <a:t>名前と意味のずれを許容してよいか、stress_level に改名すべきか(運用前なので改名は可能)</a:t>
-                      </a:r>
-                    </a:p>
-                  </a:txBody>
-                  <a:tcPr marL="64008" marR="64008" marT="27432" marB="27432" anchor="ctr">
-                    <a:solidFill>
-                      <a:srgbClr val="FFFFFF"/>
-                    </a:solidFill>
-                  </a:tcPr>
-                </a:tc>
-              </a:tr>
-              <a:tr h="502920">
-                <a:tc>
-                  <a:txBody>
-                    <a:bodyPr wrap="square"/>
-                    <a:lstStyle/>
-                    <a:p>
-                      <a:pPr algn="l">
-                        <a:lnSpc>
-                          <a:spcPct val="115000"/>
-                        </a:lnSpc>
-                        <a:buNone/>
-                      </a:pPr>
-                      <a:r>
-                        <a:rPr sz="900" b="1">
-                          <a:solidFill>
-                            <a:srgbClr val="14223A"/>
-                          </a:solidFill>
-                          <a:latin typeface="Meiryo"/>
-                          <a:cs typeface="Meiryo"/>
-                          <a:ea typeface="Meiryo"/>
-                        </a:rPr>
-                        <a:t>キーワードの候補をコードで絞り、AIに表を渡さない</a:t>
-                      </a:r>
-                    </a:p>
-                  </a:txBody>
-                  <a:tcPr marL="64008" marR="64008" marT="27432" marB="27432" anchor="ctr">
-                    <a:solidFill>
-                      <a:srgbClr val="F8FAFC"/>
-                    </a:solidFill>
-                  </a:tcPr>
-                </a:tc>
-                <a:tc>
-                  <a:txBody>
-                    <a:bodyPr wrap="square"/>
-                    <a:lstStyle/>
-                    <a:p>
-                      <a:pPr algn="ctr">
-                        <a:lnSpc>
-                          <a:spcPct val="115000"/>
-                        </a:lnSpc>
-                        <a:buNone/>
-                      </a:pPr>
-                      <a:r>
-                        <a:rPr sz="900" b="0">
-                          <a:solidFill>
-                            <a:srgbClr val="0F766E"/>
-                          </a:solidFill>
-                          <a:latin typeface="Meiryo"/>
-                          <a:cs typeface="Meiryo"/>
-                          <a:ea typeface="Meiryo"/>
-                        </a:rPr>
-                        <a:t>日報AI</a:t>
-                      </a:r>
-                    </a:p>
-                  </a:txBody>
-                  <a:tcPr marL="64008" marR="64008" marT="27432" marB="27432" anchor="ctr">
-                    <a:solidFill>
-                      <a:srgbClr val="F8FAFC"/>
-                    </a:solidFill>
-                  </a:tcPr>
-                </a:tc>
-                <a:tc>
-                  <a:txBody>
-                    <a:bodyPr wrap="square"/>
-                    <a:lstStyle/>
-                    <a:p>
-                      <a:pPr algn="l">
-                        <a:lnSpc>
-                          <a:spcPct val="115000"/>
-                        </a:lnSpc>
-                        <a:buNone/>
-                      </a:pPr>
-                      <a:r>
-                        <a:rPr sz="900" b="0">
-                          <a:solidFill>
-                            <a:srgbClr val="14223A"/>
-                          </a:solidFill>
-                          <a:latin typeface="Meiryo"/>
-                          <a:cs typeface="Meiryo"/>
-                          <a:ea typeface="Meiryo"/>
-                        </a:rPr>
-                        <a:t>月齢・★の範囲・ストレス度の下限の3条件を満たす語だけを提示する。決定性と検証のしやすさを優先した</a:t>
-                      </a:r>
-                    </a:p>
-                  </a:txBody>
-                  <a:tcPr marL="64008" marR="64008" marT="27432" marB="27432" anchor="ctr">
-                    <a:solidFill>
-                      <a:srgbClr val="F8FAFC"/>
-                    </a:solidFill>
-                  </a:tcPr>
-                </a:tc>
-                <a:tc>
-                  <a:txBody>
-                    <a:bodyPr wrap="square"/>
-                    <a:lstStyle/>
-                    <a:p>
-                      <a:pPr algn="l">
-                        <a:lnSpc>
-                          <a:spcPct val="115000"/>
-                        </a:lnSpc>
-                        <a:buNone/>
-                      </a:pPr>
-                      <a:r>
-                        <a:rPr sz="900" b="0">
-                          <a:solidFill>
-                            <a:srgbClr val="14223A"/>
-                          </a:solidFill>
-                          <a:latin typeface="Meiryo"/>
-                          <a:cs typeface="Meiryo"/>
-                          <a:ea typeface="Meiryo"/>
-                        </a:rPr>
-                        <a:t>AIの裁量(表全体から選ばせる)を狭める判断の是非と、候補上限(既定6語)の妥当性</a:t>
-                      </a:r>
-                    </a:p>
-                  </a:txBody>
-                  <a:tcPr marL="64008" marR="64008" marT="27432" marB="27432" anchor="ctr">
-                    <a:solidFill>
-                      <a:srgbClr val="F8FAFC"/>
-                    </a:solidFill>
-                  </a:tcPr>
-                </a:tc>
-              </a:tr>
             </a:tbl>
           </a:graphicData>
         </a:graphic>
@@ -37957,7 +37427,7 @@
                 <a:cs typeface="Meiryo"/>
                 <a:ea typeface="Meiryo"/>
               </a:rPr>
-              <a:t>この8件について、より一般的な作り方があればご教示ください。とくにEAVは「項目が決まっていないから」という理由で選びましたが、後戻りしにくい選択だと考えています。</a:t>
+              <a:t>この6件について、より一般的な作り方があればご教示ください。とくにEAVは「項目が決まっていないから」という理由で選びましたが、後戻りしにくい選択だと考えています。</a:t>
             </a:r>
           </a:p>
         </p:txBody>
@@ -38072,7 +37542,7 @@
                 <a:cs typeface="Meiryo"/>
                 <a:ea typeface="Meiryo"/>
               </a:rPr>
-              <a:t>   優先度順。特に伺いたいのは ①②③⑩</a:t>
+              <a:t>   優先度順。特に伺いたいのは ①②③⑨</a:t>
             </a:r>
           </a:p>
         </p:txBody>
@@ -38207,7 +37677,7 @@
         </p:nvGraphicFramePr>
         <p:xfrm>
           <a:off x="457200" y="1152144"/>
-          <a:ext cx="11277292" cy="4224528"/>
+          <a:ext cx="11277292" cy="4242816"/>
         </p:xfrm>
         <a:graphic>
           <a:graphicData uri="http://schemas.openxmlformats.org/drawingml/2006/table">
@@ -38343,7 +37813,7 @@
                   </a:tcPr>
                 </a:tc>
               </a:tr>
-              <a:tr h="393192">
+              <a:tr h="438912">
                 <a:tc>
                   <a:txBody>
                     <a:bodyPr wrap="square"/>
@@ -38465,7 +37935,7 @@
                   </a:tcPr>
                 </a:tc>
               </a:tr>
-              <a:tr h="393192">
+              <a:tr h="438912">
                 <a:tc>
                   <a:txBody>
                     <a:bodyPr wrap="square"/>
@@ -38587,7 +38057,7 @@
                   </a:tcPr>
                 </a:tc>
               </a:tr>
-              <a:tr h="393192">
+              <a:tr h="438912">
                 <a:tc>
                   <a:txBody>
                     <a:bodyPr wrap="square"/>
@@ -38638,7 +38108,7 @@
                           <a:cs typeface="Meiryo"/>
                           <a:ea typeface="Meiryo"/>
                         </a:rPr>
-                        <a:t>予約の二重取りをどこで止めるか</a:t>
+                        <a:t>範囲の重なりをどこで止めるか(予約・単価・年齢帯)</a:t>
                       </a:r>
                     </a:p>
                   </a:txBody>
@@ -38668,7 +38138,7 @@
                           <a:cs typeface="Meiryo"/>
                           <a:ea typeface="Meiryo"/>
                         </a:rPr>
-                        <a:t>22</a:t>
+                        <a:t>22・11</a:t>
                       </a:r>
                     </a:p>
                   </a:txBody>
@@ -38698,7 +38168,7 @@
                           <a:cs typeface="Meiryo"/>
                           <a:ea typeface="Meiryo"/>
                         </a:rPr>
-                        <a:t>EXCLUDE制約が使えない(テスト環境に拡張が無い)。本番だけ張る / アプリで直列化 / 固定スロット / 運用で検知</a:t>
+                        <a:t>EXCLUDE制約が使えない(テスト環境に拡張が無い)ため3箇所とも入口(usecase)で担保している。本番だけ張る / アプリで直列化 / 固定スロット / 運用で検知、のどれを採るべきか</a:t>
                       </a:r>
                     </a:p>
                   </a:txBody>
@@ -38709,7 +38179,7 @@
                   </a:tcPr>
                 </a:tc>
               </a:tr>
-              <a:tr h="393192">
+              <a:tr h="438912">
                 <a:tc>
                   <a:txBody>
                     <a:bodyPr wrap="square"/>
@@ -38831,7 +38301,7 @@
                   </a:tcPr>
                 </a:tc>
               </a:tr>
-              <a:tr h="393192">
+              <a:tr h="438912">
                 <a:tc>
                   <a:txBody>
                     <a:bodyPr wrap="square"/>
@@ -38953,7 +38423,7 @@
                   </a:tcPr>
                 </a:tc>
               </a:tr>
-              <a:tr h="393192">
+              <a:tr h="438912">
                 <a:tc>
                   <a:txBody>
                     <a:bodyPr wrap="square"/>
@@ -39075,7 +38545,7 @@
                   </a:tcPr>
                 </a:tc>
               </a:tr>
-              <a:tr h="393192">
+              <a:tr h="438912">
                 <a:tc>
                   <a:txBody>
                     <a:bodyPr wrap="square"/>
@@ -39186,7 +38656,7 @@
                           <a:cs typeface="Meiryo"/>
                           <a:ea typeface="Meiryo"/>
                         </a:rPr>
-                        <a:t>要件が固まる前に作った27テーブルは、結局作り直しになるか</a:t>
+                        <a:t>要件が固まる前に作った18テーブルは、結局作り直しになるか</a:t>
                       </a:r>
                     </a:p>
                   </a:txBody>
@@ -39197,7 +38667,7 @@
                   </a:tcPr>
                 </a:tc>
               </a:tr>
-              <a:tr h="393192">
+              <a:tr h="438912">
                 <a:tc>
                   <a:txBody>
                     <a:bodyPr wrap="square"/>
@@ -39248,7 +38718,7 @@
                           <a:cs typeface="Meiryo"/>
                           <a:ea typeface="Meiryo"/>
                         </a:rPr>
-                        <a:t>追加6領域で迷った8つの判断</a:t>
+                        <a:t>追加5領域で迷った6つの判断</a:t>
                       </a:r>
                     </a:p>
                   </a:txBody>
@@ -39308,7 +38778,7 @@
                           <a:cs typeface="Meiryo"/>
                           <a:ea typeface="Meiryo"/>
                         </a:rPr>
-                        <a:t>EAV・請求書のvoid・Stripeの語彙・並び順・手当の粒度・取込元キー・risk_rating の名前・候補の絞り込み</a:t>
+                        <a:t>EAV・請求書のvoid・Stripeの語彙・並び順・手当の粒度・取込元キー</a:t>
                       </a:r>
                     </a:p>
                   </a:txBody>
@@ -39319,7 +38789,7 @@
                   </a:tcPr>
                 </a:tc>
               </a:tr>
-              <a:tr h="393192">
+              <a:tr h="438912">
                 <a:tc>
                   <a:txBody>
                     <a:bodyPr wrap="square"/>
@@ -39334,7 +38804,7 @@
                       <a:r>
                         <a:rPr sz="1000" b="0">
                           <a:solidFill>
-                            <a:srgbClr val="0369A1"/>
+                            <a:srgbClr val="B91C1C"/>
                           </a:solidFill>
                           <a:latin typeface="Meiryo"/>
                           <a:cs typeface="Meiryo"/>
@@ -39370,7 +38840,7 @@
                           <a:cs typeface="Meiryo"/>
                           <a:ea typeface="Meiryo"/>
                         </a:rPr>
-                        <a:t>日報AIの記録をどこまで残すか</a:t>
+                        <a:t>見落としているPostgreSQLの落とし穴</a:t>
                       </a:r>
                     </a:p>
                   </a:txBody>
@@ -39400,7 +38870,7 @@
                           <a:cs typeface="Meiryo"/>
                           <a:ea typeface="Meiryo"/>
                         </a:rPr>
-                        <a:t>11・28</a:t>
+                        <a:t>13・14</a:t>
                       </a:r>
                     </a:p>
                   </a:txBody>
@@ -39430,7 +38900,7 @@
                           <a:cs typeface="Meiryo"/>
                           <a:ea typeface="Meiryo"/>
                         </a:rPr>
-                        <a:t>入力メモとAIの生出力を生成1回ごとに残すため日報本文より嵩む。保持期間を決めるか、保存分だけにするか</a:t>
+                        <a:t>複合外部キー + RLS の二重防御で塞いだつもりだが、他に仕様上の抜け道はないか</a:t>
                       </a:r>
                     </a:p>
                   </a:txBody>
@@ -39441,128 +38911,6 @@
                   </a:tcPr>
                 </a:tc>
               </a:tr>
-              <a:tr h="393192">
-                <a:tc>
-                  <a:txBody>
-                    <a:bodyPr wrap="square"/>
-                    <a:lstStyle/>
-                    <a:p>
-                      <a:pPr algn="ctr">
-                        <a:lnSpc>
-                          <a:spcPct val="115000"/>
-                        </a:lnSpc>
-                        <a:buNone/>
-                      </a:pPr>
-                      <a:r>
-                        <a:rPr sz="1000" b="0">
-                          <a:solidFill>
-                            <a:srgbClr val="B91C1C"/>
-                          </a:solidFill>
-                          <a:latin typeface="Meiryo"/>
-                          <a:cs typeface="Meiryo"/>
-                          <a:ea typeface="Meiryo"/>
-                        </a:rPr>
-                        <a:t>⑩</a:t>
-                      </a:r>
-                    </a:p>
-                  </a:txBody>
-                  <a:tcPr marL="64008" marR="64008" marT="27432" marB="27432" anchor="ctr">
-                    <a:solidFill>
-                      <a:srgbClr val="F8FAFC"/>
-                    </a:solidFill>
-                  </a:tcPr>
-                </a:tc>
-                <a:tc>
-                  <a:txBody>
-                    <a:bodyPr wrap="square"/>
-                    <a:lstStyle/>
-                    <a:p>
-                      <a:pPr algn="l">
-                        <a:lnSpc>
-                          <a:spcPct val="115000"/>
-                        </a:lnSpc>
-                        <a:buNone/>
-                      </a:pPr>
-                      <a:r>
-                        <a:rPr sz="1000" b="0">
-                          <a:solidFill>
-                            <a:srgbClr val="14223A"/>
-                          </a:solidFill>
-                          <a:latin typeface="Meiryo"/>
-                          <a:cs typeface="Meiryo"/>
-                          <a:ea typeface="Meiryo"/>
-                        </a:rPr>
-                        <a:t>見落としているPostgreSQLの落とし穴</a:t>
-                      </a:r>
-                    </a:p>
-                  </a:txBody>
-                  <a:tcPr marL="64008" marR="64008" marT="27432" marB="27432" anchor="ctr">
-                    <a:solidFill>
-                      <a:srgbClr val="F8FAFC"/>
-                    </a:solidFill>
-                  </a:tcPr>
-                </a:tc>
-                <a:tc>
-                  <a:txBody>
-                    <a:bodyPr wrap="square"/>
-                    <a:lstStyle/>
-                    <a:p>
-                      <a:pPr algn="ctr">
-                        <a:lnSpc>
-                          <a:spcPct val="115000"/>
-                        </a:lnSpc>
-                        <a:buNone/>
-                      </a:pPr>
-                      <a:r>
-                        <a:rPr sz="1000" b="0">
-                          <a:solidFill>
-                            <a:srgbClr val="14223A"/>
-                          </a:solidFill>
-                          <a:latin typeface="Meiryo"/>
-                          <a:cs typeface="Meiryo"/>
-                          <a:ea typeface="Meiryo"/>
-                        </a:rPr>
-                        <a:t>13・14</a:t>
-                      </a:r>
-                    </a:p>
-                  </a:txBody>
-                  <a:tcPr marL="64008" marR="64008" marT="27432" marB="27432" anchor="ctr">
-                    <a:solidFill>
-                      <a:srgbClr val="F8FAFC"/>
-                    </a:solidFill>
-                  </a:tcPr>
-                </a:tc>
-                <a:tc>
-                  <a:txBody>
-                    <a:bodyPr wrap="square"/>
-                    <a:lstStyle/>
-                    <a:p>
-                      <a:pPr algn="l">
-                        <a:lnSpc>
-                          <a:spcPct val="115000"/>
-                        </a:lnSpc>
-                        <a:buNone/>
-                      </a:pPr>
-                      <a:r>
-                        <a:rPr sz="1000" b="0">
-                          <a:solidFill>
-                            <a:srgbClr val="14223A"/>
-                          </a:solidFill>
-                          <a:latin typeface="Meiryo"/>
-                          <a:cs typeface="Meiryo"/>
-                          <a:ea typeface="Meiryo"/>
-                        </a:rPr>
-                        <a:t>複合外部キー + RLS の二重防御で塞いだつもりだが、他に仕様上の抜け道はないか</a:t>
-                      </a:r>
-                    </a:p>
-                  </a:txBody>
-                  <a:tcPr marL="64008" marR="64008" marT="27432" marB="27432" anchor="ctr">
-                    <a:solidFill>
-                      <a:srgbClr val="F8FAFC"/>
-                    </a:solidFill>
-                  </a:tcPr>
-                </a:tc>
-              </a:tr>
             </a:tbl>
           </a:graphicData>
         </a:graphic>
@@ -39736,7 +39084,7 @@
                 <a:cs typeface="Meiryo"/>
                 <a:ea typeface="Meiryo"/>
               </a:rPr>
-              <a:t>⑩のような「自分では気づきようがない落とし穴」が、他にもあるかどうかを知りたいです。①〜⑨は選択肢が見えている判断ですが、⑩は見えていないものを指摘いただく必要があります。</a:t>
+              <a:t>⑨のような「自分では気づきようがない落とし穴」が、他にもあるかどうかを知りたいです。①〜⑧は選択肢が見えている判断ですが、⑨は見えていないものを指摘いただく必要があります。</a:t>
             </a:r>
           </a:p>
         </p:txBody>
@@ -40510,7 +39858,7 @@
                 <a:cs typeface="Meiryo"/>
                 <a:ea typeface="Meiryo"/>
               </a:rPr>
-              <a:t>  業務ロジックが外部に求める窓口の定義(30本)</a:t>
+              <a:t>  業務ロジックが外部に求める窓口の定義(33本)</a:t>
             </a:r>
           </a:p>
         </p:txBody>
@@ -40778,7 +40126,7 @@
                 <a:cs typeface="Meiryo"/>
                 <a:ea typeface="Meiryo"/>
               </a:rPr>
-              <a:t>  第4章の27テーブルの設計理由と、未決の論点</a:t>
+              <a:t>  先行整備5領域(18テーブル)・日報AI3軸(10テーブル)の設計理由と、未決の論点</a:t>
             </a:r>
           </a:p>
           <a:p>
@@ -47384,7 +46732,7 @@
                 <a:cs typeface="Meiryo"/>
                 <a:ea typeface="Meiryo"/>
               </a:rPr>
-              <a:t>この①〜④の外側に、先に形だけ固めた6領域がある</a:t>
+              <a:t>この①〜④の外側に、先に形だけ固めた5領域がある</a:t>
             </a:r>
           </a:p>
         </p:txBody>
@@ -47433,7 +46781,7 @@
                 <a:cs typeface="Meiryo"/>
                 <a:ea typeface="Meiryo"/>
               </a:rPr>
-              <a:t>予約 / 請求・決済 / 顧客カルテ / 訪問割当の最適化 / 移動手段別の手当 / 日報AIのプロンプト調整。表と制約を先に用意してあり、この資料の第4章で扱う(文面の版管理だけは稼働中)</a:t>
+              <a:t>予約 / 請求・決済 / 顧客カルテ / 訪問割当の最適化 / 移動手段別の手当。表と制約を先に用意してあり、この資料の第4章で扱う(日報AIのプロンプト調整は3軸まで実装済みで、この5領域には含めない)</a:t>
             </a:r>
           </a:p>
         </p:txBody>
@@ -47722,7 +47070,7 @@
                 <a:cs typeface="Meiryo"/>
                 <a:ea typeface="Meiryo"/>
               </a:rPr>
-              <a:t>   業務ドメインごとに12のまとまり。tenants以外の43枚はすべて同じ形を守る</a:t>
+              <a:t>   業務ドメインごとに11のまとまり。tenants以外の43枚はすべて同じ形を守る</a:t>
             </a:r>
           </a:p>
         </p:txBody>
@@ -48132,7 +47480,7 @@
                 <a:cs typeface="Meiryo"/>
                 <a:ea typeface="Meiryo"/>
               </a:rPr>
-              <a:t>稼働中 — アプリが読み書きしている17枚</a:t>
+              <a:t>稼働中 — アプリが読み書きしている26枚</a:t>
             </a:r>
           </a:p>
         </p:txBody>
@@ -49001,7 +48349,7 @@
                 <a:cs typeface="Meiryo"/>
                 <a:ea typeface="Meiryo"/>
               </a:rPr>
-              <a:t>日報AIの文面 (1)</a:t>
+              <a:t>日報AI(3軸+文面) (10)</a:t>
             </a:r>
           </a:p>
         </p:txBody>
@@ -49043,7 +48391,16 @@
                 <a:cs typeface="Consolas"/>
                 <a:ea typeface="Consolas"/>
               </a:rPr>
-              <a:t>prompt_templates</a:t>
+              <a:t>prompt_templates
+report_age_bands
+report_keywords
+report_age_band_keywords
+report_education_levels
+report_stress_levels
+report_phrases
+customer_report_profiles
+report_ai_generations
+report_ai_generation_keywords</a:t>
             </a:r>
           </a:p>
         </p:txBody>
@@ -49085,7 +48442,7 @@
                 <a:cs typeface="Meiryo"/>
                 <a:ea typeface="Meiryo"/>
               </a:rPr>
-              <a:t>スキーマだけ先に用意 — 表と制約はあるが、実装・API・画面はこれから(27枚)</a:t>
+              <a:t>スキーマだけ先に用意 — 表と制約はあるが、実装・API・画面はこれから(18枚)</a:t>
             </a:r>
           </a:p>
         </p:txBody>
@@ -49099,7 +48456,7 @@
         <p:spPr>
           <a:xfrm>
             <a:off x="457200" y="3218688"/>
-            <a:ext cx="1757629" cy="2212848"/>
+            <a:ext cx="2138415" cy="2212848"/>
           </a:xfrm>
           <a:prstGeom prst="roundRect">
             <a:avLst>
@@ -49147,7 +48504,7 @@
         <p:spPr>
           <a:xfrm>
             <a:off x="457200" y="3218688"/>
-            <a:ext cx="1757629" cy="347472"/>
+            <a:ext cx="2138415" cy="347472"/>
           </a:xfrm>
           <a:prstGeom prst="rect">
             <a:avLst/>
@@ -49207,7 +48564,7 @@
         <p:spPr>
           <a:xfrm>
             <a:off x="539496" y="3630168"/>
-            <a:ext cx="1593037" cy="1728216"/>
+            <a:ext cx="1973823" cy="1728216"/>
           </a:xfrm>
           <a:prstGeom prst="rect">
             <a:avLst/>
@@ -49249,8 +48606,8 @@
         </p:nvSpPr>
         <p:spPr>
           <a:xfrm>
-            <a:off x="2361133" y="3218688"/>
-            <a:ext cx="1757629" cy="2212848"/>
+            <a:off x="2741919" y="3218688"/>
+            <a:ext cx="2138415" cy="2212848"/>
           </a:xfrm>
           <a:prstGeom prst="roundRect">
             <a:avLst>
@@ -49297,8 +48654,8 @@
         </p:nvSpPr>
         <p:spPr>
           <a:xfrm>
-            <a:off x="2361133" y="3218688"/>
-            <a:ext cx="1757629" cy="347472"/>
+            <a:off x="2741919" y="3218688"/>
+            <a:ext cx="2138415" cy="347472"/>
           </a:xfrm>
           <a:prstGeom prst="rect">
             <a:avLst/>
@@ -49357,8 +48714,8 @@
         </p:nvSpPr>
         <p:spPr>
           <a:xfrm>
-            <a:off x="2443429" y="3630168"/>
-            <a:ext cx="1593037" cy="1728216"/>
+            <a:off x="2824215" y="3630168"/>
+            <a:ext cx="1973823" cy="1728216"/>
           </a:xfrm>
           <a:prstGeom prst="rect">
             <a:avLst/>
@@ -49402,8 +48759,8 @@
         </p:nvSpPr>
         <p:spPr>
           <a:xfrm>
-            <a:off x="4265066" y="3218688"/>
-            <a:ext cx="1757629" cy="2212848"/>
+            <a:off x="5026639" y="3218688"/>
+            <a:ext cx="2138415" cy="2212848"/>
           </a:xfrm>
           <a:prstGeom prst="roundRect">
             <a:avLst>
@@ -49450,8 +48807,8 @@
         </p:nvSpPr>
         <p:spPr>
           <a:xfrm>
-            <a:off x="4265066" y="3218688"/>
-            <a:ext cx="1757629" cy="347472"/>
+            <a:off x="5026639" y="3218688"/>
+            <a:ext cx="2138415" cy="347472"/>
           </a:xfrm>
           <a:prstGeom prst="rect">
             <a:avLst/>
@@ -49510,8 +48867,8 @@
         </p:nvSpPr>
         <p:spPr>
           <a:xfrm>
-            <a:off x="4347362" y="3630168"/>
-            <a:ext cx="1593037" cy="1728216"/>
+            <a:off x="5108935" y="3630168"/>
+            <a:ext cx="1973823" cy="1728216"/>
           </a:xfrm>
           <a:prstGeom prst="rect">
             <a:avLst/>
@@ -49556,8 +48913,8 @@
         </p:nvSpPr>
         <p:spPr>
           <a:xfrm>
-            <a:off x="6168999" y="3218688"/>
-            <a:ext cx="1757629" cy="2212848"/>
+            <a:off x="7311359" y="3218688"/>
+            <a:ext cx="2138415" cy="2212848"/>
           </a:xfrm>
           <a:prstGeom prst="roundRect">
             <a:avLst>
@@ -49604,8 +48961,8 @@
         </p:nvSpPr>
         <p:spPr>
           <a:xfrm>
-            <a:off x="6168999" y="3218688"/>
-            <a:ext cx="1757629" cy="347472"/>
+            <a:off x="7311359" y="3218688"/>
+            <a:ext cx="2138415" cy="347472"/>
           </a:xfrm>
           <a:prstGeom prst="rect">
             <a:avLst/>
@@ -49664,8 +49021,8 @@
         </p:nvSpPr>
         <p:spPr>
           <a:xfrm>
-            <a:off x="6251295" y="3630168"/>
-            <a:ext cx="1593037" cy="1728216"/>
+            <a:off x="7393655" y="3630168"/>
+            <a:ext cx="1973823" cy="1728216"/>
           </a:xfrm>
           <a:prstGeom prst="rect">
             <a:avLst/>
@@ -49710,8 +49067,8 @@
         </p:nvSpPr>
         <p:spPr>
           <a:xfrm>
-            <a:off x="8072932" y="3218688"/>
-            <a:ext cx="1757629" cy="2212848"/>
+            <a:off x="9596079" y="3218688"/>
+            <a:ext cx="2138415" cy="2212848"/>
           </a:xfrm>
           <a:prstGeom prst="roundRect">
             <a:avLst>
@@ -49758,8 +49115,8 @@
         </p:nvSpPr>
         <p:spPr>
           <a:xfrm>
-            <a:off x="8072932" y="3218688"/>
-            <a:ext cx="1757629" cy="347472"/>
+            <a:off x="9596079" y="3218688"/>
+            <a:ext cx="2138415" cy="347472"/>
           </a:xfrm>
           <a:prstGeom prst="rect">
             <a:avLst/>
@@ -49818,8 +49175,8 @@
         </p:nvSpPr>
         <p:spPr>
           <a:xfrm>
-            <a:off x="8155228" y="3630168"/>
-            <a:ext cx="1593037" cy="1728216"/>
+            <a:off x="9678375" y="3630168"/>
+            <a:ext cx="1973823" cy="1728216"/>
           </a:xfrm>
           <a:prstGeom prst="rect">
             <a:avLst/>
@@ -49856,164 +49213,6 @@
       <p:sp>
         <p:nvSpPr>
           <p:cNvPr id="46" name="Rounded Rectangle 45"/>
-          <p:cNvSpPr/>
-          <p:nvPr/>
-        </p:nvSpPr>
-        <p:spPr>
-          <a:xfrm>
-            <a:off x="9976866" y="3218688"/>
-            <a:ext cx="1757629" cy="2212848"/>
-          </a:xfrm>
-          <a:prstGeom prst="roundRect">
-            <a:avLst>
-              <a:gd name="adj" fmla="val 12000"/>
-            </a:avLst>
-          </a:prstGeom>
-          <a:solidFill>
-            <a:srgbClr val="FFFFFF"/>
-          </a:solidFill>
-          <a:ln w="15240">
-            <a:solidFill>
-              <a:srgbClr val="C2410C"/>
-            </a:solidFill>
-          </a:ln>
-          <a:effectLst/>
-        </p:spPr>
-        <p:style>
-          <a:lnRef idx="1">
-            <a:schemeClr val="accent1"/>
-          </a:lnRef>
-          <a:fillRef idx="3">
-            <a:schemeClr val="accent1"/>
-          </a:fillRef>
-          <a:effectRef idx="2">
-            <a:schemeClr val="accent1"/>
-          </a:effectRef>
-          <a:fontRef idx="minor">
-            <a:schemeClr val="lt1"/>
-          </a:fontRef>
-        </p:style>
-        <p:txBody>
-          <a:bodyPr rtlCol="0" anchor="ctr" wrap="square"/>
-          <a:lstStyle/>
-          <a:p>
-            <a:pPr algn="ctr"/>
-          </a:p>
-        </p:txBody>
-      </p:sp>
-      <p:sp>
-        <p:nvSpPr>
-          <p:cNvPr id="47" name="Rectangle 46"/>
-          <p:cNvSpPr/>
-          <p:nvPr/>
-        </p:nvSpPr>
-        <p:spPr>
-          <a:xfrm>
-            <a:off x="9976866" y="3218688"/>
-            <a:ext cx="1757629" cy="347472"/>
-          </a:xfrm>
-          <a:prstGeom prst="rect">
-            <a:avLst/>
-          </a:prstGeom>
-          <a:solidFill>
-            <a:srgbClr val="C2410C"/>
-          </a:solidFill>
-          <a:ln>
-            <a:noFill/>
-          </a:ln>
-          <a:effectLst/>
-        </p:spPr>
-        <p:style>
-          <a:lnRef idx="1">
-            <a:schemeClr val="accent1"/>
-          </a:lnRef>
-          <a:fillRef idx="3">
-            <a:schemeClr val="accent1"/>
-          </a:fillRef>
-          <a:effectRef idx="2">
-            <a:schemeClr val="accent1"/>
-          </a:effectRef>
-          <a:fontRef idx="minor">
-            <a:schemeClr val="lt1"/>
-          </a:fontRef>
-        </p:style>
-        <p:txBody>
-          <a:bodyPr rtlCol="0" anchor="ctr" wrap="square" lIns="41148" rIns="41148" tIns="18288" bIns="18288"/>
-          <a:lstStyle/>
-          <a:p>
-            <a:pPr algn="ctr">
-              <a:lnSpc>
-                <a:spcPct val="116000"/>
-              </a:lnSpc>
-              <a:buNone/>
-            </a:pPr>
-            <a:r>
-              <a:rPr sz="1000" b="1">
-                <a:solidFill>
-                  <a:srgbClr val="FFFFFF"/>
-                </a:solidFill>
-                <a:latin typeface="Meiryo"/>
-                <a:cs typeface="Meiryo"/>
-                <a:ea typeface="Meiryo"/>
-              </a:rPr>
-              <a:t>日報AIの表・記録 (9)</a:t>
-            </a:r>
-          </a:p>
-        </p:txBody>
-      </p:sp>
-      <p:sp>
-        <p:nvSpPr>
-          <p:cNvPr id="48" name="TextBox 47"/>
-          <p:cNvSpPr txBox="1"/>
-          <p:nvPr/>
-        </p:nvSpPr>
-        <p:spPr>
-          <a:xfrm>
-            <a:off x="10059162" y="3630168"/>
-            <a:ext cx="1593037" cy="1728216"/>
-          </a:xfrm>
-          <a:prstGeom prst="rect">
-            <a:avLst/>
-          </a:prstGeom>
-          <a:noFill/>
-        </p:spPr>
-        <p:txBody>
-          <a:bodyPr wrap="square" lIns="0" rIns="0" tIns="0" bIns="0" anchor="t">
-            <a:spAutoFit/>
-          </a:bodyPr>
-          <a:lstStyle/>
-          <a:p>
-            <a:pPr algn="l">
-              <a:lnSpc>
-                <a:spcPct val="150000"/>
-              </a:lnSpc>
-              <a:buNone/>
-            </a:pPr>
-            <a:r>
-              <a:rPr sz="700" b="0" i="0">
-                <a:solidFill>
-                  <a:srgbClr val="14223A"/>
-                </a:solidFill>
-                <a:latin typeface="Consolas"/>
-                <a:cs typeface="Consolas"/>
-                <a:ea typeface="Consolas"/>
-              </a:rPr>
-              <a:t>report_age_bands
-report_keywords
-report_age_band_keywords
-report_education_levels
-report_stress_levels
-report_phrases
-customer_report_profiles
-report_ai_generations
-report_ai_generation_keywords</a:t>
-            </a:r>
-          </a:p>
-        </p:txBody>
-      </p:sp>
-      <p:sp>
-        <p:nvSpPr>
-          <p:cNvPr id="49" name="Rounded Rectangle 48"/>
           <p:cNvSpPr/>
           <p:nvPr/>
         </p:nvSpPr>
@@ -50059,7 +49258,7 @@
       </p:sp>
       <p:sp>
         <p:nvSpPr>
-          <p:cNvPr id="50" name="Rectangle 49"/>
+          <p:cNvPr id="47" name="Rectangle 46"/>
           <p:cNvSpPr/>
           <p:nvPr/>
         </p:nvSpPr>
@@ -50103,7 +49302,7 @@
       </p:sp>
       <p:sp>
         <p:nvSpPr>
-          <p:cNvPr id="51" name="TextBox 50"/>
+          <p:cNvPr id="48" name="TextBox 47"/>
           <p:cNvSpPr txBox="1"/>
           <p:nvPr/>
         </p:nvSpPr>
@@ -50145,7 +49344,7 @@
       </p:sp>
       <p:sp>
         <p:nvSpPr>
-          <p:cNvPr id="52" name="TextBox 51"/>
+          <p:cNvPr id="49" name="TextBox 48"/>
           <p:cNvSpPr txBox="1"/>
           <p:nvPr/>
         </p:nvSpPr>
@@ -52826,8 +52025,8 @@
         </p:nvSpPr>
         <p:spPr>
           <a:xfrm>
-            <a:off x="6245352" y="5468112"/>
-            <a:ext cx="5486400" cy="914400"/>
+            <a:off x="6245352" y="5382006"/>
+            <a:ext cx="5486400" cy="1000506"/>
           </a:xfrm>
           <a:prstGeom prst="roundRect">
             <a:avLst>
@@ -52872,8 +52071,8 @@
         </p:nvSpPr>
         <p:spPr>
           <a:xfrm>
-            <a:off x="6245352" y="5468112"/>
-            <a:ext cx="68580" cy="914400"/>
+            <a:off x="6245352" y="5382006"/>
+            <a:ext cx="68580" cy="1000506"/>
           </a:xfrm>
           <a:prstGeom prst="rect">
             <a:avLst/>
@@ -52916,7 +52115,7 @@
         </p:nvSpPr>
         <p:spPr>
           <a:xfrm>
-            <a:off x="6428232" y="5559552"/>
+            <a:off x="6428232" y="5473446"/>
             <a:ext cx="5120640" cy="237744"/>
           </a:xfrm>
           <a:prstGeom prst="rect">
@@ -52958,8 +52157,8 @@
         </p:nvSpPr>
         <p:spPr>
           <a:xfrm>
-            <a:off x="6428232" y="5815584"/>
-            <a:ext cx="5138928" cy="493776"/>
+            <a:off x="6428232" y="5729478"/>
+            <a:ext cx="5138928" cy="579882"/>
           </a:xfrm>
           <a:prstGeom prst="rect">
             <a:avLst/>
@@ -52987,7 +52186,7 @@
                 <a:cs typeface="Meiryo"/>
                 <a:ea typeface="Meiryo"/>
               </a:rPr>
-              <a:t>提案書の差別化要因(予約・請求・カルテ)は、次の2ページの27枚としてスキーマだけ先に用意してあります。</a:t>
+              <a:t>提案書の差別化要因のうち、予約・請求・カルテ・訪問割当の最適化・移動手当(18枚)は次ページでスキーマだけ先に用意してあります。日報AIの3軸(10枚)はその次のページで、既に実装まで進んでいます。</a:t>
             </a:r>
           </a:p>
         </p:txBody>

--- a/doc/slides/db-review.pptx
+++ b/doc/slides/db-review.pptx
@@ -5562,7 +5562,7 @@
                 <a:cs typeface="Meiryo"/>
                 <a:ea typeface="Meiryo"/>
               </a:rPr>
-              <a:t>テーブル一覧③ — 稼働中: 日報AIの3軸(10枚)</a:t>
+              <a:t>テーブル一覧③ — 稼働中: 日報AIの3軸(9枚)</a:t>
             </a:r>
             <a:r>
               <a:rPr sz="1250" b="0" i="0">
@@ -5573,7 +5573,7 @@
                 <a:cs typeface="Meiryo"/>
                 <a:ea typeface="Meiryo"/>
               </a:rPr>
-              <a:t>   年齢帯・教育関心度★・ストレス度PSIの表と、生成記録。生成まで接続済み</a:t>
+              <a:t>   年齢帯・教育関心度★・ストレス度PSIの表と、生成記録。生成まで接続済み。文面は一覧①</a:t>
             </a:r>
           </a:p>
         </p:txBody>
@@ -52025,8 +52025,8 @@
         </p:nvSpPr>
         <p:spPr>
           <a:xfrm>
-            <a:off x="6245352" y="5382006"/>
-            <a:ext cx="5486400" cy="1000506"/>
+            <a:off x="6245352" y="5194808"/>
+            <a:ext cx="5486400" cy="1187704"/>
           </a:xfrm>
           <a:prstGeom prst="roundRect">
             <a:avLst>
@@ -52071,8 +52071,8 @@
         </p:nvSpPr>
         <p:spPr>
           <a:xfrm>
-            <a:off x="6245352" y="5382006"/>
-            <a:ext cx="68580" cy="1000506"/>
+            <a:off x="6245352" y="5194808"/>
+            <a:ext cx="68580" cy="1187704"/>
           </a:xfrm>
           <a:prstGeom prst="rect">
             <a:avLst/>
@@ -52115,7 +52115,7 @@
         </p:nvSpPr>
         <p:spPr>
           <a:xfrm>
-            <a:off x="6428232" y="5473446"/>
+            <a:off x="6428232" y="5286248"/>
             <a:ext cx="5120640" cy="237744"/>
           </a:xfrm>
           <a:prstGeom prst="rect">
@@ -52157,8 +52157,8 @@
         </p:nvSpPr>
         <p:spPr>
           <a:xfrm>
-            <a:off x="6428232" y="5729478"/>
-            <a:ext cx="5138928" cy="579882"/>
+            <a:off x="6428232" y="5542280"/>
+            <a:ext cx="5138928" cy="767080"/>
           </a:xfrm>
           <a:prstGeom prst="rect">
             <a:avLst/>
@@ -52186,7 +52186,7 @@
                 <a:cs typeface="Meiryo"/>
                 <a:ea typeface="Meiryo"/>
               </a:rPr>
-              <a:t>提案書の差別化要因のうち、予約・請求・カルテ・訪問割当の最適化・移動手当(18枚)は次ページでスキーマだけ先に用意してあります。日報AIの3軸(10枚)はその次のページで、既に実装まで進んでいます。</a:t>
+              <a:t>提案書の差別化要因のうち、予約・請求・カルテ・訪問割当の最適化・移動手当(18枚)は次ページでスキーマだけ先に用意してあります。日報AIの3軸の9枚はその次のページで、この一覧の prompt_templates と合わせて既に実装まで進んでいます。</a:t>
             </a:r>
           </a:p>
         </p:txBody>

--- a/doc/slides/db-review.pptx
+++ b/doc/slides/db-review.pptx
@@ -47494,7 +47494,7 @@
         <p:spPr>
           <a:xfrm>
             <a:off x="457200" y="1572768"/>
-            <a:ext cx="1757629" cy="1234440"/>
+            <a:ext cx="1757629" cy="2084832"/>
           </a:xfrm>
           <a:prstGeom prst="roundRect">
             <a:avLst>
@@ -47602,7 +47602,7 @@
         <p:spPr>
           <a:xfrm>
             <a:off x="539496" y="1984248"/>
-            <a:ext cx="1593037" cy="749808"/>
+            <a:ext cx="1593037" cy="1600200"/>
           </a:xfrm>
           <a:prstGeom prst="rect">
             <a:avLst/>
@@ -47647,7 +47647,7 @@
         <p:spPr>
           <a:xfrm>
             <a:off x="2361133" y="1572768"/>
-            <a:ext cx="1757629" cy="1234440"/>
+            <a:ext cx="1757629" cy="2084832"/>
           </a:xfrm>
           <a:prstGeom prst="roundRect">
             <a:avLst>
@@ -47755,7 +47755,7 @@
         <p:spPr>
           <a:xfrm>
             <a:off x="2443429" y="1984248"/>
-            <a:ext cx="1593037" cy="749808"/>
+            <a:ext cx="1593037" cy="1600200"/>
           </a:xfrm>
           <a:prstGeom prst="rect">
             <a:avLst/>
@@ -47799,7 +47799,7 @@
         <p:spPr>
           <a:xfrm>
             <a:off x="4265066" y="1572768"/>
-            <a:ext cx="1757629" cy="1234440"/>
+            <a:ext cx="1757629" cy="2084832"/>
           </a:xfrm>
           <a:prstGeom prst="roundRect">
             <a:avLst>
@@ -47907,7 +47907,7 @@
         <p:spPr>
           <a:xfrm>
             <a:off x="4347362" y="1984248"/>
-            <a:ext cx="1593037" cy="749808"/>
+            <a:ext cx="1593037" cy="1600200"/>
           </a:xfrm>
           <a:prstGeom prst="rect">
             <a:avLst/>
@@ -47950,7 +47950,7 @@
         <p:spPr>
           <a:xfrm>
             <a:off x="6168999" y="1572768"/>
-            <a:ext cx="1757629" cy="1234440"/>
+            <a:ext cx="1757629" cy="2084832"/>
           </a:xfrm>
           <a:prstGeom prst="roundRect">
             <a:avLst>
@@ -48058,7 +48058,7 @@
         <p:spPr>
           <a:xfrm>
             <a:off x="6251295" y="1984248"/>
-            <a:ext cx="1593037" cy="749808"/>
+            <a:ext cx="1593037" cy="1600200"/>
           </a:xfrm>
           <a:prstGeom prst="rect">
             <a:avLst/>
@@ -48103,7 +48103,7 @@
         <p:spPr>
           <a:xfrm>
             <a:off x="8072932" y="1572768"/>
-            <a:ext cx="1757629" cy="1234440"/>
+            <a:ext cx="1757629" cy="2084832"/>
           </a:xfrm>
           <a:prstGeom prst="roundRect">
             <a:avLst>
@@ -48211,7 +48211,7 @@
         <p:spPr>
           <a:xfrm>
             <a:off x="8155228" y="1984248"/>
-            <a:ext cx="1593037" cy="749808"/>
+            <a:ext cx="1593037" cy="1600200"/>
           </a:xfrm>
           <a:prstGeom prst="rect">
             <a:avLst/>
@@ -48255,7 +48255,7 @@
         <p:spPr>
           <a:xfrm>
             <a:off x="9976866" y="1572768"/>
-            <a:ext cx="1757629" cy="1234440"/>
+            <a:ext cx="1757629" cy="2084832"/>
           </a:xfrm>
           <a:prstGeom prst="roundRect">
             <a:avLst>
@@ -48363,7 +48363,7 @@
         <p:spPr>
           <a:xfrm>
             <a:off x="10059162" y="1984248"/>
-            <a:ext cx="1593037" cy="749808"/>
+            <a:ext cx="1593037" cy="1600200"/>
           </a:xfrm>
           <a:prstGeom prst="rect">
             <a:avLst/>
@@ -48413,7 +48413,7 @@
         </p:nvSpPr>
         <p:spPr>
           <a:xfrm>
-            <a:off x="457200" y="2962656"/>
+            <a:off x="457200" y="3803904"/>
             <a:ext cx="8686800" cy="237744"/>
           </a:xfrm>
           <a:prstGeom prst="rect">
@@ -48455,8 +48455,8 @@
         </p:nvSpPr>
         <p:spPr>
           <a:xfrm>
-            <a:off x="457200" y="3218688"/>
-            <a:ext cx="2138415" cy="2212848"/>
+            <a:off x="457200" y="4059936"/>
+            <a:ext cx="2138415" cy="1284732"/>
           </a:xfrm>
           <a:prstGeom prst="roundRect">
             <a:avLst>
@@ -48503,7 +48503,7 @@
         </p:nvSpPr>
         <p:spPr>
           <a:xfrm>
-            <a:off x="457200" y="3218688"/>
+            <a:off x="457200" y="4059936"/>
             <a:ext cx="2138415" cy="347472"/>
           </a:xfrm>
           <a:prstGeom prst="rect">
@@ -48563,8 +48563,8 @@
         </p:nvSpPr>
         <p:spPr>
           <a:xfrm>
-            <a:off x="539496" y="3630168"/>
-            <a:ext cx="1973823" cy="1728216"/>
+            <a:off x="539496" y="4471416"/>
+            <a:ext cx="1973823" cy="800100"/>
           </a:xfrm>
           <a:prstGeom prst="rect">
             <a:avLst/>
@@ -48606,8 +48606,8 @@
         </p:nvSpPr>
         <p:spPr>
           <a:xfrm>
-            <a:off x="2741919" y="3218688"/>
-            <a:ext cx="2138415" cy="2212848"/>
+            <a:off x="2741919" y="4059936"/>
+            <a:ext cx="2138415" cy="1284732"/>
           </a:xfrm>
           <a:prstGeom prst="roundRect">
             <a:avLst>
@@ -48654,7 +48654,7 @@
         </p:nvSpPr>
         <p:spPr>
           <a:xfrm>
-            <a:off x="2741919" y="3218688"/>
+            <a:off x="2741919" y="4059936"/>
             <a:ext cx="2138415" cy="347472"/>
           </a:xfrm>
           <a:prstGeom prst="rect">
@@ -48714,8 +48714,8 @@
         </p:nvSpPr>
         <p:spPr>
           <a:xfrm>
-            <a:off x="2824215" y="3630168"/>
-            <a:ext cx="1973823" cy="1728216"/>
+            <a:off x="2824215" y="4471416"/>
+            <a:ext cx="1973823" cy="800100"/>
           </a:xfrm>
           <a:prstGeom prst="rect">
             <a:avLst/>
@@ -48759,8 +48759,8 @@
         </p:nvSpPr>
         <p:spPr>
           <a:xfrm>
-            <a:off x="5026639" y="3218688"/>
-            <a:ext cx="2138415" cy="2212848"/>
+            <a:off x="5026639" y="4059936"/>
+            <a:ext cx="2138415" cy="1284732"/>
           </a:xfrm>
           <a:prstGeom prst="roundRect">
             <a:avLst>
@@ -48807,7 +48807,7 @@
         </p:nvSpPr>
         <p:spPr>
           <a:xfrm>
-            <a:off x="5026639" y="3218688"/>
+            <a:off x="5026639" y="4059936"/>
             <a:ext cx="2138415" cy="347472"/>
           </a:xfrm>
           <a:prstGeom prst="rect">
@@ -48867,8 +48867,8 @@
         </p:nvSpPr>
         <p:spPr>
           <a:xfrm>
-            <a:off x="5108935" y="3630168"/>
-            <a:ext cx="1973823" cy="1728216"/>
+            <a:off x="5108935" y="4471416"/>
+            <a:ext cx="1973823" cy="800100"/>
           </a:xfrm>
           <a:prstGeom prst="rect">
             <a:avLst/>
@@ -48913,8 +48913,8 @@
         </p:nvSpPr>
         <p:spPr>
           <a:xfrm>
-            <a:off x="7311359" y="3218688"/>
-            <a:ext cx="2138415" cy="2212848"/>
+            <a:off x="7311359" y="4059936"/>
+            <a:ext cx="2138415" cy="1284732"/>
           </a:xfrm>
           <a:prstGeom prst="roundRect">
             <a:avLst>
@@ -48961,7 +48961,7 @@
         </p:nvSpPr>
         <p:spPr>
           <a:xfrm>
-            <a:off x="7311359" y="3218688"/>
+            <a:off x="7311359" y="4059936"/>
             <a:ext cx="2138415" cy="347472"/>
           </a:xfrm>
           <a:prstGeom prst="rect">
@@ -49021,8 +49021,8 @@
         </p:nvSpPr>
         <p:spPr>
           <a:xfrm>
-            <a:off x="7393655" y="3630168"/>
-            <a:ext cx="1973823" cy="1728216"/>
+            <a:off x="7393655" y="4471416"/>
+            <a:ext cx="1973823" cy="800100"/>
           </a:xfrm>
           <a:prstGeom prst="rect">
             <a:avLst/>
@@ -49067,8 +49067,8 @@
         </p:nvSpPr>
         <p:spPr>
           <a:xfrm>
-            <a:off x="9596079" y="3218688"/>
-            <a:ext cx="2138415" cy="2212848"/>
+            <a:off x="9596079" y="4059936"/>
+            <a:ext cx="2138415" cy="1284732"/>
           </a:xfrm>
           <a:prstGeom prst="roundRect">
             <a:avLst>
@@ -49115,7 +49115,7 @@
         </p:nvSpPr>
         <p:spPr>
           <a:xfrm>
-            <a:off x="9596079" y="3218688"/>
+            <a:off x="9596079" y="4059936"/>
             <a:ext cx="2138415" cy="347472"/>
           </a:xfrm>
           <a:prstGeom prst="rect">
@@ -49175,8 +49175,8 @@
         </p:nvSpPr>
         <p:spPr>
           <a:xfrm>
-            <a:off x="9678375" y="3630168"/>
-            <a:ext cx="1973823" cy="1728216"/>
+            <a:off x="9678375" y="4471416"/>
+            <a:ext cx="1973823" cy="800100"/>
           </a:xfrm>
           <a:prstGeom prst="rect">
             <a:avLst/>

--- a/doc/slides/db-review.pptx
+++ b/doc/slides/db-review.pptx
@@ -3510,7 +3510,7 @@
                 <a:cs typeface="Meiryo"/>
                 <a:ea typeface="Meiryo"/>
               </a:rPr>
-              <a:t>テーブル一覧② — 先行整備の27枚(1/2)</a:t>
+              <a:t>テーブル一覧② — 先行整備の18枚</a:t>
             </a:r>
             <a:r>
               <a:rPr sz="1250" b="0" i="0">
@@ -5458,7 +5458,7 @@
                 <a:cs typeface="Meiryo"/>
                 <a:ea typeface="Meiryo"/>
               </a:rPr>
-              <a:t>この18枚も既存17枚と同じ規約(tenant_id + RLS + 複合外部キー + CHECK + updated_at トリガー)に載せてあります。残りの9枚(日報AIのプロンプト調整)は次ページ。先に作った理由と迷った判断は第4章(P27・P28)で扱います。</a:t>
+              <a:t>この18枚も既存17枚と同じ規約(tenant_id + RLS + 複合外部キー + CHECK + updated_at トリガー)に載せてあります。この5領域はスキーマまで。次ページの日報AIの3軸は実装まで進んでいます。先に作った理由と迷った判断は第4章(P27・P28)で扱います。</a:t>
             </a:r>
           </a:p>
         </p:txBody>
@@ -5496,7 +5496,7 @@
             <a:avLst/>
           </a:prstGeom>
           <a:solidFill>
-            <a:srgbClr val="C2410C"/>
+            <a:srgbClr val="6D28D9"/>
           </a:solidFill>
           <a:ln>
             <a:noFill/>
@@ -5562,7 +5562,7 @@
                 <a:cs typeface="Meiryo"/>
                 <a:ea typeface="Meiryo"/>
               </a:rPr>
-              <a:t>テーブル一覧③ — 先行整備の27枚(2/2)</a:t>
+              <a:t>テーブル一覧③ — 稼働中: 日報AIの3軸(9枚)</a:t>
             </a:r>
             <a:r>
               <a:rPr sz="1250" b="0" i="0">
@@ -5573,7 +5573,7 @@
                 <a:cs typeface="Meiryo"/>
                 <a:ea typeface="Meiryo"/>
               </a:rPr>
-              <a:t>   日報AIのプロンプト調整の9枚。文面は一覧①(稼働中)</a:t>
+              <a:t>   年齢帯・教育関心度★・ストレス度PSIの表と、生成記録。生成まで接続済み。文面は一覧①</a:t>
             </a:r>
           </a:p>
         </p:txBody>
@@ -7078,7 +7078,7 @@
                 <a:cs typeface="Meiryo"/>
                 <a:ea typeface="Meiryo"/>
               </a:rPr>
-              <a:t>低いほど負担が大きい。訪問ごとにスタッフが評価(既存の risk_rating)</a:t>
+              <a:t>低いほど負担が大きい。訪問ごとにスタッフが評価(daily_reports.stress_level)</a:t>
             </a:r>
           </a:p>
         </p:txBody>
@@ -12389,7 +12389,7 @@
                 <a:cs typeface="Meiryo"/>
                 <a:ea typeface="Meiryo"/>
               </a:rPr>
-              <a:t>クーポンの2枚(customer_coupons / coupon_redemptions)も同じ形で customers・coupons・daily_reports を指しています。先行整備の27枚も同じ規約に載せてあり、複合外部キーは全部で63本です。参照先には UNIQUE(tenant_id, id) を張ってあります。ON DELETE は全て no action(親を消せない)にしており、廃棄はテナント単位の物理削除で行う方針です。</a:t>
+              <a:t>クーポンの2枚(customer_coupons / coupon_redemptions)も同じ形で customers・coupons・daily_reports を指しています。先行整備の18枚・稼働中の日報AI3軸の10枚も同じ規約に載せてあり、複合外部キーは全部で63本です。参照先には UNIQUE(tenant_id, id) を張ってあります。ON DELETE は全て no action(親を消せない)にしており、廃棄はテナント単位の物理削除で行う方針です。</a:t>
             </a:r>
           </a:p>
         </p:txBody>
@@ -20125,7 +20125,7 @@
                 <a:cs typeface="Meiryo"/>
                 <a:ea typeface="Meiryo"/>
               </a:rPr>
-              <a:t>新しい表を足すときに考えることが少ない(同じ形をコピーすればよい)。RLSとupdated_atトリガーの張り忘れはCIが機械的に検出する。第4章の27枚も、この形にそのまま載せてあります。</a:t>
+              <a:t>新しい表を足すときに考えることが少ない(同じ形をコピーすればよい)。RLSとupdated_atトリガーの張り忘れはCIが機械的に検出する。第4章の18枚・日報AIの10枚も、この形にそのまま載せてあります。</a:t>
             </a:r>
           </a:p>
         </p:txBody>
@@ -34234,7 +34234,7 @@
                 <a:cs typeface="Meiryo"/>
                 <a:ea typeface="Meiryo"/>
               </a:rPr>
-              <a:t>実装より先にDBの形だけ固めた6領域。そこで迷った判断と、まとめての相談事項</a:t>
+              <a:t>実装より先にDBの形だけ固めた5領域。そこで迷った判断と、まとめての相談事項</a:t>
             </a:r>
           </a:p>
         </p:txBody>
@@ -34338,7 +34338,7 @@
                 <a:cs typeface="Meiryo"/>
                 <a:ea typeface="Meiryo"/>
               </a:rPr>
-              <a:t>実装より先に、DBの形だけ固めた6領域</a:t>
+              <a:t>実装より先に、DBの形だけ固めた5領域</a:t>
             </a:r>
             <a:r>
               <a:rPr sz="1250" b="0" i="0">
@@ -34349,7 +34349,7 @@
                 <a:cs typeface="Meiryo"/>
                 <a:ea typeface="Meiryo"/>
               </a:rPr>
-              <a:t>   27テーブル。リポジトリ実装・API・画面はまだ無い(日報AIの文面だけ先に稼働)</a:t>
+              <a:t>   18テーブル。リポジトリ実装・API・画面はまだ無い(日報AIの3軸は実装済みでここには含めない)</a:t>
             </a:r>
           </a:p>
         </p:txBody>
@@ -34525,7 +34525,7 @@
         <p:spPr>
           <a:xfrm>
             <a:off x="457200" y="1481328"/>
-            <a:ext cx="1757629" cy="3657600"/>
+            <a:ext cx="2138415" cy="3657600"/>
           </a:xfrm>
           <a:prstGeom prst="roundRect">
             <a:avLst>
@@ -34573,7 +34573,7 @@
         <p:spPr>
           <a:xfrm>
             <a:off x="457200" y="1481328"/>
-            <a:ext cx="1757629" cy="384048"/>
+            <a:ext cx="2138415" cy="384048"/>
           </a:xfrm>
           <a:prstGeom prst="rect">
             <a:avLst/>
@@ -34633,7 +34633,7 @@
         <p:spPr>
           <a:xfrm>
             <a:off x="557784" y="1920240"/>
-            <a:ext cx="1556461" cy="294386"/>
+            <a:ext cx="1937247" cy="294386"/>
           </a:xfrm>
           <a:prstGeom prst="rect">
             <a:avLst/>
@@ -34676,7 +34676,7 @@
         <p:spPr>
           <a:xfrm>
             <a:off x="557784" y="2269490"/>
-            <a:ext cx="1556461" cy="2805429"/>
+            <a:ext cx="1937247" cy="2805429"/>
           </a:xfrm>
           <a:prstGeom prst="rect">
             <a:avLst/>
@@ -34776,8 +34776,8 @@
         </p:nvSpPr>
         <p:spPr>
           <a:xfrm>
-            <a:off x="2361133" y="1481328"/>
-            <a:ext cx="1757629" cy="3657600"/>
+            <a:off x="2741919" y="1481328"/>
+            <a:ext cx="2138415" cy="3657600"/>
           </a:xfrm>
           <a:prstGeom prst="roundRect">
             <a:avLst>
@@ -34824,8 +34824,8 @@
         </p:nvSpPr>
         <p:spPr>
           <a:xfrm>
-            <a:off x="2361133" y="1481328"/>
-            <a:ext cx="1757629" cy="384048"/>
+            <a:off x="2741919" y="1481328"/>
+            <a:ext cx="2138415" cy="384048"/>
           </a:xfrm>
           <a:prstGeom prst="rect">
             <a:avLst/>
@@ -34884,8 +34884,8 @@
         </p:nvSpPr>
         <p:spPr>
           <a:xfrm>
-            <a:off x="2461717" y="1920240"/>
-            <a:ext cx="1556461" cy="552196"/>
+            <a:off x="2842503" y="1920240"/>
+            <a:ext cx="1937247" cy="552196"/>
           </a:xfrm>
           <a:prstGeom prst="rect">
             <a:avLst/>
@@ -34929,8 +34929,8 @@
         </p:nvSpPr>
         <p:spPr>
           <a:xfrm>
-            <a:off x="2461717" y="2527300"/>
-            <a:ext cx="1556461" cy="2547620"/>
+            <a:off x="2842503" y="2527300"/>
+            <a:ext cx="1937247" cy="2547620"/>
           </a:xfrm>
           <a:prstGeom prst="rect">
             <a:avLst/>
@@ -35030,8 +35030,8 @@
         </p:nvSpPr>
         <p:spPr>
           <a:xfrm>
-            <a:off x="4265066" y="1481328"/>
-            <a:ext cx="1757629" cy="3657600"/>
+            <a:off x="5026639" y="1481328"/>
+            <a:ext cx="2138415" cy="3657600"/>
           </a:xfrm>
           <a:prstGeom prst="roundRect">
             <a:avLst>
@@ -35078,8 +35078,8 @@
         </p:nvSpPr>
         <p:spPr>
           <a:xfrm>
-            <a:off x="4265066" y="1481328"/>
-            <a:ext cx="1757629" cy="384048"/>
+            <a:off x="5026639" y="1481328"/>
+            <a:ext cx="2138415" cy="384048"/>
           </a:xfrm>
           <a:prstGeom prst="rect">
             <a:avLst/>
@@ -35138,8 +35138,8 @@
         </p:nvSpPr>
         <p:spPr>
           <a:xfrm>
-            <a:off x="4365650" y="1920240"/>
-            <a:ext cx="1556461" cy="681101"/>
+            <a:off x="5127223" y="1920240"/>
+            <a:ext cx="1937247" cy="681101"/>
           </a:xfrm>
           <a:prstGeom prst="rect">
             <a:avLst/>
@@ -35184,8 +35184,8 @@
         </p:nvSpPr>
         <p:spPr>
           <a:xfrm>
-            <a:off x="4365650" y="2656205"/>
-            <a:ext cx="1556461" cy="2418714"/>
+            <a:off x="5127223" y="2656205"/>
+            <a:ext cx="1937247" cy="2418714"/>
           </a:xfrm>
           <a:prstGeom prst="rect">
             <a:avLst/>
@@ -35285,8 +35285,8 @@
         </p:nvSpPr>
         <p:spPr>
           <a:xfrm>
-            <a:off x="6168999" y="1481328"/>
-            <a:ext cx="1757629" cy="3657600"/>
+            <a:off x="7311359" y="1481328"/>
+            <a:ext cx="2138415" cy="3657600"/>
           </a:xfrm>
           <a:prstGeom prst="roundRect">
             <a:avLst>
@@ -35333,8 +35333,8 @@
         </p:nvSpPr>
         <p:spPr>
           <a:xfrm>
-            <a:off x="6168999" y="1481328"/>
-            <a:ext cx="1757629" cy="384048"/>
+            <a:off x="7311359" y="1481328"/>
+            <a:ext cx="2138415" cy="384048"/>
           </a:xfrm>
           <a:prstGeom prst="rect">
             <a:avLst/>
@@ -35393,8 +35393,8 @@
         </p:nvSpPr>
         <p:spPr>
           <a:xfrm>
-            <a:off x="6269583" y="1920240"/>
-            <a:ext cx="1556461" cy="681101"/>
+            <a:off x="7411943" y="1920240"/>
+            <a:ext cx="1937247" cy="681101"/>
           </a:xfrm>
           <a:prstGeom prst="rect">
             <a:avLst/>
@@ -35439,8 +35439,8 @@
         </p:nvSpPr>
         <p:spPr>
           <a:xfrm>
-            <a:off x="6269583" y="2656205"/>
-            <a:ext cx="1556461" cy="2418714"/>
+            <a:off x="7411943" y="2656205"/>
+            <a:ext cx="1937247" cy="2418714"/>
           </a:xfrm>
           <a:prstGeom prst="rect">
             <a:avLst/>
@@ -35540,8 +35540,8 @@
         </p:nvSpPr>
         <p:spPr>
           <a:xfrm>
-            <a:off x="8072932" y="1481328"/>
-            <a:ext cx="1757629" cy="3657600"/>
+            <a:off x="9596079" y="1481328"/>
+            <a:ext cx="2138415" cy="3657600"/>
           </a:xfrm>
           <a:prstGeom prst="roundRect">
             <a:avLst>
@@ -35588,8 +35588,8 @@
         </p:nvSpPr>
         <p:spPr>
           <a:xfrm>
-            <a:off x="8072932" y="1481328"/>
-            <a:ext cx="1757629" cy="384048"/>
+            <a:off x="9596079" y="1481328"/>
+            <a:ext cx="2138415" cy="384048"/>
           </a:xfrm>
           <a:prstGeom prst="rect">
             <a:avLst/>
@@ -35648,8 +35648,8 @@
         </p:nvSpPr>
         <p:spPr>
           <a:xfrm>
-            <a:off x="8173516" y="1920240"/>
-            <a:ext cx="1556461" cy="294386"/>
+            <a:off x="9696663" y="1920240"/>
+            <a:ext cx="1937247" cy="294386"/>
           </a:xfrm>
           <a:prstGeom prst="rect">
             <a:avLst/>
@@ -35691,8 +35691,8 @@
         </p:nvSpPr>
         <p:spPr>
           <a:xfrm>
-            <a:off x="8173516" y="2269490"/>
-            <a:ext cx="1556461" cy="2805429"/>
+            <a:off x="9696663" y="2269490"/>
+            <a:ext cx="1937247" cy="2805429"/>
           </a:xfrm>
           <a:prstGeom prst="rect">
             <a:avLst/>
@@ -35787,292 +35787,6 @@
       <p:sp>
         <p:nvSpPr>
           <p:cNvPr id="28" name="Rounded Rectangle 27"/>
-          <p:cNvSpPr/>
-          <p:nvPr/>
-        </p:nvSpPr>
-        <p:spPr>
-          <a:xfrm>
-            <a:off x="9976866" y="1481328"/>
-            <a:ext cx="1757629" cy="3657600"/>
-          </a:xfrm>
-          <a:prstGeom prst="roundRect">
-            <a:avLst>
-              <a:gd name="adj" fmla="val 12000"/>
-            </a:avLst>
-          </a:prstGeom>
-          <a:solidFill>
-            <a:srgbClr val="FFFFFF"/>
-          </a:solidFill>
-          <a:ln w="16510">
-            <a:solidFill>
-              <a:srgbClr val="0F766E"/>
-            </a:solidFill>
-          </a:ln>
-          <a:effectLst/>
-        </p:spPr>
-        <p:style>
-          <a:lnRef idx="1">
-            <a:schemeClr val="accent1"/>
-          </a:lnRef>
-          <a:fillRef idx="3">
-            <a:schemeClr val="accent1"/>
-          </a:fillRef>
-          <a:effectRef idx="2">
-            <a:schemeClr val="accent1"/>
-          </a:effectRef>
-          <a:fontRef idx="minor">
-            <a:schemeClr val="lt1"/>
-          </a:fontRef>
-        </p:style>
-        <p:txBody>
-          <a:bodyPr rtlCol="0" anchor="ctr" wrap="square"/>
-          <a:lstStyle/>
-          <a:p>
-            <a:pPr algn="ctr"/>
-          </a:p>
-        </p:txBody>
-      </p:sp>
-      <p:sp>
-        <p:nvSpPr>
-          <p:cNvPr id="29" name="Rectangle 28"/>
-          <p:cNvSpPr/>
-          <p:nvPr/>
-        </p:nvSpPr>
-        <p:spPr>
-          <a:xfrm>
-            <a:off x="9976866" y="1481328"/>
-            <a:ext cx="1757629" cy="384048"/>
-          </a:xfrm>
-          <a:prstGeom prst="rect">
-            <a:avLst/>
-          </a:prstGeom>
-          <a:solidFill>
-            <a:srgbClr val="0F766E"/>
-          </a:solidFill>
-          <a:ln>
-            <a:noFill/>
-          </a:ln>
-          <a:effectLst/>
-        </p:spPr>
-        <p:style>
-          <a:lnRef idx="1">
-            <a:schemeClr val="accent1"/>
-          </a:lnRef>
-          <a:fillRef idx="3">
-            <a:schemeClr val="accent1"/>
-          </a:fillRef>
-          <a:effectRef idx="2">
-            <a:schemeClr val="accent1"/>
-          </a:effectRef>
-          <a:fontRef idx="minor">
-            <a:schemeClr val="lt1"/>
-          </a:fontRef>
-        </p:style>
-        <p:txBody>
-          <a:bodyPr rtlCol="0" anchor="ctr" wrap="square" lIns="41148" rIns="41148" tIns="18288" bIns="18288"/>
-          <a:lstStyle/>
-          <a:p>
-            <a:pPr algn="ctr">
-              <a:lnSpc>
-                <a:spcPct val="116000"/>
-              </a:lnSpc>
-              <a:buNone/>
-            </a:pPr>
-            <a:r>
-              <a:rPr sz="1000" b="1">
-                <a:solidFill>
-                  <a:srgbClr val="FFFFFF"/>
-                </a:solidFill>
-                <a:latin typeface="Meiryo"/>
-                <a:cs typeface="Meiryo"/>
-                <a:ea typeface="Meiryo"/>
-              </a:rPr>
-              <a:t>日報AIの文面調整</a:t>
-            </a:r>
-          </a:p>
-        </p:txBody>
-      </p:sp>
-      <p:sp>
-        <p:nvSpPr>
-          <p:cNvPr id="30" name="TextBox 29"/>
-          <p:cNvSpPr txBox="1"/>
-          <p:nvPr/>
-        </p:nvSpPr>
-        <p:spPr>
-          <a:xfrm>
-            <a:off x="10077449" y="1920240"/>
-            <a:ext cx="1556461" cy="1325626"/>
-          </a:xfrm>
-          <a:prstGeom prst="rect">
-            <a:avLst/>
-          </a:prstGeom>
-          <a:noFill/>
-        </p:spPr>
-        <p:txBody>
-          <a:bodyPr wrap="square" lIns="0" rIns="0" tIns="0" bIns="0" anchor="t">
-            <a:spAutoFit/>
-          </a:bodyPr>
-          <a:lstStyle/>
-          <a:p>
-            <a:pPr algn="l">
-              <a:lnSpc>
-                <a:spcPct val="145000"/>
-              </a:lnSpc>
-              <a:buNone/>
-            </a:pPr>
-            <a:r>
-              <a:rPr sz="700" b="0" i="0">
-                <a:solidFill>
-                  <a:srgbClr val="0F766E"/>
-                </a:solidFill>
-                <a:latin typeface="Consolas"/>
-                <a:cs typeface="Consolas"/>
-                <a:ea typeface="Consolas"/>
-              </a:rPr>
-              <a:t>prompt_templates
-report_age_bands
-report_keywords
-report_age_band_keywords
-report_phrases
-report_education_levels
-report_stress_levels
-customer_report_profiles
-report_ai_generations
-report_ai_generation_keywords</a:t>
-            </a:r>
-          </a:p>
-        </p:txBody>
-      </p:sp>
-      <p:sp>
-        <p:nvSpPr>
-          <p:cNvPr id="31" name="TextBox 30"/>
-          <p:cNvSpPr txBox="1"/>
-          <p:nvPr/>
-        </p:nvSpPr>
-        <p:spPr>
-          <a:xfrm>
-            <a:off x="10077449" y="3300730"/>
-            <a:ext cx="1556461" cy="1774189"/>
-          </a:xfrm>
-          <a:prstGeom prst="rect">
-            <a:avLst/>
-          </a:prstGeom>
-          <a:noFill/>
-        </p:spPr>
-        <p:txBody>
-          <a:bodyPr wrap="square" lIns="0" rIns="0" tIns="0" bIns="0">
-            <a:spAutoFit/>
-          </a:bodyPr>
-          <a:lstStyle/>
-          <a:p>
-            <a:pPr marL="182880" indent="-182880">
-              <a:lnSpc>
-                <a:spcPct val="130000"/>
-              </a:lnSpc>
-              <a:spcBef>
-                <a:spcPts val="0"/>
-              </a:spcBef>
-              <a:buClr>
-                <a:srgbClr val="0F766E"/>
-              </a:buClr>
-              <a:buFont typeface="Meiryo"/>
-              <a:buChar char="▪"/>
-            </a:pPr>
-            <a:r>
-              <a:rPr sz="850" b="0">
-                <a:solidFill>
-                  <a:srgbClr val="14223A"/>
-                </a:solidFill>
-                <a:latin typeface="Meiryo"/>
-                <a:cs typeface="Meiryo"/>
-                <a:ea typeface="Meiryo"/>
-              </a:rPr>
-              <a:t>文面は版を積む。生成記録が版を指すので消せない</a:t>
-            </a:r>
-          </a:p>
-          <a:p>
-            <a:pPr marL="182880" indent="-182880">
-              <a:lnSpc>
-                <a:spcPct val="130000"/>
-              </a:lnSpc>
-              <a:spcBef>
-                <a:spcPts val="500"/>
-              </a:spcBef>
-              <a:buClr>
-                <a:srgbClr val="0F766E"/>
-              </a:buClr>
-              <a:buFont typeface="Meiryo"/>
-              <a:buChar char="▪"/>
-            </a:pPr>
-            <a:r>
-              <a:rPr sz="850" b="0">
-                <a:solidFill>
-                  <a:srgbClr val="14223A"/>
-                </a:solidFill>
-                <a:latin typeface="Meiryo"/>
-                <a:cs typeface="Meiryo"/>
-                <a:ea typeface="Meiryo"/>
-              </a:rPr>
-              <a:t>年齢帯 × 教育関心度★ × ストレス度の3軸で組み替える</a:t>
-            </a:r>
-          </a:p>
-          <a:p>
-            <a:pPr marL="182880" indent="-182880">
-              <a:lnSpc>
-                <a:spcPct val="130000"/>
-              </a:lnSpc>
-              <a:spcBef>
-                <a:spcPts val="500"/>
-              </a:spcBef>
-              <a:buClr>
-                <a:srgbClr val="0F766E"/>
-              </a:buClr>
-              <a:buFont typeface="Meiryo"/>
-              <a:buChar char="▪"/>
-            </a:pPr>
-            <a:r>
-              <a:rPr sz="850" b="0">
-                <a:solidFill>
-                  <a:srgbClr val="14223A"/>
-                </a:solidFill>
-                <a:latin typeface="Meiryo"/>
-                <a:cs typeface="Meiryo"/>
-                <a:ea typeface="Meiryo"/>
-              </a:rPr>
-              <a:t>ストレス度は★より優先。安全弁は列で持ち、★は customers に置かない</a:t>
-            </a:r>
-          </a:p>
-          <a:p>
-            <a:pPr marL="182880" indent="-182880">
-              <a:lnSpc>
-                <a:spcPct val="130000"/>
-              </a:lnSpc>
-              <a:spcBef>
-                <a:spcPts val="500"/>
-              </a:spcBef>
-              <a:buClr>
-                <a:srgbClr val="0F766E"/>
-              </a:buClr>
-              <a:buFont typeface="Meiryo"/>
-              <a:buChar char="▪"/>
-            </a:pPr>
-            <a:r>
-              <a:rPr sz="850" b="0">
-                <a:solidFill>
-                  <a:srgbClr val="14223A"/>
-                </a:solidFill>
-                <a:latin typeface="Meiryo"/>
-                <a:cs typeface="Meiryo"/>
-                <a:ea typeface="Meiryo"/>
-              </a:rPr>
-              <a:t>どの文面・どの語で作ったかを生成1回ごとに残す</a:t>
-            </a:r>
-          </a:p>
-        </p:txBody>
-      </p:sp>
-      <p:sp>
-        <p:nvSpPr>
-          <p:cNvPr id="32" name="Rounded Rectangle 31"/>
           <p:cNvSpPr/>
           <p:nvPr/>
         </p:nvSpPr>
@@ -36120,7 +35834,7 @@
       </p:sp>
       <p:sp>
         <p:nvSpPr>
-          <p:cNvPr id="33" name="Rectangle 32"/>
+          <p:cNvPr id="29" name="Rectangle 28"/>
           <p:cNvSpPr/>
           <p:nvPr/>
         </p:nvSpPr>
@@ -36164,7 +35878,7 @@
       </p:sp>
       <p:sp>
         <p:nvSpPr>
-          <p:cNvPr id="34" name="TextBox 33"/>
+          <p:cNvPr id="30" name="TextBox 29"/>
           <p:cNvSpPr txBox="1"/>
           <p:nvPr/>
         </p:nvSpPr>
@@ -36206,7 +35920,7 @@
       </p:sp>
       <p:sp>
         <p:nvSpPr>
-          <p:cNvPr id="35" name="TextBox 34"/>
+          <p:cNvPr id="31" name="TextBox 30"/>
           <p:cNvSpPr txBox="1"/>
           <p:nvPr/>
         </p:nvSpPr>
@@ -36255,7 +35969,7 @@
       </p:sp>
       <p:sp>
         <p:nvSpPr>
-          <p:cNvPr id="36" name="Rounded Rectangle 35"/>
+          <p:cNvPr id="32" name="Rounded Rectangle 31"/>
           <p:cNvSpPr/>
           <p:nvPr/>
         </p:nvSpPr>
@@ -36301,7 +36015,7 @@
       </p:sp>
       <p:sp>
         <p:nvSpPr>
-          <p:cNvPr id="37" name="Rectangle 36"/>
+          <p:cNvPr id="33" name="Rectangle 32"/>
           <p:cNvSpPr/>
           <p:nvPr/>
         </p:nvSpPr>
@@ -36345,7 +36059,7 @@
       </p:sp>
       <p:sp>
         <p:nvSpPr>
-          <p:cNvPr id="38" name="TextBox 37"/>
+          <p:cNvPr id="34" name="TextBox 33"/>
           <p:cNvSpPr txBox="1"/>
           <p:nvPr/>
         </p:nvSpPr>
@@ -36387,7 +36101,7 @@
       </p:sp>
       <p:sp>
         <p:nvSpPr>
-          <p:cNvPr id="39" name="TextBox 38"/>
+          <p:cNvPr id="35" name="TextBox 34"/>
           <p:cNvSpPr txBox="1"/>
           <p:nvPr/>
         </p:nvSpPr>
@@ -36526,7 +36240,7 @@
                 <a:cs typeface="Meiryo"/>
                 <a:ea typeface="Meiryo"/>
               </a:rPr>
-              <a:t>追加した6領域で迷った判断</a:t>
+              <a:t>追加した5領域で迷った判断</a:t>
             </a:r>
             <a:r>
               <a:rPr sz="1250" b="0" i="0">
@@ -36672,7 +36386,7 @@
         </p:nvGraphicFramePr>
         <p:xfrm>
           <a:off x="457200" y="1115568"/>
-          <a:ext cx="11277293" cy="4297680"/>
+          <a:ext cx="11277293" cy="3291840"/>
         </p:xfrm>
         <a:graphic>
           <a:graphicData uri="http://schemas.openxmlformats.org/drawingml/2006/table">
@@ -37540,250 +37254,6 @@
                   </a:tcPr>
                 </a:tc>
               </a:tr>
-              <a:tr h="502920">
-                <a:tc>
-                  <a:txBody>
-                    <a:bodyPr wrap="square"/>
-                    <a:lstStyle/>
-                    <a:p>
-                      <a:pPr algn="l">
-                        <a:lnSpc>
-                          <a:spcPct val="115000"/>
-                        </a:lnSpc>
-                        <a:buNone/>
-                      </a:pPr>
-                      <a:r>
-                        <a:rPr sz="900" b="1">
-                          <a:solidFill>
-                            <a:srgbClr val="14223A"/>
-                          </a:solidFill>
-                          <a:latin typeface="Meiryo"/>
-                          <a:cs typeface="Meiryo"/>
-                          <a:ea typeface="Meiryo"/>
-                        </a:rPr>
-                        <a:t>ストレス度を既存の risk_rating 列に載せた</a:t>
-                      </a:r>
-                    </a:p>
-                  </a:txBody>
-                  <a:tcPr marL="64008" marR="64008" marT="27432" marB="27432" anchor="ctr">
-                    <a:solidFill>
-                      <a:srgbClr val="FFFFFF"/>
-                    </a:solidFill>
-                  </a:tcPr>
-                </a:tc>
-                <a:tc>
-                  <a:txBody>
-                    <a:bodyPr wrap="square"/>
-                    <a:lstStyle/>
-                    <a:p>
-                      <a:pPr algn="ctr">
-                        <a:lnSpc>
-                          <a:spcPct val="115000"/>
-                        </a:lnSpc>
-                        <a:buNone/>
-                      </a:pPr>
-                      <a:r>
-                        <a:rPr sz="900" b="0">
-                          <a:solidFill>
-                            <a:srgbClr val="0F766E"/>
-                          </a:solidFill>
-                          <a:latin typeface="Meiryo"/>
-                          <a:cs typeface="Meiryo"/>
-                          <a:ea typeface="Meiryo"/>
-                        </a:rPr>
-                        <a:t>日報AI</a:t>
-                      </a:r>
-                    </a:p>
-                  </a:txBody>
-                  <a:tcPr marL="64008" marR="64008" marT="27432" marB="27432" anchor="ctr">
-                    <a:solidFill>
-                      <a:srgbClr val="FFFFFF"/>
-                    </a:solidFill>
-                  </a:tcPr>
-                </a:tc>
-                <a:tc>
-                  <a:txBody>
-                    <a:bodyPr wrap="square"/>
-                    <a:lstStyle/>
-                    <a:p>
-                      <a:pPr algn="l">
-                        <a:lnSpc>
-                          <a:spcPct val="115000"/>
-                        </a:lnSpc>
-                        <a:buNone/>
-                      </a:pPr>
-                      <a:r>
-                        <a:rPr sz="900" b="0">
-                          <a:solidFill>
-                            <a:srgbClr val="14223A"/>
-                          </a:solidFill>
-                          <a:latin typeface="Meiryo"/>
-                          <a:cs typeface="Meiryo"/>
-                          <a:ea typeface="Meiryo"/>
-                        </a:rPr>
-                        <a:t>GAS版のRisk列(PSI評価)をそのまま使い、列名は変えていない(ミラー送信と画面が参照するため)</a:t>
-                      </a:r>
-                    </a:p>
-                  </a:txBody>
-                  <a:tcPr marL="64008" marR="64008" marT="27432" marB="27432" anchor="ctr">
-                    <a:solidFill>
-                      <a:srgbClr val="FFFFFF"/>
-                    </a:solidFill>
-                  </a:tcPr>
-                </a:tc>
-                <a:tc>
-                  <a:txBody>
-                    <a:bodyPr wrap="square"/>
-                    <a:lstStyle/>
-                    <a:p>
-                      <a:pPr algn="l">
-                        <a:lnSpc>
-                          <a:spcPct val="115000"/>
-                        </a:lnSpc>
-                        <a:buNone/>
-                      </a:pPr>
-                      <a:r>
-                        <a:rPr sz="900" b="0">
-                          <a:solidFill>
-                            <a:srgbClr val="14223A"/>
-                          </a:solidFill>
-                          <a:latin typeface="Meiryo"/>
-                          <a:cs typeface="Meiryo"/>
-                          <a:ea typeface="Meiryo"/>
-                        </a:rPr>
-                        <a:t>名前と意味のずれを許容してよいか、stress_level に改名すべきか(運用前なので改名は可能)</a:t>
-                      </a:r>
-                    </a:p>
-                  </a:txBody>
-                  <a:tcPr marL="64008" marR="64008" marT="27432" marB="27432" anchor="ctr">
-                    <a:solidFill>
-                      <a:srgbClr val="FFFFFF"/>
-                    </a:solidFill>
-                  </a:tcPr>
-                </a:tc>
-              </a:tr>
-              <a:tr h="502920">
-                <a:tc>
-                  <a:txBody>
-                    <a:bodyPr wrap="square"/>
-                    <a:lstStyle/>
-                    <a:p>
-                      <a:pPr algn="l">
-                        <a:lnSpc>
-                          <a:spcPct val="115000"/>
-                        </a:lnSpc>
-                        <a:buNone/>
-                      </a:pPr>
-                      <a:r>
-                        <a:rPr sz="900" b="1">
-                          <a:solidFill>
-                            <a:srgbClr val="14223A"/>
-                          </a:solidFill>
-                          <a:latin typeface="Meiryo"/>
-                          <a:cs typeface="Meiryo"/>
-                          <a:ea typeface="Meiryo"/>
-                        </a:rPr>
-                        <a:t>キーワードの候補をコードで絞り、AIに表を渡さない</a:t>
-                      </a:r>
-                    </a:p>
-                  </a:txBody>
-                  <a:tcPr marL="64008" marR="64008" marT="27432" marB="27432" anchor="ctr">
-                    <a:solidFill>
-                      <a:srgbClr val="F8FAFC"/>
-                    </a:solidFill>
-                  </a:tcPr>
-                </a:tc>
-                <a:tc>
-                  <a:txBody>
-                    <a:bodyPr wrap="square"/>
-                    <a:lstStyle/>
-                    <a:p>
-                      <a:pPr algn="ctr">
-                        <a:lnSpc>
-                          <a:spcPct val="115000"/>
-                        </a:lnSpc>
-                        <a:buNone/>
-                      </a:pPr>
-                      <a:r>
-                        <a:rPr sz="900" b="0">
-                          <a:solidFill>
-                            <a:srgbClr val="0F766E"/>
-                          </a:solidFill>
-                          <a:latin typeface="Meiryo"/>
-                          <a:cs typeface="Meiryo"/>
-                          <a:ea typeface="Meiryo"/>
-                        </a:rPr>
-                        <a:t>日報AI</a:t>
-                      </a:r>
-                    </a:p>
-                  </a:txBody>
-                  <a:tcPr marL="64008" marR="64008" marT="27432" marB="27432" anchor="ctr">
-                    <a:solidFill>
-                      <a:srgbClr val="F8FAFC"/>
-                    </a:solidFill>
-                  </a:tcPr>
-                </a:tc>
-                <a:tc>
-                  <a:txBody>
-                    <a:bodyPr wrap="square"/>
-                    <a:lstStyle/>
-                    <a:p>
-                      <a:pPr algn="l">
-                        <a:lnSpc>
-                          <a:spcPct val="115000"/>
-                        </a:lnSpc>
-                        <a:buNone/>
-                      </a:pPr>
-                      <a:r>
-                        <a:rPr sz="900" b="0">
-                          <a:solidFill>
-                            <a:srgbClr val="14223A"/>
-                          </a:solidFill>
-                          <a:latin typeface="Meiryo"/>
-                          <a:cs typeface="Meiryo"/>
-                          <a:ea typeface="Meiryo"/>
-                        </a:rPr>
-                        <a:t>月齢・★の範囲・ストレス度の下限の3条件を満たす語だけを提示する。決定性と検証のしやすさを優先した</a:t>
-                      </a:r>
-                    </a:p>
-                  </a:txBody>
-                  <a:tcPr marL="64008" marR="64008" marT="27432" marB="27432" anchor="ctr">
-                    <a:solidFill>
-                      <a:srgbClr val="F8FAFC"/>
-                    </a:solidFill>
-                  </a:tcPr>
-                </a:tc>
-                <a:tc>
-                  <a:txBody>
-                    <a:bodyPr wrap="square"/>
-                    <a:lstStyle/>
-                    <a:p>
-                      <a:pPr algn="l">
-                        <a:lnSpc>
-                          <a:spcPct val="115000"/>
-                        </a:lnSpc>
-                        <a:buNone/>
-                      </a:pPr>
-                      <a:r>
-                        <a:rPr sz="900" b="0">
-                          <a:solidFill>
-                            <a:srgbClr val="14223A"/>
-                          </a:solidFill>
-                          <a:latin typeface="Meiryo"/>
-                          <a:cs typeface="Meiryo"/>
-                          <a:ea typeface="Meiryo"/>
-                        </a:rPr>
-                        <a:t>AIの裁量(表全体から選ばせる)を狭める判断の是非と、候補上限(既定6語)の妥当性</a:t>
-                      </a:r>
-                    </a:p>
-                  </a:txBody>
-                  <a:tcPr marL="64008" marR="64008" marT="27432" marB="27432" anchor="ctr">
-                    <a:solidFill>
-                      <a:srgbClr val="F8FAFC"/>
-                    </a:solidFill>
-                  </a:tcPr>
-                </a:tc>
-              </a:tr>
             </a:tbl>
           </a:graphicData>
         </a:graphic>
@@ -37957,7 +37427,7 @@
                 <a:cs typeface="Meiryo"/>
                 <a:ea typeface="Meiryo"/>
               </a:rPr>
-              <a:t>この8件について、より一般的な作り方があればご教示ください。とくにEAVは「項目が決まっていないから」という理由で選びましたが、後戻りしにくい選択だと考えています。</a:t>
+              <a:t>この6件について、より一般的な作り方があればご教示ください。とくにEAVは「項目が決まっていないから」という理由で選びましたが、後戻りしにくい選択だと考えています。</a:t>
             </a:r>
           </a:p>
         </p:txBody>
@@ -38072,7 +37542,7 @@
                 <a:cs typeface="Meiryo"/>
                 <a:ea typeface="Meiryo"/>
               </a:rPr>
-              <a:t>   優先度順。特に伺いたいのは ①②③⑩</a:t>
+              <a:t>   優先度順。特に伺いたいのは ①②③⑨</a:t>
             </a:r>
           </a:p>
         </p:txBody>
@@ -38207,7 +37677,7 @@
         </p:nvGraphicFramePr>
         <p:xfrm>
           <a:off x="457200" y="1152144"/>
-          <a:ext cx="11277292" cy="4224528"/>
+          <a:ext cx="11277292" cy="4242816"/>
         </p:xfrm>
         <a:graphic>
           <a:graphicData uri="http://schemas.openxmlformats.org/drawingml/2006/table">
@@ -38343,7 +37813,7 @@
                   </a:tcPr>
                 </a:tc>
               </a:tr>
-              <a:tr h="393192">
+              <a:tr h="438912">
                 <a:tc>
                   <a:txBody>
                     <a:bodyPr wrap="square"/>
@@ -38465,7 +37935,7 @@
                   </a:tcPr>
                 </a:tc>
               </a:tr>
-              <a:tr h="393192">
+              <a:tr h="438912">
                 <a:tc>
                   <a:txBody>
                     <a:bodyPr wrap="square"/>
@@ -38587,7 +38057,7 @@
                   </a:tcPr>
                 </a:tc>
               </a:tr>
-              <a:tr h="393192">
+              <a:tr h="438912">
                 <a:tc>
                   <a:txBody>
                     <a:bodyPr wrap="square"/>
@@ -38638,7 +38108,7 @@
                           <a:cs typeface="Meiryo"/>
                           <a:ea typeface="Meiryo"/>
                         </a:rPr>
-                        <a:t>予約の二重取りをどこで止めるか</a:t>
+                        <a:t>範囲の重なりをどこで止めるか(予約・単価・年齢帯)</a:t>
                       </a:r>
                     </a:p>
                   </a:txBody>
@@ -38668,7 +38138,7 @@
                           <a:cs typeface="Meiryo"/>
                           <a:ea typeface="Meiryo"/>
                         </a:rPr>
-                        <a:t>22</a:t>
+                        <a:t>22・11</a:t>
                       </a:r>
                     </a:p>
                   </a:txBody>
@@ -38698,7 +38168,7 @@
                           <a:cs typeface="Meiryo"/>
                           <a:ea typeface="Meiryo"/>
                         </a:rPr>
-                        <a:t>EXCLUDE制約が使えない(テスト環境に拡張が無い)。本番だけ張る / アプリで直列化 / 固定スロット / 運用で検知</a:t>
+                        <a:t>EXCLUDE制約が使えない(テスト環境に拡張が無い)ため3箇所とも入口(usecase)で担保している。本番だけ張る / アプリで直列化 / 固定スロット / 運用で検知、のどれを採るべきか</a:t>
                       </a:r>
                     </a:p>
                   </a:txBody>
@@ -38709,7 +38179,7 @@
                   </a:tcPr>
                 </a:tc>
               </a:tr>
-              <a:tr h="393192">
+              <a:tr h="438912">
                 <a:tc>
                   <a:txBody>
                     <a:bodyPr wrap="square"/>
@@ -38831,7 +38301,7 @@
                   </a:tcPr>
                 </a:tc>
               </a:tr>
-              <a:tr h="393192">
+              <a:tr h="438912">
                 <a:tc>
                   <a:txBody>
                     <a:bodyPr wrap="square"/>
@@ -38953,7 +38423,7 @@
                   </a:tcPr>
                 </a:tc>
               </a:tr>
-              <a:tr h="393192">
+              <a:tr h="438912">
                 <a:tc>
                   <a:txBody>
                     <a:bodyPr wrap="square"/>
@@ -39075,7 +38545,7 @@
                   </a:tcPr>
                 </a:tc>
               </a:tr>
-              <a:tr h="393192">
+              <a:tr h="438912">
                 <a:tc>
                   <a:txBody>
                     <a:bodyPr wrap="square"/>
@@ -39186,7 +38656,7 @@
                           <a:cs typeface="Meiryo"/>
                           <a:ea typeface="Meiryo"/>
                         </a:rPr>
-                        <a:t>要件が固まる前に作った27テーブルは、結局作り直しになるか</a:t>
+                        <a:t>要件が固まる前に作った18テーブルは、結局作り直しになるか</a:t>
                       </a:r>
                     </a:p>
                   </a:txBody>
@@ -39197,7 +38667,7 @@
                   </a:tcPr>
                 </a:tc>
               </a:tr>
-              <a:tr h="393192">
+              <a:tr h="438912">
                 <a:tc>
                   <a:txBody>
                     <a:bodyPr wrap="square"/>
@@ -39248,7 +38718,7 @@
                           <a:cs typeface="Meiryo"/>
                           <a:ea typeface="Meiryo"/>
                         </a:rPr>
-                        <a:t>追加6領域で迷った8つの判断</a:t>
+                        <a:t>追加5領域で迷った6つの判断</a:t>
                       </a:r>
                     </a:p>
                   </a:txBody>
@@ -39308,7 +38778,7 @@
                           <a:cs typeface="Meiryo"/>
                           <a:ea typeface="Meiryo"/>
                         </a:rPr>
-                        <a:t>EAV・請求書のvoid・Stripeの語彙・並び順・手当の粒度・取込元キー・risk_rating の名前・候補の絞り込み</a:t>
+                        <a:t>EAV・請求書のvoid・Stripeの語彙・並び順・手当の粒度・取込元キー</a:t>
                       </a:r>
                     </a:p>
                   </a:txBody>
@@ -39319,7 +38789,7 @@
                   </a:tcPr>
                 </a:tc>
               </a:tr>
-              <a:tr h="393192">
+              <a:tr h="438912">
                 <a:tc>
                   <a:txBody>
                     <a:bodyPr wrap="square"/>
@@ -39334,7 +38804,7 @@
                       <a:r>
                         <a:rPr sz="1000" b="0">
                           <a:solidFill>
-                            <a:srgbClr val="0369A1"/>
+                            <a:srgbClr val="B91C1C"/>
                           </a:solidFill>
                           <a:latin typeface="Meiryo"/>
                           <a:cs typeface="Meiryo"/>
@@ -39370,7 +38840,7 @@
                           <a:cs typeface="Meiryo"/>
                           <a:ea typeface="Meiryo"/>
                         </a:rPr>
-                        <a:t>日報AIの記録をどこまで残すか</a:t>
+                        <a:t>見落としているPostgreSQLの落とし穴</a:t>
                       </a:r>
                     </a:p>
                   </a:txBody>
@@ -39400,7 +38870,7 @@
                           <a:cs typeface="Meiryo"/>
                           <a:ea typeface="Meiryo"/>
                         </a:rPr>
-                        <a:t>11・28</a:t>
+                        <a:t>13・14</a:t>
                       </a:r>
                     </a:p>
                   </a:txBody>
@@ -39430,7 +38900,7 @@
                           <a:cs typeface="Meiryo"/>
                           <a:ea typeface="Meiryo"/>
                         </a:rPr>
-                        <a:t>入力メモとAIの生出力を生成1回ごとに残すため日報本文より嵩む。保持期間を決めるか、保存分だけにするか</a:t>
+                        <a:t>複合外部キー + RLS の二重防御で塞いだつもりだが、他に仕様上の抜け道はないか</a:t>
                       </a:r>
                     </a:p>
                   </a:txBody>
@@ -39441,128 +38911,6 @@
                   </a:tcPr>
                 </a:tc>
               </a:tr>
-              <a:tr h="393192">
-                <a:tc>
-                  <a:txBody>
-                    <a:bodyPr wrap="square"/>
-                    <a:lstStyle/>
-                    <a:p>
-                      <a:pPr algn="ctr">
-                        <a:lnSpc>
-                          <a:spcPct val="115000"/>
-                        </a:lnSpc>
-                        <a:buNone/>
-                      </a:pPr>
-                      <a:r>
-                        <a:rPr sz="1000" b="0">
-                          <a:solidFill>
-                            <a:srgbClr val="B91C1C"/>
-                          </a:solidFill>
-                          <a:latin typeface="Meiryo"/>
-                          <a:cs typeface="Meiryo"/>
-                          <a:ea typeface="Meiryo"/>
-                        </a:rPr>
-                        <a:t>⑩</a:t>
-                      </a:r>
-                    </a:p>
-                  </a:txBody>
-                  <a:tcPr marL="64008" marR="64008" marT="27432" marB="27432" anchor="ctr">
-                    <a:solidFill>
-                      <a:srgbClr val="F8FAFC"/>
-                    </a:solidFill>
-                  </a:tcPr>
-                </a:tc>
-                <a:tc>
-                  <a:txBody>
-                    <a:bodyPr wrap="square"/>
-                    <a:lstStyle/>
-                    <a:p>
-                      <a:pPr algn="l">
-                        <a:lnSpc>
-                          <a:spcPct val="115000"/>
-                        </a:lnSpc>
-                        <a:buNone/>
-                      </a:pPr>
-                      <a:r>
-                        <a:rPr sz="1000" b="0">
-                          <a:solidFill>
-                            <a:srgbClr val="14223A"/>
-                          </a:solidFill>
-                          <a:latin typeface="Meiryo"/>
-                          <a:cs typeface="Meiryo"/>
-                          <a:ea typeface="Meiryo"/>
-                        </a:rPr>
-                        <a:t>見落としているPostgreSQLの落とし穴</a:t>
-                      </a:r>
-                    </a:p>
-                  </a:txBody>
-                  <a:tcPr marL="64008" marR="64008" marT="27432" marB="27432" anchor="ctr">
-                    <a:solidFill>
-                      <a:srgbClr val="F8FAFC"/>
-                    </a:solidFill>
-                  </a:tcPr>
-                </a:tc>
-                <a:tc>
-                  <a:txBody>
-                    <a:bodyPr wrap="square"/>
-                    <a:lstStyle/>
-                    <a:p>
-                      <a:pPr algn="ctr">
-                        <a:lnSpc>
-                          <a:spcPct val="115000"/>
-                        </a:lnSpc>
-                        <a:buNone/>
-                      </a:pPr>
-                      <a:r>
-                        <a:rPr sz="1000" b="0">
-                          <a:solidFill>
-                            <a:srgbClr val="14223A"/>
-                          </a:solidFill>
-                          <a:latin typeface="Meiryo"/>
-                          <a:cs typeface="Meiryo"/>
-                          <a:ea typeface="Meiryo"/>
-                        </a:rPr>
-                        <a:t>13・14</a:t>
-                      </a:r>
-                    </a:p>
-                  </a:txBody>
-                  <a:tcPr marL="64008" marR="64008" marT="27432" marB="27432" anchor="ctr">
-                    <a:solidFill>
-                      <a:srgbClr val="F8FAFC"/>
-                    </a:solidFill>
-                  </a:tcPr>
-                </a:tc>
-                <a:tc>
-                  <a:txBody>
-                    <a:bodyPr wrap="square"/>
-                    <a:lstStyle/>
-                    <a:p>
-                      <a:pPr algn="l">
-                        <a:lnSpc>
-                          <a:spcPct val="115000"/>
-                        </a:lnSpc>
-                        <a:buNone/>
-                      </a:pPr>
-                      <a:r>
-                        <a:rPr sz="1000" b="0">
-                          <a:solidFill>
-                            <a:srgbClr val="14223A"/>
-                          </a:solidFill>
-                          <a:latin typeface="Meiryo"/>
-                          <a:cs typeface="Meiryo"/>
-                          <a:ea typeface="Meiryo"/>
-                        </a:rPr>
-                        <a:t>複合外部キー + RLS の二重防御で塞いだつもりだが、他に仕様上の抜け道はないか</a:t>
-                      </a:r>
-                    </a:p>
-                  </a:txBody>
-                  <a:tcPr marL="64008" marR="64008" marT="27432" marB="27432" anchor="ctr">
-                    <a:solidFill>
-                      <a:srgbClr val="F8FAFC"/>
-                    </a:solidFill>
-                  </a:tcPr>
-                </a:tc>
-              </a:tr>
             </a:tbl>
           </a:graphicData>
         </a:graphic>
@@ -39736,7 +39084,7 @@
                 <a:cs typeface="Meiryo"/>
                 <a:ea typeface="Meiryo"/>
               </a:rPr>
-              <a:t>⑩のような「自分では気づきようがない落とし穴」が、他にもあるかどうかを知りたいです。①〜⑨は選択肢が見えている判断ですが、⑩は見えていないものを指摘いただく必要があります。</a:t>
+              <a:t>⑨のような「自分では気づきようがない落とし穴」が、他にもあるかどうかを知りたいです。①〜⑧は選択肢が見えている判断ですが、⑨は見えていないものを指摘いただく必要があります。</a:t>
             </a:r>
           </a:p>
         </p:txBody>
@@ -40510,7 +39858,7 @@
                 <a:cs typeface="Meiryo"/>
                 <a:ea typeface="Meiryo"/>
               </a:rPr>
-              <a:t>  業務ロジックが外部に求める窓口の定義(30本)</a:t>
+              <a:t>  業務ロジックが外部に求める窓口の定義(33本)</a:t>
             </a:r>
           </a:p>
         </p:txBody>
@@ -40778,7 +40126,7 @@
                 <a:cs typeface="Meiryo"/>
                 <a:ea typeface="Meiryo"/>
               </a:rPr>
-              <a:t>  第4章の27テーブルの設計理由と、未決の論点</a:t>
+              <a:t>  先行整備5領域(18テーブル)・日報AI3軸(10テーブル)の設計理由と、未決の論点</a:t>
             </a:r>
           </a:p>
           <a:p>
@@ -47384,7 +46732,7 @@
                 <a:cs typeface="Meiryo"/>
                 <a:ea typeface="Meiryo"/>
               </a:rPr>
-              <a:t>この①〜④の外側に、先に形だけ固めた6領域がある</a:t>
+              <a:t>この①〜④の外側に、先に形だけ固めた5領域がある</a:t>
             </a:r>
           </a:p>
         </p:txBody>
@@ -47433,7 +46781,7 @@
                 <a:cs typeface="Meiryo"/>
                 <a:ea typeface="Meiryo"/>
               </a:rPr>
-              <a:t>予約 / 請求・決済 / 顧客カルテ / 訪問割当の最適化 / 移動手段別の手当 / 日報AIのプロンプト調整。表と制約を先に用意してあり、この資料の第4章で扱う(文面の版管理だけは稼働中)</a:t>
+              <a:t>予約 / 請求・決済 / 顧客カルテ / 訪問割当の最適化 / 移動手段別の手当。表と制約を先に用意してあり、この資料の第4章で扱う(日報AIのプロンプト調整は3軸まで実装済みで、この5領域には含めない)</a:t>
             </a:r>
           </a:p>
         </p:txBody>
@@ -47722,7 +47070,7 @@
                 <a:cs typeface="Meiryo"/>
                 <a:ea typeface="Meiryo"/>
               </a:rPr>
-              <a:t>   業務ドメインごとに12のまとまり。tenants以外の43枚はすべて同じ形を守る</a:t>
+              <a:t>   業務ドメインごとに11のまとまり。tenants以外の43枚はすべて同じ形を守る</a:t>
             </a:r>
           </a:p>
         </p:txBody>
@@ -48132,7 +47480,7 @@
                 <a:cs typeface="Meiryo"/>
                 <a:ea typeface="Meiryo"/>
               </a:rPr>
-              <a:t>稼働中 — アプリが読み書きしている17枚</a:t>
+              <a:t>稼働中 — アプリが読み書きしている26枚</a:t>
             </a:r>
           </a:p>
         </p:txBody>
@@ -48146,7 +47494,7 @@
         <p:spPr>
           <a:xfrm>
             <a:off x="457200" y="1572768"/>
-            <a:ext cx="1757629" cy="1234440"/>
+            <a:ext cx="1757629" cy="2084832"/>
           </a:xfrm>
           <a:prstGeom prst="roundRect">
             <a:avLst>
@@ -48254,7 +47602,7 @@
         <p:spPr>
           <a:xfrm>
             <a:off x="539496" y="1984248"/>
-            <a:ext cx="1593037" cy="749808"/>
+            <a:ext cx="1593037" cy="1600200"/>
           </a:xfrm>
           <a:prstGeom prst="rect">
             <a:avLst/>
@@ -48299,7 +47647,7 @@
         <p:spPr>
           <a:xfrm>
             <a:off x="2361133" y="1572768"/>
-            <a:ext cx="1757629" cy="1234440"/>
+            <a:ext cx="1757629" cy="2084832"/>
           </a:xfrm>
           <a:prstGeom prst="roundRect">
             <a:avLst>
@@ -48407,7 +47755,7 @@
         <p:spPr>
           <a:xfrm>
             <a:off x="2443429" y="1984248"/>
-            <a:ext cx="1593037" cy="749808"/>
+            <a:ext cx="1593037" cy="1600200"/>
           </a:xfrm>
           <a:prstGeom prst="rect">
             <a:avLst/>
@@ -48451,7 +47799,7 @@
         <p:spPr>
           <a:xfrm>
             <a:off x="4265066" y="1572768"/>
-            <a:ext cx="1757629" cy="1234440"/>
+            <a:ext cx="1757629" cy="2084832"/>
           </a:xfrm>
           <a:prstGeom prst="roundRect">
             <a:avLst>
@@ -48559,7 +47907,7 @@
         <p:spPr>
           <a:xfrm>
             <a:off x="4347362" y="1984248"/>
-            <a:ext cx="1593037" cy="749808"/>
+            <a:ext cx="1593037" cy="1600200"/>
           </a:xfrm>
           <a:prstGeom prst="rect">
             <a:avLst/>
@@ -48602,7 +47950,7 @@
         <p:spPr>
           <a:xfrm>
             <a:off x="6168999" y="1572768"/>
-            <a:ext cx="1757629" cy="1234440"/>
+            <a:ext cx="1757629" cy="2084832"/>
           </a:xfrm>
           <a:prstGeom prst="roundRect">
             <a:avLst>
@@ -48710,7 +48058,7 @@
         <p:spPr>
           <a:xfrm>
             <a:off x="6251295" y="1984248"/>
-            <a:ext cx="1593037" cy="749808"/>
+            <a:ext cx="1593037" cy="1600200"/>
           </a:xfrm>
           <a:prstGeom prst="rect">
             <a:avLst/>
@@ -48755,7 +48103,7 @@
         <p:spPr>
           <a:xfrm>
             <a:off x="8072932" y="1572768"/>
-            <a:ext cx="1757629" cy="1234440"/>
+            <a:ext cx="1757629" cy="2084832"/>
           </a:xfrm>
           <a:prstGeom prst="roundRect">
             <a:avLst>
@@ -48863,7 +48211,7 @@
         <p:spPr>
           <a:xfrm>
             <a:off x="8155228" y="1984248"/>
-            <a:ext cx="1593037" cy="749808"/>
+            <a:ext cx="1593037" cy="1600200"/>
           </a:xfrm>
           <a:prstGeom prst="rect">
             <a:avLst/>
@@ -48907,7 +48255,7 @@
         <p:spPr>
           <a:xfrm>
             <a:off x="9976866" y="1572768"/>
-            <a:ext cx="1757629" cy="1234440"/>
+            <a:ext cx="1757629" cy="2084832"/>
           </a:xfrm>
           <a:prstGeom prst="roundRect">
             <a:avLst>
@@ -49001,7 +48349,7 @@
                 <a:cs typeface="Meiryo"/>
                 <a:ea typeface="Meiryo"/>
               </a:rPr>
-              <a:t>日報AIの文面 (1)</a:t>
+              <a:t>日報AI(3軸+文面) (10)</a:t>
             </a:r>
           </a:p>
         </p:txBody>
@@ -49015,7 +48363,7 @@
         <p:spPr>
           <a:xfrm>
             <a:off x="10059162" y="1984248"/>
-            <a:ext cx="1593037" cy="749808"/>
+            <a:ext cx="1593037" cy="1600200"/>
           </a:xfrm>
           <a:prstGeom prst="rect">
             <a:avLst/>
@@ -49043,7 +48391,16 @@
                 <a:cs typeface="Consolas"/>
                 <a:ea typeface="Consolas"/>
               </a:rPr>
-              <a:t>prompt_templates</a:t>
+              <a:t>prompt_templates
+report_age_bands
+report_keywords
+report_age_band_keywords
+report_education_levels
+report_stress_levels
+report_phrases
+customer_report_profiles
+report_ai_generations
+report_ai_generation_keywords</a:t>
             </a:r>
           </a:p>
         </p:txBody>
@@ -49056,7 +48413,7 @@
         </p:nvSpPr>
         <p:spPr>
           <a:xfrm>
-            <a:off x="457200" y="2962656"/>
+            <a:off x="457200" y="3803904"/>
             <a:ext cx="8686800" cy="237744"/>
           </a:xfrm>
           <a:prstGeom prst="rect">
@@ -49085,7 +48442,7 @@
                 <a:cs typeface="Meiryo"/>
                 <a:ea typeface="Meiryo"/>
               </a:rPr>
-              <a:t>スキーマだけ先に用意 — 表と制約はあるが、実装・API・画面はこれから(27枚)</a:t>
+              <a:t>スキーマだけ先に用意 — 表と制約はあるが、実装・API・画面はこれから(18枚)</a:t>
             </a:r>
           </a:p>
         </p:txBody>
@@ -49098,8 +48455,8 @@
         </p:nvSpPr>
         <p:spPr>
           <a:xfrm>
-            <a:off x="457200" y="3218688"/>
-            <a:ext cx="1757629" cy="2212848"/>
+            <a:off x="457200" y="4059936"/>
+            <a:ext cx="2138415" cy="1284732"/>
           </a:xfrm>
           <a:prstGeom prst="roundRect">
             <a:avLst>
@@ -49146,8 +48503,8 @@
         </p:nvSpPr>
         <p:spPr>
           <a:xfrm>
-            <a:off x="457200" y="3218688"/>
-            <a:ext cx="1757629" cy="347472"/>
+            <a:off x="457200" y="4059936"/>
+            <a:ext cx="2138415" cy="347472"/>
           </a:xfrm>
           <a:prstGeom prst="rect">
             <a:avLst/>
@@ -49206,8 +48563,8 @@
         </p:nvSpPr>
         <p:spPr>
           <a:xfrm>
-            <a:off x="539496" y="3630168"/>
-            <a:ext cx="1593037" cy="1728216"/>
+            <a:off x="539496" y="4471416"/>
+            <a:ext cx="1973823" cy="800100"/>
           </a:xfrm>
           <a:prstGeom prst="rect">
             <a:avLst/>
@@ -49249,8 +48606,8 @@
         </p:nvSpPr>
         <p:spPr>
           <a:xfrm>
-            <a:off x="2361133" y="3218688"/>
-            <a:ext cx="1757629" cy="2212848"/>
+            <a:off x="2741919" y="4059936"/>
+            <a:ext cx="2138415" cy="1284732"/>
           </a:xfrm>
           <a:prstGeom prst="roundRect">
             <a:avLst>
@@ -49297,8 +48654,8 @@
         </p:nvSpPr>
         <p:spPr>
           <a:xfrm>
-            <a:off x="2361133" y="3218688"/>
-            <a:ext cx="1757629" cy="347472"/>
+            <a:off x="2741919" y="4059936"/>
+            <a:ext cx="2138415" cy="347472"/>
           </a:xfrm>
           <a:prstGeom prst="rect">
             <a:avLst/>
@@ -49357,8 +48714,8 @@
         </p:nvSpPr>
         <p:spPr>
           <a:xfrm>
-            <a:off x="2443429" y="3630168"/>
-            <a:ext cx="1593037" cy="1728216"/>
+            <a:off x="2824215" y="4471416"/>
+            <a:ext cx="1973823" cy="800100"/>
           </a:xfrm>
           <a:prstGeom prst="rect">
             <a:avLst/>
@@ -49402,8 +48759,8 @@
         </p:nvSpPr>
         <p:spPr>
           <a:xfrm>
-            <a:off x="4265066" y="3218688"/>
-            <a:ext cx="1757629" cy="2212848"/>
+            <a:off x="5026639" y="4059936"/>
+            <a:ext cx="2138415" cy="1284732"/>
           </a:xfrm>
           <a:prstGeom prst="roundRect">
             <a:avLst>
@@ -49450,8 +48807,8 @@
         </p:nvSpPr>
         <p:spPr>
           <a:xfrm>
-            <a:off x="4265066" y="3218688"/>
-            <a:ext cx="1757629" cy="347472"/>
+            <a:off x="5026639" y="4059936"/>
+            <a:ext cx="2138415" cy="347472"/>
           </a:xfrm>
           <a:prstGeom prst="rect">
             <a:avLst/>
@@ -49510,8 +48867,8 @@
         </p:nvSpPr>
         <p:spPr>
           <a:xfrm>
-            <a:off x="4347362" y="3630168"/>
-            <a:ext cx="1593037" cy="1728216"/>
+            <a:off x="5108935" y="4471416"/>
+            <a:ext cx="1973823" cy="800100"/>
           </a:xfrm>
           <a:prstGeom prst="rect">
             <a:avLst/>
@@ -49556,8 +48913,8 @@
         </p:nvSpPr>
         <p:spPr>
           <a:xfrm>
-            <a:off x="6168999" y="3218688"/>
-            <a:ext cx="1757629" cy="2212848"/>
+            <a:off x="7311359" y="4059936"/>
+            <a:ext cx="2138415" cy="1284732"/>
           </a:xfrm>
           <a:prstGeom prst="roundRect">
             <a:avLst>
@@ -49604,8 +48961,8 @@
         </p:nvSpPr>
         <p:spPr>
           <a:xfrm>
-            <a:off x="6168999" y="3218688"/>
-            <a:ext cx="1757629" cy="347472"/>
+            <a:off x="7311359" y="4059936"/>
+            <a:ext cx="2138415" cy="347472"/>
           </a:xfrm>
           <a:prstGeom prst="rect">
             <a:avLst/>
@@ -49664,8 +49021,8 @@
         </p:nvSpPr>
         <p:spPr>
           <a:xfrm>
-            <a:off x="6251295" y="3630168"/>
-            <a:ext cx="1593037" cy="1728216"/>
+            <a:off x="7393655" y="4471416"/>
+            <a:ext cx="1973823" cy="800100"/>
           </a:xfrm>
           <a:prstGeom prst="rect">
             <a:avLst/>
@@ -49710,8 +49067,8 @@
         </p:nvSpPr>
         <p:spPr>
           <a:xfrm>
-            <a:off x="8072932" y="3218688"/>
-            <a:ext cx="1757629" cy="2212848"/>
+            <a:off x="9596079" y="4059936"/>
+            <a:ext cx="2138415" cy="1284732"/>
           </a:xfrm>
           <a:prstGeom prst="roundRect">
             <a:avLst>
@@ -49758,8 +49115,8 @@
         </p:nvSpPr>
         <p:spPr>
           <a:xfrm>
-            <a:off x="8072932" y="3218688"/>
-            <a:ext cx="1757629" cy="347472"/>
+            <a:off x="9596079" y="4059936"/>
+            <a:ext cx="2138415" cy="347472"/>
           </a:xfrm>
           <a:prstGeom prst="rect">
             <a:avLst/>
@@ -49818,8 +49175,8 @@
         </p:nvSpPr>
         <p:spPr>
           <a:xfrm>
-            <a:off x="8155228" y="3630168"/>
-            <a:ext cx="1593037" cy="1728216"/>
+            <a:off x="9678375" y="4471416"/>
+            <a:ext cx="1973823" cy="800100"/>
           </a:xfrm>
           <a:prstGeom prst="rect">
             <a:avLst/>
@@ -49856,164 +49213,6 @@
       <p:sp>
         <p:nvSpPr>
           <p:cNvPr id="46" name="Rounded Rectangle 45"/>
-          <p:cNvSpPr/>
-          <p:nvPr/>
-        </p:nvSpPr>
-        <p:spPr>
-          <a:xfrm>
-            <a:off x="9976866" y="3218688"/>
-            <a:ext cx="1757629" cy="2212848"/>
-          </a:xfrm>
-          <a:prstGeom prst="roundRect">
-            <a:avLst>
-              <a:gd name="adj" fmla="val 12000"/>
-            </a:avLst>
-          </a:prstGeom>
-          <a:solidFill>
-            <a:srgbClr val="FFFFFF"/>
-          </a:solidFill>
-          <a:ln w="15240">
-            <a:solidFill>
-              <a:srgbClr val="C2410C"/>
-            </a:solidFill>
-          </a:ln>
-          <a:effectLst/>
-        </p:spPr>
-        <p:style>
-          <a:lnRef idx="1">
-            <a:schemeClr val="accent1"/>
-          </a:lnRef>
-          <a:fillRef idx="3">
-            <a:schemeClr val="accent1"/>
-          </a:fillRef>
-          <a:effectRef idx="2">
-            <a:schemeClr val="accent1"/>
-          </a:effectRef>
-          <a:fontRef idx="minor">
-            <a:schemeClr val="lt1"/>
-          </a:fontRef>
-        </p:style>
-        <p:txBody>
-          <a:bodyPr rtlCol="0" anchor="ctr" wrap="square"/>
-          <a:lstStyle/>
-          <a:p>
-            <a:pPr algn="ctr"/>
-          </a:p>
-        </p:txBody>
-      </p:sp>
-      <p:sp>
-        <p:nvSpPr>
-          <p:cNvPr id="47" name="Rectangle 46"/>
-          <p:cNvSpPr/>
-          <p:nvPr/>
-        </p:nvSpPr>
-        <p:spPr>
-          <a:xfrm>
-            <a:off x="9976866" y="3218688"/>
-            <a:ext cx="1757629" cy="347472"/>
-          </a:xfrm>
-          <a:prstGeom prst="rect">
-            <a:avLst/>
-          </a:prstGeom>
-          <a:solidFill>
-            <a:srgbClr val="C2410C"/>
-          </a:solidFill>
-          <a:ln>
-            <a:noFill/>
-          </a:ln>
-          <a:effectLst/>
-        </p:spPr>
-        <p:style>
-          <a:lnRef idx="1">
-            <a:schemeClr val="accent1"/>
-          </a:lnRef>
-          <a:fillRef idx="3">
-            <a:schemeClr val="accent1"/>
-          </a:fillRef>
-          <a:effectRef idx="2">
-            <a:schemeClr val="accent1"/>
-          </a:effectRef>
-          <a:fontRef idx="minor">
-            <a:schemeClr val="lt1"/>
-          </a:fontRef>
-        </p:style>
-        <p:txBody>
-          <a:bodyPr rtlCol="0" anchor="ctr" wrap="square" lIns="41148" rIns="41148" tIns="18288" bIns="18288"/>
-          <a:lstStyle/>
-          <a:p>
-            <a:pPr algn="ctr">
-              <a:lnSpc>
-                <a:spcPct val="116000"/>
-              </a:lnSpc>
-              <a:buNone/>
-            </a:pPr>
-            <a:r>
-              <a:rPr sz="1000" b="1">
-                <a:solidFill>
-                  <a:srgbClr val="FFFFFF"/>
-                </a:solidFill>
-                <a:latin typeface="Meiryo"/>
-                <a:cs typeface="Meiryo"/>
-                <a:ea typeface="Meiryo"/>
-              </a:rPr>
-              <a:t>日報AIの表・記録 (9)</a:t>
-            </a:r>
-          </a:p>
-        </p:txBody>
-      </p:sp>
-      <p:sp>
-        <p:nvSpPr>
-          <p:cNvPr id="48" name="TextBox 47"/>
-          <p:cNvSpPr txBox="1"/>
-          <p:nvPr/>
-        </p:nvSpPr>
-        <p:spPr>
-          <a:xfrm>
-            <a:off x="10059162" y="3630168"/>
-            <a:ext cx="1593037" cy="1728216"/>
-          </a:xfrm>
-          <a:prstGeom prst="rect">
-            <a:avLst/>
-          </a:prstGeom>
-          <a:noFill/>
-        </p:spPr>
-        <p:txBody>
-          <a:bodyPr wrap="square" lIns="0" rIns="0" tIns="0" bIns="0" anchor="t">
-            <a:spAutoFit/>
-          </a:bodyPr>
-          <a:lstStyle/>
-          <a:p>
-            <a:pPr algn="l">
-              <a:lnSpc>
-                <a:spcPct val="150000"/>
-              </a:lnSpc>
-              <a:buNone/>
-            </a:pPr>
-            <a:r>
-              <a:rPr sz="700" b="0" i="0">
-                <a:solidFill>
-                  <a:srgbClr val="14223A"/>
-                </a:solidFill>
-                <a:latin typeface="Consolas"/>
-                <a:cs typeface="Consolas"/>
-                <a:ea typeface="Consolas"/>
-              </a:rPr>
-              <a:t>report_age_bands
-report_keywords
-report_age_band_keywords
-report_education_levels
-report_stress_levels
-report_phrases
-customer_report_profiles
-report_ai_generations
-report_ai_generation_keywords</a:t>
-            </a:r>
-          </a:p>
-        </p:txBody>
-      </p:sp>
-      <p:sp>
-        <p:nvSpPr>
-          <p:cNvPr id="49" name="Rounded Rectangle 48"/>
           <p:cNvSpPr/>
           <p:nvPr/>
         </p:nvSpPr>
@@ -50059,7 +49258,7 @@
       </p:sp>
       <p:sp>
         <p:nvSpPr>
-          <p:cNvPr id="50" name="Rectangle 49"/>
+          <p:cNvPr id="47" name="Rectangle 46"/>
           <p:cNvSpPr/>
           <p:nvPr/>
         </p:nvSpPr>
@@ -50103,7 +49302,7 @@
       </p:sp>
       <p:sp>
         <p:nvSpPr>
-          <p:cNvPr id="51" name="TextBox 50"/>
+          <p:cNvPr id="48" name="TextBox 47"/>
           <p:cNvSpPr txBox="1"/>
           <p:nvPr/>
         </p:nvSpPr>
@@ -50145,7 +49344,7 @@
       </p:sp>
       <p:sp>
         <p:nvSpPr>
-          <p:cNvPr id="52" name="TextBox 51"/>
+          <p:cNvPr id="49" name="TextBox 48"/>
           <p:cNvSpPr txBox="1"/>
           <p:nvPr/>
         </p:nvSpPr>
@@ -52826,8 +52025,8 @@
         </p:nvSpPr>
         <p:spPr>
           <a:xfrm>
-            <a:off x="6245352" y="5468112"/>
-            <a:ext cx="5486400" cy="914400"/>
+            <a:off x="6245352" y="5194808"/>
+            <a:ext cx="5486400" cy="1187704"/>
           </a:xfrm>
           <a:prstGeom prst="roundRect">
             <a:avLst>
@@ -52872,8 +52071,8 @@
         </p:nvSpPr>
         <p:spPr>
           <a:xfrm>
-            <a:off x="6245352" y="5468112"/>
-            <a:ext cx="68580" cy="914400"/>
+            <a:off x="6245352" y="5194808"/>
+            <a:ext cx="68580" cy="1187704"/>
           </a:xfrm>
           <a:prstGeom prst="rect">
             <a:avLst/>
@@ -52916,7 +52115,7 @@
         </p:nvSpPr>
         <p:spPr>
           <a:xfrm>
-            <a:off x="6428232" y="5559552"/>
+            <a:off x="6428232" y="5286248"/>
             <a:ext cx="5120640" cy="237744"/>
           </a:xfrm>
           <a:prstGeom prst="rect">
@@ -52958,8 +52157,8 @@
         </p:nvSpPr>
         <p:spPr>
           <a:xfrm>
-            <a:off x="6428232" y="5815584"/>
-            <a:ext cx="5138928" cy="493776"/>
+            <a:off x="6428232" y="5542280"/>
+            <a:ext cx="5138928" cy="767080"/>
           </a:xfrm>
           <a:prstGeom prst="rect">
             <a:avLst/>
@@ -52987,7 +52186,7 @@
                 <a:cs typeface="Meiryo"/>
                 <a:ea typeface="Meiryo"/>
               </a:rPr>
-              <a:t>提案書の差別化要因(予約・請求・カルテ)は、次の2ページの27枚としてスキーマだけ先に用意してあります。</a:t>
+              <a:t>提案書の差別化要因のうち、予約・請求・カルテ・訪問割当の最適化・移動手当(18枚)は次ページでスキーマだけ先に用意してあります。日報AIの3軸の9枚はその次のページで、この一覧の prompt_templates と合わせて既に実装まで進んでいます。</a:t>
             </a:r>
           </a:p>
         </p:txBody>

--- a/doc/slides/db-review.pptx
+++ b/doc/slides/db-review.pptx
@@ -6354,7 +6354,7 @@
                           <a:cs typeface="Meiryo"/>
                           <a:ea typeface="Meiryo"/>
                         </a:rPr>
-                        <a:t>ストレス度(1〜5)ごとの安全弁。★の引き下げ幅・教育語の可否・連絡要否の3列</a:t>
+                        <a:t>ストレス度(1〜5)ごとの制限。★の引き下げ幅・教育語の可否・連絡要否の3列</a:t>
                       </a:r>
                     </a:p>
                   </a:txBody>
@@ -7210,7 +7210,7 @@
                 <a:cs typeface="Meiryo"/>
                 <a:ea typeface="Meiryo"/>
               </a:rPr>
-              <a:t>ストレス度は★より優先する(安全弁を文面ではなく列で持つ)</a:t>
+              <a:t>ストレス度は★より優先する(制限を文面ではなく列で持つ)</a:t>
             </a:r>
           </a:p>
         </p:txBody>
@@ -7252,7 +7252,7 @@
                 <a:cs typeface="Meiryo"/>
                 <a:ea typeface="Meiryo"/>
               </a:rPr>
-              <a:t>負担の大きい家庭では教育語を止めてねぎらいに切り替えます。「★を何段下げるか」「教育語を使ってよいか」「管理者連絡を要するか」は report_stress_levels の3列に持たせ、コードが機械的に適用します(文面の一節として書くと、文面の編集で安全弁が外れるため)。</a:t>
+              <a:t>負担の大きい家庭では教育語を止めてねぎらいに切り替えます。「★を何段下げるか」「教育語を使ってよいか」「管理者連絡を要するか」は report_stress_levels の3列に持たせ、コードが機械的に適用します(文面の一節として書くと、文面の編集で制限が外れるため)。</a:t>
             </a:r>
           </a:p>
         </p:txBody>
@@ -7706,7 +7706,7 @@
                 <a:cs typeface="Meiryo"/>
                 <a:ea typeface="Meiryo"/>
               </a:rPr>
-              <a:t>1つのデータベース・1組の表に全社のデータを入れ、各行に tenant_id 列で「どの法人か」を持たせる</a:t>
+              <a:t>1つのデータベース・1組の表に全社のデータを入れ、各行に tenant_id 列でどの法人かを持たせる</a:t>
             </a:r>
           </a:p>
           <a:p>
@@ -8254,7 +8254,7 @@
                 <a:cs typeface="Meiryo"/>
                 <a:ea typeface="Meiryo"/>
               </a:rPr>
-              <a:t>数社規模では明らかに過剰</a:t>
+              <a:t>数社規模では過剰</a:t>
             </a:r>
           </a:p>
         </p:txBody>
@@ -8869,7 +8869,7 @@
                 <a:cs typeface="Meiryo"/>
                 <a:ea typeface="Meiryo"/>
               </a:rPr>
-              <a:t>方式Aの弱点をどう塞ぐか(次の2ページ)</a:t>
+              <a:t>方式Aの弱点への対策(次の2ページ)</a:t>
             </a:r>
           </a:p>
         </p:txBody>
@@ -8911,7 +8911,7 @@
                 <a:cs typeface="Meiryo"/>
                 <a:ea typeface="Meiryo"/>
               </a:rPr>
-              <a:t>「行が混ざりうる」という方式Aの弱点に対して、二重の仕組みを入れています。① データベース自身に「この法人の行しか見せない」と設定する(RLS)  ② 紐付けを2列セットにして「同じ法人の行か」をデータベースに確かめさせる(複合外部キー)</a:t>
+              <a:t>行が混ざりうるという方式Aの弱点に対して、二重の仕組みを入れています。① この法人の行しか返さない条件をデータベース側に設定する(RLS)  ② 紐付けを2列セットにして、同じ法人の行かをデータベース側で検査する(複合外部キー)</a:t>
             </a:r>
           </a:p>
         </p:txBody>
@@ -9015,7 +9015,7 @@
                 <a:cs typeface="Meiryo"/>
                 <a:ea typeface="Meiryo"/>
               </a:rPr>
-              <a:t>守り① データベース自身に絞り込ませる</a:t>
+              <a:t>守り① データベース側で行を絞り込む</a:t>
             </a:r>
             <a:r>
               <a:rPr sz="1250" b="0" i="0">
@@ -9420,7 +9420,7 @@
                 <a:cs typeface="Meiryo"/>
                 <a:ea typeface="Meiryo"/>
               </a:rPr>
-              <a:t>この接続の「今の法人」を宣言</a:t>
+              <a:t>この接続の現在の法人を宣言</a:t>
             </a:r>
           </a:p>
         </p:txBody>
@@ -10135,7 +10135,7 @@
                 <a:cs typeface="Meiryo"/>
                 <a:ea typeface="Meiryo"/>
               </a:rPr>
-              <a:t>設定を忘れた接続からは、どの行も見えない(安全側に倒れる)。書き込みも同じ条件で弾かれる。</a:t>
+              <a:t>設定を忘れた接続からは、どの行も見えない。書き込みも同じ条件で弾かれる。</a:t>
             </a:r>
           </a:p>
         </p:txBody>
@@ -10269,7 +10269,7 @@
                 <a:cs typeface="Meiryo"/>
                 <a:ea typeface="Meiryo"/>
               </a:rPr>
-              <a:t>効いていることをCIで毎回確かめている</a:t>
+              <a:t>効いていることをCIで毎回検査している</a:t>
             </a:r>
           </a:p>
         </p:txBody>
@@ -10969,7 +10969,7 @@
                 <a:cs typeface="Meiryo"/>
                 <a:ea typeface="Meiryo"/>
               </a:rPr>
-              <a:t>RLSは SELECT / UPDATE / DELETE を絞り込むだけで、外部キーの参照チェックには効きません。つまり単一列の外部キーだと、他社の行を指す値を書けてしまいます。</a:t>
+              <a:t>RLSは SELECT / UPDATE / DELETE を絞り込むだけで、外部キーの参照チェックには効きません。単一列の外部キーだと、他社の行を指す値を書けてしまいます。</a:t>
             </a:r>
           </a:p>
         </p:txBody>
@@ -11364,7 +11364,7 @@
                 <a:cs typeface="Meiryo"/>
                 <a:ea typeface="Meiryo"/>
               </a:rPr>
-              <a:t>T社の作業中にU社の顧客IDを書き込んでも、参照先が実在するためデータベースは通してしまう。「T社の日報がU社の顧客を指す」行が生まれ、しかも RLS で見えないので気づけない。</a:t>
+              <a:t>T社の作業中にU社の顧客IDを書き込んでも、参照先が実在するためデータベースは通してしまう。T社の日報がU社の顧客を指す行ができ、RLSで見えないため気づけない。</a:t>
             </a:r>
           </a:p>
         </p:txBody>
@@ -11778,7 +11778,7 @@
                 <a:cs typeface="Meiryo"/>
                 <a:ea typeface="Meiryo"/>
               </a:rPr>
-              <a:t>「T社 かつ そのID」の組み合わせが参照先に無ければ、データベースが書き込みを拒否する。アプリにバグがあっても、法人を跨いだ紐付けは物理的に作れない。</a:t>
+              <a:t>T社かつそのIDという組み合わせが参照先に無ければ、データベースが書き込みを拒否する。アプリにバグがあっても、法人を跨いだ参照は作れない。</a:t>
             </a:r>
           </a:p>
         </p:txBody>
@@ -13133,7 +13133,7 @@
                 <a:cs typeface="Meiryo"/>
                 <a:ea typeface="Meiryo"/>
               </a:rPr>
-              <a:t>では業務データは何で守るのか — 4枚重ね</a:t>
+              <a:t>業務データを守る4層</a:t>
             </a:r>
           </a:p>
         </p:txBody>
@@ -14213,7 +14213,7 @@
                 <a:cs typeface="Meiryo"/>
                 <a:ea typeface="Meiryo"/>
               </a:rPr>
-              <a:t>ここが最大の論点です(第3章 論点②)</a:t>
+              <a:t>平文化の前提(第3章 論点②)</a:t>
             </a:r>
           </a:p>
         </p:txBody>
@@ -14255,7 +14255,7 @@
                 <a:cs typeface="Meiryo"/>
                 <a:ea typeface="Meiryo"/>
               </a:rPr>
-              <a:t>業務データを平文にした判断は、④の保存時暗号化が本番で実際に効くことを前提にしています。ところが本番(Cloud Run + Cloud SQL)は未配備で、いま動いているのはローカル開発(Docker、保存時暗号化なし)と公開デモ(ブラウザ内DB、鍵は公開の固定値)だけです。この前提の置き方が妥当かをご判断いただきたいです。</a:t>
+              <a:t>業務データを平文にした判断は、④の保存時暗号化が本番で実際に効くことを前提にしています。本番(Cloud Run + Cloud SQL)は未配備で、いま動いているのはローカル開発(Docker、保存時暗号化なし)と公開デモ(ブラウザ内DB、鍵は公開の固定値)だけです。この前提の置き方が妥当かをご判断いただきたいです。</a:t>
             </a:r>
           </a:p>
         </p:txBody>
@@ -14532,7 +14532,7 @@
                 <a:cs typeface="Meiryo"/>
                 <a:ea typeface="Meiryo"/>
               </a:rPr>
-              <a:t>「鍵を1本だけ使う」と、その1本が漏れたら全社分が読めてしまう。そこで法人ごとに別の鍵を作り、その鍵自体をさらに上位の鍵で包んで保管する。</a:t>
+              <a:t>鍵を1本だけ使うと、その鍵が漏れたときに全社分が読めてしまう。そこで法人ごとに別の鍵を作り、その鍵をさらに上位の鍵で包んで保管する。</a:t>
             </a:r>
           </a:p>
         </p:txBody>
@@ -14838,7 +14838,7 @@
                 <a:cs typeface="Meiryo"/>
                 <a:ea typeface="Meiryo"/>
               </a:rPr>
-              <a:t>必ず2列ペア。どの世代の鍵で暗号化したかを必ず記録</a:t>
+              <a:t>2列ペア。どの世代の鍵で暗号化したかを必ず記録</a:t>
             </a:r>
           </a:p>
         </p:txBody>
@@ -15481,7 +15481,7 @@
                 <a:cs typeface="Meiryo"/>
                 <a:ea typeface="Meiryo"/>
               </a:rPr>
-              <a:t>1法人1行だと、鍵を交換した瞬間に既存の暗号文が全部読めなくなる(=交換が実質不可能)</a:t>
+              <a:t>1法人1行だと、鍵を交換した時点で既存の暗号文が読めなくなる(交換が実質不可能)</a:t>
             </a:r>
           </a:p>
           <a:p>
@@ -15690,7 +15690,7 @@
                 <a:cs typeface="Meiryo"/>
                 <a:ea typeface="Meiryo"/>
               </a:rPr>
-              <a:t>「マスター鍵 + 法人ID」から鍵を計算する方式にすると、マスター鍵が漏れれば全法人の鍵を誰でも再現できる。それは実質、鍵を1本共有しているのと変わらない</a:t>
+              <a:t>マスター鍵と法人IDから鍵を計算する方式にすると、マスター鍵が漏れれば全法人の鍵を再現できる。鍵を1本共有しているのと変わらない</a:t>
             </a:r>
           </a:p>
           <a:p>
@@ -16064,7 +16064,7 @@
                 <a:cs typeface="Meiryo"/>
                 <a:ea typeface="Meiryo"/>
               </a:rPr>
-              <a:t>世代を並存させたので鍵の交換自体はできますが、既存データを新しい世代へ移す「再暗号化バッチ」を作っていません。読めなくはならない代わりに、古い世代の鍵をいつまでも捨てられない状態です。オンラインで少しずつ再暗号化するのと、停止時間を取って一括で流すのと、どちらが定石でしょうか。</a:t>
+              <a:t>世代を並存させたので鍵の交換自体はできますが、既存データを新しい世代へ移す再暗号化バッチを作っていません。読めなくはならない代わりに、古い世代の鍵を捨てられない状態です。オンラインで少しずつ再暗号化するのと、停止時間を取って一括で流すのと、どちらが定石でしょうか。</a:t>
             </a:r>
           </a:p>
         </p:txBody>
@@ -16168,7 +16168,7 @@
                 <a:cs typeface="Meiryo"/>
                 <a:ea typeface="Meiryo"/>
               </a:rPr>
-              <a:t>揃って成立させる仕組み</a:t>
+              <a:t>トランザクションと Outbox</a:t>
             </a:r>
             <a:r>
               <a:rPr sz="1250" b="0" i="0">
@@ -16455,7 +16455,7 @@
                 <a:cs typeface="Meiryo"/>
                 <a:ea typeface="Meiryo"/>
               </a:rPr>
-              <a:t>1つのトランザクション(揃って確定)</a:t>
+              <a:t>1つのトランザクション(まとめて確定)</a:t>
             </a:r>
           </a:p>
         </p:txBody>
@@ -17709,7 +17709,7 @@
                 <a:cs typeface="Meiryo"/>
                 <a:ea typeface="Meiryo"/>
               </a:rPr>
-              <a:t>同一トランザクションにしているのは2種類だけ</a:t>
+              <a:t>同一トランザクションにしている2種類</a:t>
             </a:r>
           </a:p>
         </p:txBody>
@@ -18090,7 +18090,7 @@
                 <a:cs typeface="Meiryo"/>
                 <a:ea typeface="Meiryo"/>
               </a:rPr>
-              <a:t>なぜ「Outbox」という形にするのか</a:t>
+              <a:t>Outbox にする理由</a:t>
             </a:r>
           </a:p>
         </p:txBody>
@@ -18132,7 +18132,7 @@
                 <a:cs typeface="Meiryo"/>
                 <a:ea typeface="Meiryo"/>
               </a:rPr>
-              <a:t>スプレッドシートへの送信をその場で行うと、送信が失敗したときに日報の保存まで巻き戻すか、送信を諦めるかの二択になります。いったんデータベースに「送る予定」として書いておけば、保存は確実に完了させたうえで、送信は後から何度でも再試行できます。</a:t>
+              <a:t>スプレッドシートへの送信をその場で行うと、送信が失敗したときに日報の保存まで巻き戻すか、送信を諦めるかの二択になります。いったん送信予定としてデータベースに書いておけば、保存は完了させたうえで、送信は後から再試行できます。</a:t>
             </a:r>
           </a:p>
         </p:txBody>
@@ -20083,7 +20083,7 @@
                 <a:cs typeface="Meiryo"/>
                 <a:ea typeface="Meiryo"/>
               </a:rPr>
-              <a:t>この規約のおかげで楽になっていること</a:t>
+              <a:t>規約による効果</a:t>
             </a:r>
           </a:p>
         </p:txBody>
@@ -20257,7 +20257,7 @@
                 <a:cs typeface="Meiryo"/>
                 <a:ea typeface="Meiryo"/>
               </a:rPr>
-              <a:t>規約の副作用も出ている(第3章)</a:t>
+              <a:t>規約の副作用(第3章)</a:t>
             </a:r>
           </a:p>
         </p:txBody>
@@ -20575,7 +20575,7 @@
                 <a:cs typeface="Meiryo"/>
                 <a:ea typeface="Meiryo"/>
               </a:rPr>
-              <a:t>気づいている弱点を6件並べます。ここが今回いちばんご意見をいただきたい部分です</a:t>
+              <a:t>気づいている弱点を6件挙げます。それぞれについてご意見をいただきたいです</a:t>
             </a:r>
           </a:p>
         </p:txBody>
@@ -21056,7 +21056,7 @@
                 <a:cs typeface="Meiryo"/>
                 <a:ea typeface="Meiryo"/>
               </a:rPr>
-              <a:t>「褒めていただく」より「危ないところを指摘いただく」ことが目的</a:t>
+              <a:t>危ないところを指摘いただくことが目的</a:t>
             </a:r>
           </a:p>
         </p:txBody>
@@ -21190,7 +21190,7 @@
                 <a:cs typeface="Meiryo"/>
                 <a:ea typeface="Meiryo"/>
               </a:rPr>
-              <a:t>作った人の前提</a:t>
+              <a:t>設計者の前提</a:t>
             </a:r>
           </a:p>
         </p:txBody>
@@ -21302,7 +21302,7 @@
                 <a:cs typeface="Meiryo"/>
                 <a:ea typeface="Meiryo"/>
               </a:rPr>
-              <a:t>「知らないので選ばなかった」選択肢があるはず、という前提で見ていただきたい</a:t>
+              <a:t>知らないために選ばなかった選択肢があるはず、という前提で見ていただきたい</a:t>
             </a:r>
           </a:p>
         </p:txBody>
@@ -21548,7 +21548,7 @@
                 <a:cs typeface="Meiryo"/>
                 <a:ea typeface="Meiryo"/>
               </a:rPr>
-              <a:t>は自覚している弱点。隠さず並べる</a:t>
+              <a:t>は自覚している弱点を示す</a:t>
             </a:r>
           </a:p>
         </p:txBody>
@@ -22758,7 +22758,7 @@
                 <a:cs typeface="Meiryo"/>
                 <a:ea typeface="Meiryo"/>
               </a:rPr>
-              <a:t>レビューを効率化するために</a:t>
+              <a:t>詳細の参照先</a:t>
             </a:r>
           </a:p>
         </p:txBody>
@@ -22800,7 +22800,7 @@
                 <a:cs typeface="Meiryo"/>
                 <a:ea typeface="Meiryo"/>
               </a:rPr>
-              <a:t>「この用語の使い方が違う」という指摘も歓迎です。設計の詳細は doc/db/overview.md、ER図と全列一覧は doc/db/reference.md(自動生成)にあります。</a:t>
+              <a:t>用語の使い方が違うという指摘も歓迎です。設計の詳細は doc/db/overview.md、ER図と全列一覧は doc/db/reference.md(自動生成)にあります。</a:t>
             </a:r>
           </a:p>
         </p:txBody>
@@ -23077,7 +23077,7 @@
                 <a:cs typeface="Meiryo"/>
                 <a:ea typeface="Meiryo"/>
               </a:rPr>
-              <a:t>外部予約システム(RESERVA)の顧客CSVを「1項目も落とさず取り込む」方針にしたため、CSVの列がほぼそのまま列になっている。</a:t>
+              <a:t>外部予約システム(RESERVA)の顧客CSVを1項目も落とさず取り込む方針にしたため、CSVの列がほぼそのまま列になっている。</a:t>
             </a:r>
           </a:p>
         </p:txBody>
@@ -25847,7 +25847,7 @@
                 <a:cs typeface="Meiryo"/>
                 <a:ea typeface="Meiryo"/>
               </a:rPr>
-              <a:t>分けた場合に払う代償</a:t>
+              <a:t>分けた場合の負担</a:t>
             </a:r>
           </a:p>
         </p:txBody>
@@ -26122,7 +26122,7 @@
                 <a:cs typeface="Meiryo"/>
                 <a:ea typeface="Meiryo"/>
               </a:rPr>
-              <a:t>「39列は多すぎるので分けるべき」か、「顧客マスタなら39列は普通で分けるほうが害」か。判断の基準(何列を超えたら、どういう単位で分けるか)をご教示いただきたいです。運用前なので、分けるなら今が最も安いタイミングです。</a:t>
+              <a:t>39列は多すぎるので分けるべきか、顧客マスタなら39列は普通で分けるほうが害か。判断の基準(何列を超えたら、どういう単位で分けるか)をご教示ください。運用前なので、分けるなら今が最も安く直せます。</a:t>
             </a:r>
           </a:p>
         </p:txBody>
@@ -26237,7 +26237,7 @@
                 <a:cs typeface="Meiryo"/>
                 <a:ea typeface="Meiryo"/>
               </a:rPr>
-              <a:t>   検索性とAI活用を取り、その分の守りを外部環境に預けた</a:t>
+              <a:t>   検索性とAI活用を取り、保存時の保護を本番基盤に委ねた</a:t>
             </a:r>
           </a:p>
         </p:txBody>
@@ -26827,7 +26827,7 @@
                 <a:cs typeface="Meiryo"/>
                 <a:ea typeface="Meiryo"/>
               </a:rPr>
-              <a:t>保存時の暗号化は本番の基盤(Cloud SQL)頼み。その本番がまだ無い</a:t>
+              <a:t>保存時の暗号化は本番の基盤(Cloud SQL)に依存。その本番がまだ無い</a:t>
             </a:r>
           </a:p>
         </p:txBody>
@@ -27745,7 +27745,7 @@
                 <a:cs typeface="Meiryo"/>
                 <a:ea typeface="Meiryo"/>
               </a:rPr>
-              <a:t>いま実際に動いている3つの環境</a:t>
+              <a:t>現在動いている3つの環境</a:t>
             </a:r>
           </a:p>
         </p:txBody>
@@ -28538,7 +28538,7 @@
                 <a:cs typeface="Meiryo"/>
                 <a:ea typeface="Meiryo"/>
               </a:rPr>
-              <a:t>「同じスタッフ・時間帯が重なる予約は1件まで」は、本来 PostgreSQL の除外制約(EXCLUDE)でデータベース自身に守らせられる。それが使えていない。</a:t>
+              <a:t>同じスタッフで時間帯が重なる予約は1件まで、という制約は、本来 PostgreSQL の除外制約(EXCLUDE)で守れる。それが使えていない。</a:t>
             </a:r>
           </a:p>
         </p:txBody>
@@ -28714,7 +28714,7 @@
                 <a:cs typeface="Meiryo"/>
                 <a:ea typeface="Meiryo"/>
               </a:rPr>
-              <a:t>「同じ法人・同じスタッフで、時間の範囲が重なる行は入れさせない」を1行で表せる。アプリが何度呼ばれても、同時に呼ばれても、破れない。</a:t>
+              <a:t>同じ法人・同じスタッフで時間の範囲が重なる行の禁止を、1行で表せる。アプリが同時に呼ばれても破れない。</a:t>
             </a:r>
           </a:p>
         </p:txBody>
@@ -28842,7 +28842,7 @@
                 <a:cs typeface="Meiryo"/>
                 <a:ea typeface="Meiryo"/>
               </a:rPr>
-              <a:t>本番だけで有効にすると、テストが通っているのに本番だけ制約があるという「環境で形が違う」状態になり、いちばん危ない</a:t>
+              <a:t>本番だけで有効にすると、テストが通っているのに本番だけ制約があるという、環境で形が違う状態になる</a:t>
             </a:r>
           </a:p>
         </p:txBody>
@@ -29016,7 +29016,7 @@
                 <a:cs typeface="Meiryo"/>
                 <a:ea typeface="Meiryo"/>
               </a:rPr>
-              <a:t>守りは最強。ただしテスト環境と本番でスキーマが分岐する</a:t>
+              <a:t>制約としては確実。ただしテスト環境と本番でスキーマが分岐する</a:t>
             </a:r>
           </a:p>
         </p:txBody>
@@ -29148,7 +29148,7 @@
                 <a:cs typeface="Meiryo"/>
                 <a:ea typeface="Meiryo"/>
               </a:rPr>
-              <a:t>予約作成時にスタッフ行をロックして重なりを検査。実装の書き忘れが即バグになる</a:t>
+              <a:t>予約作成時にスタッフ行をロックして重なりを検査。実装の書き忘れがバグになる</a:t>
             </a:r>
           </a:p>
         </p:txBody>
@@ -29586,7 +29586,7 @@
                 <a:cs typeface="Meiryo"/>
                 <a:ea typeface="Meiryo"/>
               </a:rPr>
-              <a:t>同じ形の穴が他にもある</a:t>
+              <a:t>同種の制約が他にもある</a:t>
             </a:r>
           </a:p>
         </p:txBody>
@@ -29628,7 +29628,7 @@
                 <a:cs typeface="Meiryo"/>
                 <a:ea typeface="Meiryo"/>
               </a:rPr>
-              <a:t>「同じ顧客に同時刻の予約を2件入れない」なども、範囲の重なりで表す種類の制約です。1つ方針を決めれば、まとめて同じやり方に揃えられます。</a:t>
+              <a:t>同じ顧客に同時刻の予約を2件入れない、なども範囲の重なりで表す種類の制約です。1つ方針を決めれば、まとめて同じやり方に揃えられます。</a:t>
             </a:r>
           </a:p>
         </p:txBody>
@@ -30337,7 +30337,7 @@
                 <a:cs typeface="Meiryo"/>
                 <a:ea typeface="Meiryo"/>
               </a:rPr>
-              <a:t>jsonb 1列のままなのは、常に「1日分をまるごと読み書き」する用途しかないため</a:t>
+              <a:t>jsonb 1列のままなのは、1日分をまるごと読み書きする用途しかないため</a:t>
             </a:r>
           </a:p>
         </p:txBody>
@@ -32608,7 +32608,7 @@
                 <a:cs typeface="Meiryo"/>
                 <a:ea typeface="Meiryo"/>
               </a:rPr>
-              <a:t>この6件の優先順位付けが妥当かをご確認いただきたいです。特に「ON DELETE と廃棄手順」を最優先に置いていますが、運用開始前に必ず整備すべきものと、動かしながら直せるものの線引きをご教示いただけると助かります。</a:t>
+              <a:t>この6件の優先順位付けが妥当かをご確認いただきたいです。ON DELETE と廃棄手順を最優先に置いていますが、運用開始前に整備すべきものと、動かしながら直せるものの線引きをご教示ください。</a:t>
             </a:r>
           </a:p>
         </p:txBody>
@@ -33610,7 +33610,7 @@
                 <a:cs typeface="Meiryo"/>
                 <a:ea typeface="Meiryo"/>
               </a:rPr>
-              <a:t>本命はデータベース側の監査機能(pgaudit 等)。未導入</a:t>
+              <a:t>有力な手段はデータベース側の監査機能(pgaudit 等)。未導入</a:t>
             </a:r>
           </a:p>
         </p:txBody>
@@ -33784,7 +33784,7 @@
                 <a:cs typeface="Meiryo"/>
                 <a:ea typeface="Meiryo"/>
               </a:rPr>
-              <a:t>提案書では訪問看護事業者への展開を想定しています(doc/proposal/tech-stack.md 第7章)。医療系の記録を扱うなら、「誰がどの記録を参照したか」の記録と保存年限の管理が要件になる可能性が高いと考えています。</a:t>
+              <a:t>提案書では訪問看護事業者への展開を想定しています(doc/proposal/tech-stack.md 第7章)。医療系の記録を扱うなら、「誰がどの記録を参照したか」の記録と保存年限の管理が要件になる可能性が高いです。</a:t>
             </a:r>
           </a:p>
         </p:txBody>
@@ -34234,7 +34234,7 @@
                 <a:cs typeface="Meiryo"/>
                 <a:ea typeface="Meiryo"/>
               </a:rPr>
-              <a:t>実装より先にDBの形だけ固めた5領域。そこで迷った判断と、まとめての相談事項</a:t>
+              <a:t>実装より先にDBの形だけ固めた5領域。そこで迷った判断と、相談事項のまとめ</a:t>
             </a:r>
           </a:p>
         </p:txBody>
@@ -34763,7 +34763,7 @@
                 <a:cs typeface="Meiryo"/>
                 <a:ea typeface="Meiryo"/>
               </a:rPr>
-              <a:t>customers の列にしないのは、上書きだと「いつ誰がその情報にしたか」が残らないため</a:t>
+              <a:t>customers の列にしないのは、上書きだといつ誰が入れた情報かが残らないため</a:t>
             </a:r>
           </a:p>
         </p:txBody>
@@ -36251,7 +36251,7 @@
                 <a:cs typeface="Meiryo"/>
                 <a:ea typeface="Meiryo"/>
               </a:rPr>
-              <a:t>   どれも「こちらが正しい」と言い切れず、選んで実装しています</a:t>
+              <a:t>   いずれも決め手がないまま選んで実装しています</a:t>
             </a:r>
           </a:p>
         </p:txBody>
@@ -37267,7 +37267,7 @@
         <p:spPr>
           <a:xfrm>
             <a:off x="457200" y="5504688"/>
-            <a:ext cx="11277295" cy="813307"/>
+            <a:ext cx="11277295" cy="731520"/>
           </a:xfrm>
           <a:prstGeom prst="roundRect">
             <a:avLst>
@@ -37313,7 +37313,7 @@
         <p:spPr>
           <a:xfrm>
             <a:off x="457200" y="5504688"/>
-            <a:ext cx="68580" cy="813307"/>
+            <a:ext cx="68580" cy="731520"/>
           </a:xfrm>
           <a:prstGeom prst="rect">
             <a:avLst/>
@@ -37399,7 +37399,7 @@
         <p:spPr>
           <a:xfrm>
             <a:off x="640080" y="5852159"/>
-            <a:ext cx="10929823" cy="392683"/>
+            <a:ext cx="10929823" cy="310896"/>
           </a:xfrm>
           <a:prstGeom prst="rect">
             <a:avLst/>
@@ -37427,7 +37427,7 @@
                 <a:cs typeface="Meiryo"/>
                 <a:ea typeface="Meiryo"/>
               </a:rPr>
-              <a:t>この6件について、より一般的な作り方があればご教示ください。とくにEAVは「項目が決まっていないから」という理由で選びましたが、後戻りしにくい選択だと考えています。</a:t>
+              <a:t>この6件について、より一般的な作り方があればご教示ください。とくにEAVは項目が決まっていないことを理由に選んでおり、後戻りしにくい選択です。</a:t>
             </a:r>
           </a:p>
         </p:txBody>
@@ -39042,7 +39042,7 @@
                 <a:cs typeface="Meiryo"/>
                 <a:ea typeface="Meiryo"/>
               </a:rPr>
-              <a:t>いちばん困っていること</a:t>
+              <a:t>指摘をいただきたい点</a:t>
             </a:r>
           </a:p>
         </p:txBody>
@@ -39084,7 +39084,7 @@
                 <a:cs typeface="Meiryo"/>
                 <a:ea typeface="Meiryo"/>
               </a:rPr>
-              <a:t>⑨のような「自分では気づきようがない落とし穴」が、他にもあるかどうかを知りたいです。①〜⑧は選択肢が見えている判断ですが、⑨は見えていないものを指摘いただく必要があります。</a:t>
+              <a:t>⑨のように自分では気づきようがない落とし穴が、他にもあるかどうかを知りたいです。①〜⑧は選択肢が見えている判断ですが、⑨は見えていないものをご指摘いただく必要があります。</a:t>
             </a:r>
           </a:p>
         </p:txBody>
@@ -39747,7 +39747,7 @@
                 <a:cs typeface="Meiryo"/>
                 <a:ea typeface="Meiryo"/>
               </a:rPr>
-              <a:t>  44テーブルの定義。列ごとに「なぜこの形か」をコメントで書いてある</a:t>
+              <a:t>  44テーブルの定義。列ごとに設計の理由をコメントで書いてある</a:t>
             </a:r>
           </a:p>
           <a:p>
@@ -40567,7 +40567,7 @@
                           <a:cs typeface="Meiryo"/>
                           <a:ea typeface="Meiryo"/>
                         </a:rPr>
-                        <a:t>データベース自身に絞り込ませる</a:t>
+                        <a:t>データベース側で行を絞り込む</a:t>
                       </a:r>
                     </a:p>
                   </a:txBody>
@@ -41162,7 +41162,7 @@
                 <a:cs typeface="Meiryo"/>
                 <a:ea typeface="Meiryo"/>
               </a:rPr>
-              <a:t>   データベースは「関係づけられた表の集まり」</a:t>
+              <a:t>   データベースは関係づけられた表の集まり</a:t>
             </a:r>
           </a:p>
         </p:txBody>
@@ -41379,7 +41379,7 @@
                 <a:cs typeface="Meiryo"/>
                 <a:ea typeface="Meiryo"/>
               </a:rPr>
-              <a:t>  … 1件のデータ。「顧客1人」「日報1本」</a:t>
+              <a:t>  … 1件のデータ。顧客1人・日報1本</a:t>
             </a:r>
           </a:p>
           <a:p>
@@ -41416,7 +41416,7 @@
                 <a:cs typeface="Meiryo"/>
                 <a:ea typeface="Meiryo"/>
               </a:rPr>
-              <a:t>  … 項目。「氏名」「電話番号」。列ごとに</a:t>
+              <a:t>  … 項目。氏名・電話番号など。列ごとに</a:t>
             </a:r>
             <a:r>
               <a:rPr sz="1200" b="1">
@@ -41534,7 +41534,7 @@
                 <a:cs typeface="Meiryo"/>
                 <a:ea typeface="Meiryo"/>
               </a:rPr>
-              <a:t>  … 別の表の行を指す「紐付け」。日報が「どの顧客の記録か」を持つのに使う。存在しない顧客IDを書こうとするとデータベースが拒否する</a:t>
+              <a:t>  … 別の表の行を指す紐付け。日報がどの顧客の記録かを持つのに使う。存在しない顧客IDを書くとデータベースが拒否する</a:t>
             </a:r>
           </a:p>
           <a:p>
@@ -41560,7 +41560,7 @@
                 <a:cs typeface="Meiryo"/>
                 <a:ea typeface="Meiryo"/>
               </a:rPr>
-              <a:t>なぜ表を分けるのか</a:t>
+              <a:t>表を分ける理由</a:t>
             </a:r>
             <a:r>
               <a:rPr sz="1200" b="0">
@@ -41571,7 +41571,7 @@
                 <a:cs typeface="Meiryo"/>
                 <a:ea typeface="Meiryo"/>
               </a:rPr>
-              <a:t>  … 顧客の住所を1か所に置けば、住所が変わったとき直すのは1行だけで済む。日報ごとに住所を書き写していたら、直し漏れが必ず出る(これを</a:t>
+              <a:t>  … 顧客の住所を1か所に置けば、住所が変わったとき直すのは1行だけで済む。日報ごとに住所を書き写していたら、直し漏れが出る(これを</a:t>
             </a:r>
             <a:r>
               <a:rPr sz="1200" b="1">
@@ -42477,7 +42477,7 @@
                 <a:ea typeface="Meiryo"/>
               </a:rPr>
               <a:t>外部キーが主キーを指す。
-「この日報は聖徳太子さんの記録」という関係を表す。</a:t>
+この日報は聖徳太子さんの記録、という関係を表す。</a:t>
             </a:r>
           </a:p>
         </p:txBody>
@@ -42609,7 +42609,7 @@
                 <a:cs typeface="Meiryo"/>
                 <a:ea typeface="Meiryo"/>
               </a:rPr>
-              <a:t>この2枚を見ながら覚えていただきたいこと</a:t>
+              <a:t>この2枚の読み方</a:t>
             </a:r>
           </a:p>
         </p:txBody>
@@ -42651,7 +42651,7 @@
                 <a:cs typeface="Meiryo"/>
                 <a:ea typeface="Meiryo"/>
               </a:rPr>
-              <a:t>以降の図に出てくる矢印は、ほぼすべて「外部キーによる紐付け」です。矢印の向きは「参照する側 → 参照される側」。tenant_id 列については次章で説明します。</a:t>
+              <a:t>以降の図の矢印は、ほぼすべて外部キーによる紐付けです。矢印の向きは参照する側 → 参照される側。tenant_id 列は次章で説明します。</a:t>
             </a:r>
           </a:p>
         </p:txBody>
@@ -43057,7 +43057,7 @@
                           <a:cs typeface="Meiryo"/>
                           <a:ea typeface="Meiryo"/>
                         </a:rPr>
-                        <a:t>「この列の組み合わせは重複禁止」というルール</a:t>
+                        <a:t>この列の組み合わせを重複禁止にするルール</a:t>
                       </a:r>
                     </a:p>
                   </a:txBody>
@@ -43149,7 +43149,7 @@
                           <a:cs typeface="Meiryo"/>
                           <a:ea typeface="Meiryo"/>
                         </a:rPr>
-                        <a:t>「この列に入ってよい値」をデータベース側で縛るルール</a:t>
+                        <a:t>列に入ってよい値をデータベース側で縛るルール</a:t>
                       </a:r>
                     </a:p>
                   </a:txBody>
@@ -43271,7 +43271,7 @@
                           <a:cs typeface="Meiryo"/>
                           <a:ea typeface="Meiryo"/>
                         </a:rPr>
-                        <a:t>「姓が佐藤の顧客」を全件走査せず引く</a:t>
+                        <a:t>姓が佐藤の顧客を全件走査せず引く</a:t>
                       </a:r>
                     </a:p>
                   </a:txBody>
@@ -43333,7 +43333,7 @@
                           <a:cs typeface="Meiryo"/>
                           <a:ea typeface="Meiryo"/>
                         </a:rPr>
-                        <a:t>複数の書き込みを「まとめて確定/まとめて取消」する単位</a:t>
+                        <a:t>複数の書き込みをまとめて確定/取消する単位</a:t>
                       </a:r>
                     </a:p>
                   </a:txBody>
@@ -43363,7 +43363,7 @@
                           <a:cs typeface="Meiryo"/>
                           <a:ea typeface="Meiryo"/>
                         </a:rPr>
-                        <a:t>日報の保存と通知予約を、揃って成立させる</a:t>
+                        <a:t>日報の保存と通知予約を同時に確定する</a:t>
                       </a:r>
                     </a:p>
                   </a:txBody>
@@ -43425,7 +43425,7 @@
                           <a:cs typeface="Meiryo"/>
                           <a:ea typeface="Meiryo"/>
                         </a:rPr>
-                        <a:t>データベース自身が持つ「見える行の絞り込み」機能</a:t>
+                        <a:t>データベース側で見える行を絞り込む機能</a:t>
                       </a:r>
                     </a:p>
                   </a:txBody>
@@ -43455,7 +43455,7 @@
                           <a:cs typeface="Meiryo"/>
                           <a:ea typeface="Meiryo"/>
                         </a:rPr>
-                        <a:t>他社のデータは、そもそも見えなくする</a:t>
+                        <a:t>他社のデータは見えなくする</a:t>
                       </a:r>
                     </a:p>
                   </a:txBody>
@@ -44487,7 +44487,7 @@
                 <a:cs typeface="Meiryo"/>
                 <a:ea typeface="Meiryo"/>
               </a:rPr>
-              <a:t>なぜ重要か</a:t>
+              <a:t>重要な理由</a:t>
             </a:r>
           </a:p>
         </p:txBody>
@@ -44529,7 +44529,7 @@
                 <a:cs typeface="Meiryo"/>
                 <a:ea typeface="Meiryo"/>
               </a:rPr>
-              <a:t>「日報は保存できたのに、通知だけ永久に飛ばない」状態を作らないため。片方だけ成立すると、どの記録が取り残されたのか誰にも分からなくなる。</a:t>
+              <a:t>日報は保存できたのに通知だけ飛ばない、という状態を防ぐため。片方だけ成立すると、どの記録が取り残されたのか追えなくなる。</a:t>
             </a:r>
           </a:p>
         </p:txBody>
@@ -46549,7 +46549,7 @@
                 <a:cs typeface="Meiryo"/>
                 <a:ea typeface="Meiryo"/>
               </a:rPr>
-              <a:t>記録は「後から書き換えない」データが多い</a:t>
+              <a:t>後から書き換えない記録が多い</a:t>
             </a:r>
           </a:p>
         </p:txBody>
@@ -46732,7 +46732,7 @@
                 <a:cs typeface="Meiryo"/>
                 <a:ea typeface="Meiryo"/>
               </a:rPr>
-              <a:t>この①〜④の外側に、先に形だけ固めた5領域がある</a:t>
+              <a:t>①〜④の外側に、先に形だけ固めた5領域がある</a:t>
             </a:r>
           </a:p>
         </p:txBody>
@@ -46955,7 +46955,7 @@
                 <a:cs typeface="Meiryo"/>
                 <a:ea typeface="Meiryo"/>
               </a:rPr>
-              <a:t>現行のGoogle Apps Script版は、データがすべてスプレッドシートとDriveにあり、1法人・1Googleアカウントに強く依存しています。これを複数法人(テナント)が同居できる形に作り替えるのが今回の目的です。したがって「他社のデータが混ざらないこと」が設計上の最優先事項になっています。</a:t>
+              <a:t>現行のGoogle Apps Script版は、データがすべてスプレッドシートとDriveにあり、1法人・1Googleアカウントに強く依存しています。これを複数法人(テナント)が同居できる形に作り替えるのが今回の目的です。したがって他社のデータが混ざらないことが設計上の最優先事項です。</a:t>
             </a:r>
           </a:p>
         </p:txBody>
@@ -49337,7 +49337,7 @@
                 <a:cs typeface="Meiryo"/>
                 <a:ea typeface="Meiryo"/>
               </a:rPr>
-              <a:t>例外は3つだけ</a:t>
+              <a:t>3つの例外</a:t>
             </a:r>
           </a:p>
         </p:txBody>
@@ -51970,7 +51970,7 @@
                 <a:cs typeface="Meiryo"/>
                 <a:ea typeface="Meiryo"/>
               </a:rPr>
-              <a:t>「複合FK」とは(次章で図解します)</a:t>
+              <a:t>複合FKとは(次章で図解します)</a:t>
             </a:r>
           </a:p>
         </p:txBody>
@@ -52012,7 +52012,7 @@
                 <a:cs typeface="Meiryo"/>
                 <a:ea typeface="Meiryo"/>
               </a:rPr>
-              <a:t>外部キーを (tenant_id, customer_id) の2列セットにしたもの。「そのIDが本当に同じ法人の行か」をデータベース自身に確かめさせるための工夫です。</a:t>
+              <a:t>外部キーを (tenant_id, customer_id) の2列セットにしたもの。そのIDが同じ法人の行かをデータベース側で検査するための工夫です。</a:t>
             </a:r>
           </a:p>
         </p:txBody>
@@ -52144,7 +52144,7 @@
                 <a:cs typeface="Meiryo"/>
                 <a:ea typeface="Meiryo"/>
               </a:rPr>
-              <a:t>この17枚が「土台」です</a:t>
+              <a:t>土台になる17枚</a:t>
             </a:r>
           </a:p>
         </p:txBody>

--- a/doc/slides/db-review.pptx
+++ b/doc/slides/db-review.pptx
@@ -5573,7 +5573,7 @@
                 <a:cs typeface="Meiryo"/>
                 <a:ea typeface="Meiryo"/>
               </a:rPr>
-              <a:t>   年齢帯・教育関心度★・ストレス度PSIの表と、生成記録。生成まで接続済み。文面は一覧①</a:t>
+              <a:t>   3軸の表と生成記録。文面は一覧①</a:t>
             </a:r>
           </a:p>
         </p:txBody>
@@ -12087,7 +12087,7 @@
                 <a:cs typeface="Meiryo"/>
                 <a:ea typeface="Meiryo"/>
               </a:rPr>
-              <a:t>attendance_days → staff(給与に直結するため特に重要)</a:t>
+              <a:t>attendance_days → staff(給与に直結)</a:t>
             </a:r>
           </a:p>
         </p:txBody>
@@ -12228,8 +12228,8 @@
         </p:nvSpPr>
         <p:spPr>
           <a:xfrm>
-            <a:off x="457200" y="5407533"/>
-            <a:ext cx="11277295" cy="974979"/>
+            <a:off x="457200" y="5532120"/>
+            <a:ext cx="11277295" cy="796290"/>
           </a:xfrm>
           <a:prstGeom prst="roundRect">
             <a:avLst>
@@ -12274,8 +12274,8 @@
         </p:nvSpPr>
         <p:spPr>
           <a:xfrm>
-            <a:off x="457200" y="5407533"/>
-            <a:ext cx="68580" cy="974979"/>
+            <a:off x="457200" y="5532120"/>
+            <a:ext cx="68580" cy="796290"/>
           </a:xfrm>
           <a:prstGeom prst="rect">
             <a:avLst/>
@@ -12318,7 +12318,7 @@
         </p:nvSpPr>
         <p:spPr>
           <a:xfrm>
-            <a:off x="640080" y="5498973"/>
+            <a:off x="640080" y="5623559"/>
             <a:ext cx="10911535" cy="237744"/>
           </a:xfrm>
           <a:prstGeom prst="rect">
@@ -12360,8 +12360,8 @@
         </p:nvSpPr>
         <p:spPr>
           <a:xfrm>
-            <a:off x="640080" y="5755005"/>
-            <a:ext cx="10929823" cy="554355"/>
+            <a:off x="640080" y="5879592"/>
+            <a:ext cx="10929823" cy="375666"/>
           </a:xfrm>
           <a:prstGeom prst="rect">
             <a:avLst/>
@@ -12389,7 +12389,7 @@
                 <a:cs typeface="Meiryo"/>
                 <a:ea typeface="Meiryo"/>
               </a:rPr>
-              <a:t>クーポンの2枚(customer_coupons / coupon_redemptions)も同じ形で customers・coupons・daily_reports を指しています。先行整備の18枚・稼働中の日報AI3軸の10枚も同じ規約に載せてあり、複合外部キーは全部で63本です。参照先には UNIQUE(tenant_id, id) を張ってあります。ON DELETE は全て no action(親を消せない)にしており、廃棄はテナント単位の物理削除で行う方針です。</a:t>
+              <a:t>クーポンの2枚(customer_coupons / coupon_redemptions)も同じ形で customers・coupons・daily_reports を指す。先行整備の18枚・日報AI3軸の10枚も同じ規約で、複合外部キーは全63本。参照先に UNIQUE(tenant_id, id) を張り、ON DELETE は全て no action。廃棄はテナント単位の物理削除で行う。</a:t>
             </a:r>
           </a:p>
         </p:txBody>
@@ -23225,7 +23225,7 @@
         <p:spPr>
           <a:xfrm>
             <a:off x="603504" y="1773936"/>
-            <a:ext cx="1920240" cy="274320"/>
+            <a:ext cx="1691640" cy="274320"/>
           </a:xfrm>
           <a:prstGeom prst="rect">
             <a:avLst/>
@@ -23266,7 +23266,7 @@
         </p:nvSpPr>
         <p:spPr>
           <a:xfrm>
-            <a:off x="2542032" y="1773936"/>
+            <a:off x="2286000" y="1773936"/>
             <a:ext cx="502920" cy="274320"/>
           </a:xfrm>
           <a:prstGeom prst="rect">
@@ -23308,8 +23308,8 @@
         </p:nvSpPr>
         <p:spPr>
           <a:xfrm>
-            <a:off x="3154680" y="1801368"/>
-            <a:ext cx="2651760" cy="274320"/>
+            <a:off x="2880360" y="1810512"/>
+            <a:ext cx="2926080" cy="274320"/>
           </a:xfrm>
           <a:prstGeom prst="rect">
             <a:avLst/>
@@ -23329,7 +23329,7 @@
               <a:buNone/>
             </a:pPr>
             <a:r>
-              <a:rPr sz="900" b="0" i="0">
+              <a:rPr sz="850" b="0" i="0">
                 <a:solidFill>
                   <a:srgbClr val="64748B"/>
                 </a:solidFill>
@@ -23443,7 +23443,7 @@
         <p:spPr>
           <a:xfrm>
             <a:off x="603504" y="2139696"/>
-            <a:ext cx="1920240" cy="274320"/>
+            <a:ext cx="1691640" cy="274320"/>
           </a:xfrm>
           <a:prstGeom prst="rect">
             <a:avLst/>
@@ -23484,7 +23484,7 @@
         </p:nvSpPr>
         <p:spPr>
           <a:xfrm>
-            <a:off x="2542032" y="2139696"/>
+            <a:off x="2286000" y="2139696"/>
             <a:ext cx="502920" cy="274320"/>
           </a:xfrm>
           <a:prstGeom prst="rect">
@@ -23526,8 +23526,8 @@
         </p:nvSpPr>
         <p:spPr>
           <a:xfrm>
-            <a:off x="3154680" y="2167127"/>
-            <a:ext cx="2651760" cy="274320"/>
+            <a:off x="2880360" y="2176272"/>
+            <a:ext cx="2926080" cy="274320"/>
           </a:xfrm>
           <a:prstGeom prst="rect">
             <a:avLst/>
@@ -23547,7 +23547,7 @@
               <a:buNone/>
             </a:pPr>
             <a:r>
-              <a:rPr sz="900" b="0" i="0">
+              <a:rPr sz="850" b="0" i="0">
                 <a:solidFill>
                   <a:srgbClr val="64748B"/>
                 </a:solidFill>
@@ -23661,7 +23661,7 @@
         <p:spPr>
           <a:xfrm>
             <a:off x="603504" y="2505456"/>
-            <a:ext cx="1920240" cy="274320"/>
+            <a:ext cx="1691640" cy="274320"/>
           </a:xfrm>
           <a:prstGeom prst="rect">
             <a:avLst/>
@@ -23702,7 +23702,7 @@
         </p:nvSpPr>
         <p:spPr>
           <a:xfrm>
-            <a:off x="2542032" y="2505456"/>
+            <a:off x="2286000" y="2505456"/>
             <a:ext cx="502920" cy="274320"/>
           </a:xfrm>
           <a:prstGeom prst="rect">
@@ -23744,8 +23744,8 @@
         </p:nvSpPr>
         <p:spPr>
           <a:xfrm>
-            <a:off x="3154680" y="2532887"/>
-            <a:ext cx="2651760" cy="274320"/>
+            <a:off x="2880360" y="2542032"/>
+            <a:ext cx="2926080" cy="274320"/>
           </a:xfrm>
           <a:prstGeom prst="rect">
             <a:avLst/>
@@ -23765,7 +23765,7 @@
               <a:buNone/>
             </a:pPr>
             <a:r>
-              <a:rPr sz="900" b="0" i="0">
+              <a:rPr sz="850" b="0" i="0">
                 <a:solidFill>
                   <a:srgbClr val="64748B"/>
                 </a:solidFill>
@@ -23773,7 +23773,7 @@
                 <a:cs typeface="Meiryo"/>
                 <a:ea typeface="Meiryo"/>
               </a:rPr>
-              <a:t>メール / 電話 / 市区 / 住所 / 駐車場2種 / 第2住所</a:t>
+              <a:t>メール/電話/市区/住所/駐車場2/第2住所</a:t>
             </a:r>
           </a:p>
         </p:txBody>
@@ -23879,7 +23879,7 @@
         <p:spPr>
           <a:xfrm>
             <a:off x="603504" y="2871215"/>
-            <a:ext cx="1920240" cy="274320"/>
+            <a:ext cx="1691640" cy="274320"/>
           </a:xfrm>
           <a:prstGeom prst="rect">
             <a:avLst/>
@@ -23920,7 +23920,7 @@
         </p:nvSpPr>
         <p:spPr>
           <a:xfrm>
-            <a:off x="2542032" y="2871215"/>
+            <a:off x="2286000" y="2871215"/>
             <a:ext cx="502920" cy="274320"/>
           </a:xfrm>
           <a:prstGeom prst="rect">
@@ -23962,8 +23962,8 @@
         </p:nvSpPr>
         <p:spPr>
           <a:xfrm>
-            <a:off x="3154680" y="2898647"/>
-            <a:ext cx="2651760" cy="274320"/>
+            <a:off x="2880360" y="2907791"/>
+            <a:ext cx="2926080" cy="274320"/>
           </a:xfrm>
           <a:prstGeom prst="rect">
             <a:avLst/>
@@ -23983,7 +23983,7 @@
               <a:buNone/>
             </a:pPr>
             <a:r>
-              <a:rPr sz="900" b="0" i="0">
+              <a:rPr sz="850" b="0" i="0">
                 <a:solidFill>
                   <a:srgbClr val="64748B"/>
                 </a:solidFill>
@@ -24097,7 +24097,7 @@
         <p:spPr>
           <a:xfrm>
             <a:off x="603504" y="3236975"/>
-            <a:ext cx="1920240" cy="274320"/>
+            <a:ext cx="1691640" cy="274320"/>
           </a:xfrm>
           <a:prstGeom prst="rect">
             <a:avLst/>
@@ -24138,7 +24138,7 @@
         </p:nvSpPr>
         <p:spPr>
           <a:xfrm>
-            <a:off x="2542032" y="3236975"/>
+            <a:off x="2286000" y="3236975"/>
             <a:ext cx="502920" cy="274320"/>
           </a:xfrm>
           <a:prstGeom prst="rect">
@@ -24180,8 +24180,8 @@
         </p:nvSpPr>
         <p:spPr>
           <a:xfrm>
-            <a:off x="3154680" y="3264407"/>
-            <a:ext cx="2651760" cy="274320"/>
+            <a:off x="2880360" y="3273551"/>
+            <a:ext cx="2926080" cy="274320"/>
           </a:xfrm>
           <a:prstGeom prst="rect">
             <a:avLst/>
@@ -24201,7 +24201,7 @@
               <a:buNone/>
             </a:pPr>
             <a:r>
-              <a:rPr sz="900" b="0" i="0">
+              <a:rPr sz="850" b="0" i="0">
                 <a:solidFill>
                   <a:srgbClr val="64748B"/>
                 </a:solidFill>
@@ -24315,7 +24315,7 @@
         <p:spPr>
           <a:xfrm>
             <a:off x="603504" y="3602735"/>
-            <a:ext cx="1920240" cy="274320"/>
+            <a:ext cx="1691640" cy="274320"/>
           </a:xfrm>
           <a:prstGeom prst="rect">
             <a:avLst/>
@@ -24356,7 +24356,7 @@
         </p:nvSpPr>
         <p:spPr>
           <a:xfrm>
-            <a:off x="2542032" y="3602735"/>
+            <a:off x="2286000" y="3602735"/>
             <a:ext cx="502920" cy="274320"/>
           </a:xfrm>
           <a:prstGeom prst="rect">
@@ -24398,8 +24398,8 @@
         </p:nvSpPr>
         <p:spPr>
           <a:xfrm>
-            <a:off x="3154680" y="3630167"/>
-            <a:ext cx="2651760" cy="274320"/>
+            <a:off x="2880360" y="3639311"/>
+            <a:ext cx="2926080" cy="274320"/>
           </a:xfrm>
           <a:prstGeom prst="rect">
             <a:avLst/>
@@ -24419,7 +24419,7 @@
               <a:buNone/>
             </a:pPr>
             <a:r>
-              <a:rPr sz="900" b="0" i="0">
+              <a:rPr sz="850" b="0" i="0">
                 <a:solidFill>
                   <a:srgbClr val="64748B"/>
                 </a:solidFill>
@@ -24533,7 +24533,7 @@
         <p:spPr>
           <a:xfrm>
             <a:off x="603504" y="3968496"/>
-            <a:ext cx="1920240" cy="274320"/>
+            <a:ext cx="1691640" cy="274320"/>
           </a:xfrm>
           <a:prstGeom prst="rect">
             <a:avLst/>
@@ -24574,7 +24574,7 @@
         </p:nvSpPr>
         <p:spPr>
           <a:xfrm>
-            <a:off x="2542032" y="3968496"/>
+            <a:off x="2286000" y="3968496"/>
             <a:ext cx="502920" cy="274320"/>
           </a:xfrm>
           <a:prstGeom prst="rect">
@@ -24616,8 +24616,8 @@
         </p:nvSpPr>
         <p:spPr>
           <a:xfrm>
-            <a:off x="3154680" y="3995928"/>
-            <a:ext cx="2651760" cy="274320"/>
+            <a:off x="2880360" y="4005072"/>
+            <a:ext cx="2926080" cy="274320"/>
           </a:xfrm>
           <a:prstGeom prst="rect">
             <a:avLst/>
@@ -24637,7 +24637,7 @@
               <a:buNone/>
             </a:pPr>
             <a:r>
-              <a:rPr sz="900" b="0" i="0">
+              <a:rPr sz="850" b="0" i="0">
                 <a:solidFill>
                   <a:srgbClr val="64748B"/>
                 </a:solidFill>
@@ -24645,7 +24645,7 @@
                 <a:cs typeface="Meiryo"/>
                 <a:ea typeface="Meiryo"/>
               </a:rPr>
-              <a:t>会員種別 / 状態 / 支払方法 / 支払状況 / 性別 / 年代</a:t>
+              <a:t>会員種別/状態/支払方法・状況/性別/年代</a:t>
             </a:r>
           </a:p>
         </p:txBody>
@@ -24751,7 +24751,7 @@
         <p:spPr>
           <a:xfrm>
             <a:off x="603504" y="4334256"/>
-            <a:ext cx="1920240" cy="274320"/>
+            <a:ext cx="1691640" cy="274320"/>
           </a:xfrm>
           <a:prstGeom prst="rect">
             <a:avLst/>
@@ -24792,7 +24792,7 @@
         </p:nvSpPr>
         <p:spPr>
           <a:xfrm>
-            <a:off x="2542032" y="4334256"/>
+            <a:off x="2286000" y="4334256"/>
             <a:ext cx="502920" cy="274320"/>
           </a:xfrm>
           <a:prstGeom prst="rect">
@@ -24834,8 +24834,8 @@
         </p:nvSpPr>
         <p:spPr>
           <a:xfrm>
-            <a:off x="3154680" y="4361688"/>
-            <a:ext cx="2651760" cy="274320"/>
+            <a:off x="2880360" y="4370832"/>
+            <a:ext cx="2926080" cy="274320"/>
           </a:xfrm>
           <a:prstGeom prst="rect">
             <a:avLst/>
@@ -24855,7 +24855,7 @@
               <a:buNone/>
             </a:pPr>
             <a:r>
-              <a:rPr sz="900" b="0" i="0">
+              <a:rPr sz="850" b="0" i="0">
                 <a:solidFill>
                   <a:srgbClr val="64748B"/>
                 </a:solidFill>
@@ -24969,7 +24969,7 @@
         <p:spPr>
           <a:xfrm>
             <a:off x="603504" y="4700016"/>
-            <a:ext cx="1920240" cy="274320"/>
+            <a:ext cx="1691640" cy="274320"/>
           </a:xfrm>
           <a:prstGeom prst="rect">
             <a:avLst/>
@@ -25010,7 +25010,7 @@
         </p:nvSpPr>
         <p:spPr>
           <a:xfrm>
-            <a:off x="2542032" y="4700016"/>
+            <a:off x="2286000" y="4700016"/>
             <a:ext cx="502920" cy="274320"/>
           </a:xfrm>
           <a:prstGeom prst="rect">
@@ -25052,8 +25052,8 @@
         </p:nvSpPr>
         <p:spPr>
           <a:xfrm>
-            <a:off x="3154680" y="4727448"/>
-            <a:ext cx="2651760" cy="274320"/>
+            <a:off x="2880360" y="4736592"/>
+            <a:ext cx="2926080" cy="274320"/>
           </a:xfrm>
           <a:prstGeom prst="rect">
             <a:avLst/>
@@ -25073,7 +25073,7 @@
               <a:buNone/>
             </a:pPr>
             <a:r>
-              <a:rPr sz="900" b="0" i="0">
+              <a:rPr sz="850" b="0" i="0">
                 <a:solidFill>
                   <a:srgbClr val="64748B"/>
                 </a:solidFill>
@@ -25081,7 +25081,7 @@
                 <a:cs typeface="Meiryo"/>
                 <a:ea typeface="Meiryo"/>
               </a:rPr>
-              <a:t>登録日 / 外部更新日 / 第2住所の期間2列 / 退会日 / 作成・更新</a:t>
+              <a:t>登録・外部更新・退会日/第2住所の期間2/作成・更新</a:t>
             </a:r>
           </a:p>
         </p:txBody>
@@ -34349,7 +34349,7 @@
                 <a:cs typeface="Meiryo"/>
                 <a:ea typeface="Meiryo"/>
               </a:rPr>
-              <a:t>   18テーブル。リポジトリ実装・API・画面はまだ無い(日報AIの3軸は実装済みでここには含めない)</a:t>
+              <a:t>   18テーブル。リポジトリ実装・API・画面はまだ無い</a:t>
             </a:r>
           </a:p>
         </p:txBody>
@@ -40257,7 +40257,7 @@
         </p:nvGraphicFramePr>
         <p:xfrm>
           <a:off x="457200" y="3977639"/>
-          <a:ext cx="11277293" cy="2340864"/>
+          <a:ext cx="11277293" cy="2130552"/>
         </p:xfrm>
         <a:graphic>
           <a:graphicData uri="http://schemas.openxmlformats.org/drawingml/2006/table">
@@ -40270,7 +40270,7 @@
                 <a:gridCol w="3300671"/>
                 <a:gridCol w="5042692"/>
               </a:tblGrid>
-              <a:tr h="292608">
+              <a:tr h="274320">
                 <a:tc>
                   <a:txBody>
                     <a:bodyPr wrap="square"/>
@@ -40362,7 +40362,7 @@
                   </a:tcPr>
                 </a:tc>
               </a:tr>
-              <a:tr h="292608">
+              <a:tr h="265176">
                 <a:tc>
                   <a:txBody>
                     <a:bodyPr wrap="square"/>
@@ -40454,7 +40454,7 @@
                   </a:tcPr>
                 </a:tc>
               </a:tr>
-              <a:tr h="292608">
+              <a:tr h="265176">
                 <a:tc>
                   <a:txBody>
                     <a:bodyPr wrap="square"/>
@@ -40546,7 +40546,7 @@
                   </a:tcPr>
                 </a:tc>
               </a:tr>
-              <a:tr h="292608">
+              <a:tr h="265176">
                 <a:tc>
                   <a:txBody>
                     <a:bodyPr wrap="square"/>
@@ -40638,7 +40638,7 @@
                   </a:tcPr>
                 </a:tc>
               </a:tr>
-              <a:tr h="292608">
+              <a:tr h="265176">
                 <a:tc>
                   <a:txBody>
                     <a:bodyPr wrap="square"/>
@@ -40730,7 +40730,7 @@
                   </a:tcPr>
                 </a:tc>
               </a:tr>
-              <a:tr h="292608">
+              <a:tr h="265176">
                 <a:tc>
                   <a:txBody>
                     <a:bodyPr wrap="square"/>
@@ -40822,7 +40822,7 @@
                   </a:tcPr>
                 </a:tc>
               </a:tr>
-              <a:tr h="292608">
+              <a:tr h="265176">
                 <a:tc>
                   <a:txBody>
                     <a:bodyPr wrap="square"/>
@@ -40914,7 +40914,7 @@
                   </a:tcPr>
                 </a:tc>
               </a:tr>
-              <a:tr h="292608">
+              <a:tr h="265176">
                 <a:tc>
                   <a:txBody>
                     <a:bodyPr wrap="square"/>
@@ -49629,7 +49629,7 @@
         </p:nvGraphicFramePr>
         <p:xfrm>
           <a:off x="457200" y="1143000"/>
-          <a:ext cx="11277293" cy="4169664"/>
+          <a:ext cx="11277293" cy="4091940"/>
         </p:xfrm>
         <a:graphic>
           <a:graphicData uri="http://schemas.openxmlformats.org/drawingml/2006/table">
@@ -49765,7 +49765,7 @@
                   </a:tcPr>
                 </a:tc>
               </a:tr>
-              <a:tr h="228600">
+              <a:tr h="224028">
                 <a:tc>
                   <a:txBody>
                     <a:bodyPr wrap="square"/>
@@ -49778,7 +49778,7 @@
                         <a:buNone/>
                       </a:pPr>
                       <a:r>
-                        <a:rPr sz="1000" b="1">
+                        <a:rPr sz="950" b="1">
                           <a:solidFill>
                             <a:srgbClr val="14223A"/>
                           </a:solidFill>
@@ -49808,7 +49808,7 @@
                         <a:buNone/>
                       </a:pPr>
                       <a:r>
-                        <a:rPr sz="1000" b="0">
+                        <a:rPr sz="950" b="0">
                           <a:solidFill>
                             <a:srgbClr val="14223A"/>
                           </a:solidFill>
@@ -49838,7 +49838,7 @@
                         <a:buNone/>
                       </a:pPr>
                       <a:r>
-                        <a:rPr sz="1000" b="0">
+                        <a:rPr sz="950" b="0">
                           <a:solidFill>
                             <a:srgbClr val="14223A"/>
                           </a:solidFill>
@@ -49868,7 +49868,7 @@
                         <a:buNone/>
                       </a:pPr>
                       <a:r>
-                        <a:rPr sz="1000" b="0">
+                        <a:rPr sz="950" b="0">
                           <a:solidFill>
                             <a:srgbClr val="64748B"/>
                           </a:solidFill>
@@ -49887,7 +49887,7 @@
                   </a:tcPr>
                 </a:tc>
               </a:tr>
-              <a:tr h="228600">
+              <a:tr h="224028">
                 <a:tc>
                   <a:txBody>
                     <a:bodyPr wrap="square"/>
@@ -49900,7 +49900,7 @@
                         <a:buNone/>
                       </a:pPr>
                       <a:r>
-                        <a:rPr sz="1000" b="1">
+                        <a:rPr sz="950" b="1">
                           <a:solidFill>
                             <a:srgbClr val="14223A"/>
                           </a:solidFill>
@@ -49930,7 +49930,7 @@
                         <a:buNone/>
                       </a:pPr>
                       <a:r>
-                        <a:rPr sz="1000" b="0">
+                        <a:rPr sz="950" b="0">
                           <a:solidFill>
                             <a:srgbClr val="14223A"/>
                           </a:solidFill>
@@ -49960,7 +49960,7 @@
                         <a:buNone/>
                       </a:pPr>
                       <a:r>
-                        <a:rPr sz="1000" b="0">
+                        <a:rPr sz="950" b="0">
                           <a:solidFill>
                             <a:srgbClr val="14223A"/>
                           </a:solidFill>
@@ -49990,7 +49990,7 @@
                         <a:buNone/>
                       </a:pPr>
                       <a:r>
-                        <a:rPr sz="1000" b="0">
+                        <a:rPr sz="950" b="0">
                           <a:solidFill>
                             <a:srgbClr val="14223A"/>
                           </a:solidFill>
@@ -50009,7 +50009,7 @@
                   </a:tcPr>
                 </a:tc>
               </a:tr>
-              <a:tr h="228600">
+              <a:tr h="224028">
                 <a:tc>
                   <a:txBody>
                     <a:bodyPr wrap="square"/>
@@ -50022,7 +50022,7 @@
                         <a:buNone/>
                       </a:pPr>
                       <a:r>
-                        <a:rPr sz="1000" b="1">
+                        <a:rPr sz="950" b="1">
                           <a:solidFill>
                             <a:srgbClr val="14223A"/>
                           </a:solidFill>
@@ -50052,7 +50052,7 @@
                         <a:buNone/>
                       </a:pPr>
                       <a:r>
-                        <a:rPr sz="1000" b="0">
+                        <a:rPr sz="950" b="0">
                           <a:solidFill>
                             <a:srgbClr val="14223A"/>
                           </a:solidFill>
@@ -50082,7 +50082,7 @@
                         <a:buNone/>
                       </a:pPr>
                       <a:r>
-                        <a:rPr sz="1000" b="0">
+                        <a:rPr sz="950" b="0">
                           <a:solidFill>
                             <a:srgbClr val="14223A"/>
                           </a:solidFill>
@@ -50112,7 +50112,7 @@
                         <a:buNone/>
                       </a:pPr>
                       <a:r>
-                        <a:rPr sz="1000" b="0">
+                        <a:rPr sz="950" b="0">
                           <a:solidFill>
                             <a:srgbClr val="14223A"/>
                           </a:solidFill>
@@ -50131,7 +50131,7 @@
                   </a:tcPr>
                 </a:tc>
               </a:tr>
-              <a:tr h="228600">
+              <a:tr h="224028">
                 <a:tc>
                   <a:txBody>
                     <a:bodyPr wrap="square"/>
@@ -50144,7 +50144,7 @@
                         <a:buNone/>
                       </a:pPr>
                       <a:r>
-                        <a:rPr sz="1000" b="1">
+                        <a:rPr sz="950" b="1">
                           <a:solidFill>
                             <a:srgbClr val="14223A"/>
                           </a:solidFill>
@@ -50174,7 +50174,7 @@
                         <a:buNone/>
                       </a:pPr>
                       <a:r>
-                        <a:rPr sz="1000" b="0">
+                        <a:rPr sz="950" b="0">
                           <a:solidFill>
                             <a:srgbClr val="14223A"/>
                           </a:solidFill>
@@ -50204,7 +50204,7 @@
                         <a:buNone/>
                       </a:pPr>
                       <a:r>
-                        <a:rPr sz="1000" b="0">
+                        <a:rPr sz="950" b="0">
                           <a:solidFill>
                             <a:srgbClr val="14223A"/>
                           </a:solidFill>
@@ -50234,7 +50234,7 @@
                         <a:buNone/>
                       </a:pPr>
                       <a:r>
-                        <a:rPr sz="1000" b="0">
+                        <a:rPr sz="950" b="0">
                           <a:solidFill>
                             <a:srgbClr val="14223A"/>
                           </a:solidFill>
@@ -50253,7 +50253,7 @@
                   </a:tcPr>
                 </a:tc>
               </a:tr>
-              <a:tr h="228600">
+              <a:tr h="224028">
                 <a:tc>
                   <a:txBody>
                     <a:bodyPr wrap="square"/>
@@ -50266,7 +50266,7 @@
                         <a:buNone/>
                       </a:pPr>
                       <a:r>
-                        <a:rPr sz="1000" b="1">
+                        <a:rPr sz="950" b="1">
                           <a:solidFill>
                             <a:srgbClr val="14223A"/>
                           </a:solidFill>
@@ -50296,7 +50296,7 @@
                         <a:buNone/>
                       </a:pPr>
                       <a:r>
-                        <a:rPr sz="1000" b="0">
+                        <a:rPr sz="950" b="0">
                           <a:solidFill>
                             <a:srgbClr val="14223A"/>
                           </a:solidFill>
@@ -50326,7 +50326,7 @@
                         <a:buNone/>
                       </a:pPr>
                       <a:r>
-                        <a:rPr sz="1000" b="0">
+                        <a:rPr sz="950" b="0">
                           <a:solidFill>
                             <a:srgbClr val="14223A"/>
                           </a:solidFill>
@@ -50356,7 +50356,7 @@
                         <a:buNone/>
                       </a:pPr>
                       <a:r>
-                        <a:rPr sz="1000" b="0">
+                        <a:rPr sz="950" b="0">
                           <a:solidFill>
                             <a:srgbClr val="14223A"/>
                           </a:solidFill>
@@ -50375,7 +50375,7 @@
                   </a:tcPr>
                 </a:tc>
               </a:tr>
-              <a:tr h="228600">
+              <a:tr h="224028">
                 <a:tc>
                   <a:txBody>
                     <a:bodyPr wrap="square"/>
@@ -50388,7 +50388,7 @@
                         <a:buNone/>
                       </a:pPr>
                       <a:r>
-                        <a:rPr sz="1000" b="1">
+                        <a:rPr sz="950" b="1">
                           <a:solidFill>
                             <a:srgbClr val="14223A"/>
                           </a:solidFill>
@@ -50418,7 +50418,7 @@
                         <a:buNone/>
                       </a:pPr>
                       <a:r>
-                        <a:rPr sz="1000" b="0">
+                        <a:rPr sz="950" b="0">
                           <a:solidFill>
                             <a:srgbClr val="14223A"/>
                           </a:solidFill>
@@ -50448,7 +50448,7 @@
                         <a:buNone/>
                       </a:pPr>
                       <a:r>
-                        <a:rPr sz="1000" b="0">
+                        <a:rPr sz="950" b="0">
                           <a:solidFill>
                             <a:srgbClr val="14223A"/>
                           </a:solidFill>
@@ -50478,7 +50478,7 @@
                         <a:buNone/>
                       </a:pPr>
                       <a:r>
-                        <a:rPr sz="1000" b="0">
+                        <a:rPr sz="950" b="0">
                           <a:solidFill>
                             <a:srgbClr val="14223A"/>
                           </a:solidFill>
@@ -50497,7 +50497,7 @@
                   </a:tcPr>
                 </a:tc>
               </a:tr>
-              <a:tr h="228600">
+              <a:tr h="224028">
                 <a:tc>
                   <a:txBody>
                     <a:bodyPr wrap="square"/>
@@ -50510,7 +50510,7 @@
                         <a:buNone/>
                       </a:pPr>
                       <a:r>
-                        <a:rPr sz="1000" b="1">
+                        <a:rPr sz="950" b="1">
                           <a:solidFill>
                             <a:srgbClr val="14223A"/>
                           </a:solidFill>
@@ -50540,7 +50540,7 @@
                         <a:buNone/>
                       </a:pPr>
                       <a:r>
-                        <a:rPr sz="1000" b="0">
+                        <a:rPr sz="950" b="0">
                           <a:solidFill>
                             <a:srgbClr val="14223A"/>
                           </a:solidFill>
@@ -50570,7 +50570,7 @@
                         <a:buNone/>
                       </a:pPr>
                       <a:r>
-                        <a:rPr sz="1000" b="0">
+                        <a:rPr sz="950" b="0">
                           <a:solidFill>
                             <a:srgbClr val="14223A"/>
                           </a:solidFill>
@@ -50600,7 +50600,7 @@
                         <a:buNone/>
                       </a:pPr>
                       <a:r>
-                        <a:rPr sz="1000" b="0">
+                        <a:rPr sz="950" b="0">
                           <a:solidFill>
                             <a:srgbClr val="14223A"/>
                           </a:solidFill>
@@ -50619,7 +50619,7 @@
                   </a:tcPr>
                 </a:tc>
               </a:tr>
-              <a:tr h="228600">
+              <a:tr h="224028">
                 <a:tc>
                   <a:txBody>
                     <a:bodyPr wrap="square"/>
@@ -50632,7 +50632,7 @@
                         <a:buNone/>
                       </a:pPr>
                       <a:r>
-                        <a:rPr sz="1000" b="1">
+                        <a:rPr sz="950" b="1">
                           <a:solidFill>
                             <a:srgbClr val="14223A"/>
                           </a:solidFill>
@@ -50662,7 +50662,7 @@
                         <a:buNone/>
                       </a:pPr>
                       <a:r>
-                        <a:rPr sz="1000" b="0">
+                        <a:rPr sz="950" b="0">
                           <a:solidFill>
                             <a:srgbClr val="14223A"/>
                           </a:solidFill>
@@ -50692,7 +50692,7 @@
                         <a:buNone/>
                       </a:pPr>
                       <a:r>
-                        <a:rPr sz="1000" b="0">
+                        <a:rPr sz="950" b="0">
                           <a:solidFill>
                             <a:srgbClr val="14223A"/>
                           </a:solidFill>
@@ -50722,7 +50722,7 @@
                         <a:buNone/>
                       </a:pPr>
                       <a:r>
-                        <a:rPr sz="1000" b="0">
+                        <a:rPr sz="950" b="0">
                           <a:solidFill>
                             <a:srgbClr val="14223A"/>
                           </a:solidFill>
@@ -50741,7 +50741,7 @@
                   </a:tcPr>
                 </a:tc>
               </a:tr>
-              <a:tr h="228600">
+              <a:tr h="224028">
                 <a:tc>
                   <a:txBody>
                     <a:bodyPr wrap="square"/>
@@ -50754,7 +50754,7 @@
                         <a:buNone/>
                       </a:pPr>
                       <a:r>
-                        <a:rPr sz="1000" b="1">
+                        <a:rPr sz="950" b="1">
                           <a:solidFill>
                             <a:srgbClr val="14223A"/>
                           </a:solidFill>
@@ -50784,7 +50784,7 @@
                         <a:buNone/>
                       </a:pPr>
                       <a:r>
-                        <a:rPr sz="1000" b="0">
+                        <a:rPr sz="950" b="0">
                           <a:solidFill>
                             <a:srgbClr val="14223A"/>
                           </a:solidFill>
@@ -50814,7 +50814,7 @@
                         <a:buNone/>
                       </a:pPr>
                       <a:r>
-                        <a:rPr sz="1000" b="0">
+                        <a:rPr sz="950" b="0">
                           <a:solidFill>
                             <a:srgbClr val="14223A"/>
                           </a:solidFill>
@@ -50844,7 +50844,7 @@
                         <a:buNone/>
                       </a:pPr>
                       <a:r>
-                        <a:rPr sz="1000" b="0">
+                        <a:rPr sz="950" b="0">
                           <a:solidFill>
                             <a:srgbClr val="14223A"/>
                           </a:solidFill>
@@ -50863,7 +50863,7 @@
                   </a:tcPr>
                 </a:tc>
               </a:tr>
-              <a:tr h="228600">
+              <a:tr h="224028">
                 <a:tc>
                   <a:txBody>
                     <a:bodyPr wrap="square"/>
@@ -50876,7 +50876,7 @@
                         <a:buNone/>
                       </a:pPr>
                       <a:r>
-                        <a:rPr sz="1000" b="1">
+                        <a:rPr sz="950" b="1">
                           <a:solidFill>
                             <a:srgbClr val="14223A"/>
                           </a:solidFill>
@@ -50906,7 +50906,7 @@
                         <a:buNone/>
                       </a:pPr>
                       <a:r>
-                        <a:rPr sz="1000" b="0">
+                        <a:rPr sz="950" b="0">
                           <a:solidFill>
                             <a:srgbClr val="14223A"/>
                           </a:solidFill>
@@ -50936,7 +50936,7 @@
                         <a:buNone/>
                       </a:pPr>
                       <a:r>
-                        <a:rPr sz="1000" b="0">
+                        <a:rPr sz="950" b="0">
                           <a:solidFill>
                             <a:srgbClr val="14223A"/>
                           </a:solidFill>
@@ -50966,7 +50966,7 @@
                         <a:buNone/>
                       </a:pPr>
                       <a:r>
-                        <a:rPr sz="1000" b="0">
+                        <a:rPr sz="950" b="0">
                           <a:solidFill>
                             <a:srgbClr val="14223A"/>
                           </a:solidFill>
@@ -50985,7 +50985,7 @@
                   </a:tcPr>
                 </a:tc>
               </a:tr>
-              <a:tr h="228600">
+              <a:tr h="224028">
                 <a:tc>
                   <a:txBody>
                     <a:bodyPr wrap="square"/>
@@ -50998,7 +50998,7 @@
                         <a:buNone/>
                       </a:pPr>
                       <a:r>
-                        <a:rPr sz="1000" b="1">
+                        <a:rPr sz="950" b="1">
                           <a:solidFill>
                             <a:srgbClr val="14223A"/>
                           </a:solidFill>
@@ -51028,7 +51028,7 @@
                         <a:buNone/>
                       </a:pPr>
                       <a:r>
-                        <a:rPr sz="1000" b="0">
+                        <a:rPr sz="950" b="0">
                           <a:solidFill>
                             <a:srgbClr val="14223A"/>
                           </a:solidFill>
@@ -51058,7 +51058,7 @@
                         <a:buNone/>
                       </a:pPr>
                       <a:r>
-                        <a:rPr sz="1000" b="0">
+                        <a:rPr sz="950" b="0">
                           <a:solidFill>
                             <a:srgbClr val="14223A"/>
                           </a:solidFill>
@@ -51088,7 +51088,7 @@
                         <a:buNone/>
                       </a:pPr>
                       <a:r>
-                        <a:rPr sz="1000" b="0">
+                        <a:rPr sz="950" b="0">
                           <a:solidFill>
                             <a:srgbClr val="14223A"/>
                           </a:solidFill>
@@ -51107,7 +51107,7 @@
                   </a:tcPr>
                 </a:tc>
               </a:tr>
-              <a:tr h="228600">
+              <a:tr h="224028">
                 <a:tc>
                   <a:txBody>
                     <a:bodyPr wrap="square"/>
@@ -51120,7 +51120,7 @@
                         <a:buNone/>
                       </a:pPr>
                       <a:r>
-                        <a:rPr sz="1000" b="1">
+                        <a:rPr sz="950" b="1">
                           <a:solidFill>
                             <a:srgbClr val="14223A"/>
                           </a:solidFill>
@@ -51150,7 +51150,7 @@
                         <a:buNone/>
                       </a:pPr>
                       <a:r>
-                        <a:rPr sz="1000" b="0">
+                        <a:rPr sz="950" b="0">
                           <a:solidFill>
                             <a:srgbClr val="14223A"/>
                           </a:solidFill>
@@ -51180,7 +51180,7 @@
                         <a:buNone/>
                       </a:pPr>
                       <a:r>
-                        <a:rPr sz="1000" b="0">
+                        <a:rPr sz="950" b="0">
                           <a:solidFill>
                             <a:srgbClr val="14223A"/>
                           </a:solidFill>
@@ -51210,7 +51210,7 @@
                         <a:buNone/>
                       </a:pPr>
                       <a:r>
-                        <a:rPr sz="1000" b="0">
+                        <a:rPr sz="950" b="0">
                           <a:solidFill>
                             <a:srgbClr val="14223A"/>
                           </a:solidFill>
@@ -51229,7 +51229,7 @@
                   </a:tcPr>
                 </a:tc>
               </a:tr>
-              <a:tr h="228600">
+              <a:tr h="224028">
                 <a:tc>
                   <a:txBody>
                     <a:bodyPr wrap="square"/>
@@ -51242,7 +51242,7 @@
                         <a:buNone/>
                       </a:pPr>
                       <a:r>
-                        <a:rPr sz="1000" b="1">
+                        <a:rPr sz="950" b="1">
                           <a:solidFill>
                             <a:srgbClr val="14223A"/>
                           </a:solidFill>
@@ -51272,7 +51272,7 @@
                         <a:buNone/>
                       </a:pPr>
                       <a:r>
-                        <a:rPr sz="1000" b="0">
+                        <a:rPr sz="950" b="0">
                           <a:solidFill>
                             <a:srgbClr val="14223A"/>
                           </a:solidFill>
@@ -51302,7 +51302,7 @@
                         <a:buNone/>
                       </a:pPr>
                       <a:r>
-                        <a:rPr sz="1000" b="0">
+                        <a:rPr sz="950" b="0">
                           <a:solidFill>
                             <a:srgbClr val="14223A"/>
                           </a:solidFill>
@@ -51332,7 +51332,7 @@
                         <a:buNone/>
                       </a:pPr>
                       <a:r>
-                        <a:rPr sz="1000" b="0">
+                        <a:rPr sz="950" b="0">
                           <a:solidFill>
                             <a:srgbClr val="14223A"/>
                           </a:solidFill>
@@ -51351,7 +51351,7 @@
                   </a:tcPr>
                 </a:tc>
               </a:tr>
-              <a:tr h="228600">
+              <a:tr h="224028">
                 <a:tc>
                   <a:txBody>
                     <a:bodyPr wrap="square"/>
@@ -51364,7 +51364,7 @@
                         <a:buNone/>
                       </a:pPr>
                       <a:r>
-                        <a:rPr sz="1000" b="1">
+                        <a:rPr sz="950" b="1">
                           <a:solidFill>
                             <a:srgbClr val="14223A"/>
                           </a:solidFill>
@@ -51394,7 +51394,7 @@
                         <a:buNone/>
                       </a:pPr>
                       <a:r>
-                        <a:rPr sz="1000" b="0">
+                        <a:rPr sz="950" b="0">
                           <a:solidFill>
                             <a:srgbClr val="14223A"/>
                           </a:solidFill>
@@ -51424,7 +51424,7 @@
                         <a:buNone/>
                       </a:pPr>
                       <a:r>
-                        <a:rPr sz="1000" b="0">
+                        <a:rPr sz="950" b="0">
                           <a:solidFill>
                             <a:srgbClr val="14223A"/>
                           </a:solidFill>
@@ -51454,7 +51454,7 @@
                         <a:buNone/>
                       </a:pPr>
                       <a:r>
-                        <a:rPr sz="1000" b="0">
+                        <a:rPr sz="950" b="0">
                           <a:solidFill>
                             <a:srgbClr val="14223A"/>
                           </a:solidFill>
@@ -51473,7 +51473,7 @@
                   </a:tcPr>
                 </a:tc>
               </a:tr>
-              <a:tr h="228600">
+              <a:tr h="224028">
                 <a:tc>
                   <a:txBody>
                     <a:bodyPr wrap="square"/>
@@ -51486,7 +51486,7 @@
                         <a:buNone/>
                       </a:pPr>
                       <a:r>
-                        <a:rPr sz="1000" b="1">
+                        <a:rPr sz="950" b="1">
                           <a:solidFill>
                             <a:srgbClr val="14223A"/>
                           </a:solidFill>
@@ -51516,7 +51516,7 @@
                         <a:buNone/>
                       </a:pPr>
                       <a:r>
-                        <a:rPr sz="1000" b="0">
+                        <a:rPr sz="950" b="0">
                           <a:solidFill>
                             <a:srgbClr val="14223A"/>
                           </a:solidFill>
@@ -51546,7 +51546,7 @@
                         <a:buNone/>
                       </a:pPr>
                       <a:r>
-                        <a:rPr sz="1000" b="0">
+                        <a:rPr sz="950" b="0">
                           <a:solidFill>
                             <a:srgbClr val="14223A"/>
                           </a:solidFill>
@@ -51576,7 +51576,7 @@
                         <a:buNone/>
                       </a:pPr>
                       <a:r>
-                        <a:rPr sz="1000" b="0">
+                        <a:rPr sz="950" b="0">
                           <a:solidFill>
                             <a:srgbClr val="14223A"/>
                           </a:solidFill>
@@ -51595,7 +51595,7 @@
                   </a:tcPr>
                 </a:tc>
               </a:tr>
-              <a:tr h="228600">
+              <a:tr h="224028">
                 <a:tc>
                   <a:txBody>
                     <a:bodyPr wrap="square"/>
@@ -51608,7 +51608,7 @@
                         <a:buNone/>
                       </a:pPr>
                       <a:r>
-                        <a:rPr sz="1000" b="1">
+                        <a:rPr sz="950" b="1">
                           <a:solidFill>
                             <a:srgbClr val="14223A"/>
                           </a:solidFill>
@@ -51638,7 +51638,7 @@
                         <a:buNone/>
                       </a:pPr>
                       <a:r>
-                        <a:rPr sz="1000" b="0">
+                        <a:rPr sz="950" b="0">
                           <a:solidFill>
                             <a:srgbClr val="14223A"/>
                           </a:solidFill>
@@ -51668,7 +51668,7 @@
                         <a:buNone/>
                       </a:pPr>
                       <a:r>
-                        <a:rPr sz="1000" b="0">
+                        <a:rPr sz="950" b="0">
                           <a:solidFill>
                             <a:srgbClr val="14223A"/>
                           </a:solidFill>
@@ -51698,7 +51698,7 @@
                         <a:buNone/>
                       </a:pPr>
                       <a:r>
-                        <a:rPr sz="1000" b="0">
+                        <a:rPr sz="950" b="0">
                           <a:solidFill>
                             <a:srgbClr val="14223A"/>
                           </a:solidFill>
@@ -51717,7 +51717,7 @@
                   </a:tcPr>
                 </a:tc>
               </a:tr>
-              <a:tr h="228600">
+              <a:tr h="224028">
                 <a:tc>
                   <a:txBody>
                     <a:bodyPr wrap="square"/>
@@ -51730,7 +51730,7 @@
                         <a:buNone/>
                       </a:pPr>
                       <a:r>
-                        <a:rPr sz="1000" b="1">
+                        <a:rPr sz="950" b="1">
                           <a:solidFill>
                             <a:srgbClr val="14223A"/>
                           </a:solidFill>
@@ -51760,7 +51760,7 @@
                         <a:buNone/>
                       </a:pPr>
                       <a:r>
-                        <a:rPr sz="1000" b="0">
+                        <a:rPr sz="950" b="0">
                           <a:solidFill>
                             <a:srgbClr val="14223A"/>
                           </a:solidFill>
@@ -51790,7 +51790,7 @@
                         <a:buNone/>
                       </a:pPr>
                       <a:r>
-                        <a:rPr sz="1000" b="0">
+                        <a:rPr sz="950" b="0">
                           <a:solidFill>
                             <a:srgbClr val="14223A"/>
                           </a:solidFill>
@@ -51820,7 +51820,7 @@
                         <a:buNone/>
                       </a:pPr>
                       <a:r>
-                        <a:rPr sz="1000" b="0">
+                        <a:rPr sz="950" b="0">
                           <a:solidFill>
                             <a:srgbClr val="14223A"/>
                           </a:solidFill>
@@ -51851,8 +51851,8 @@
         </p:nvSpPr>
         <p:spPr>
           <a:xfrm>
-            <a:off x="457200" y="5468112"/>
-            <a:ext cx="5486400" cy="914400"/>
+            <a:off x="457200" y="5532120"/>
+            <a:ext cx="5486400" cy="813307"/>
           </a:xfrm>
           <a:prstGeom prst="roundRect">
             <a:avLst>
@@ -51897,8 +51897,8 @@
         </p:nvSpPr>
         <p:spPr>
           <a:xfrm>
-            <a:off x="457200" y="5468112"/>
-            <a:ext cx="68580" cy="914400"/>
+            <a:off x="457200" y="5532120"/>
+            <a:ext cx="68580" cy="813307"/>
           </a:xfrm>
           <a:prstGeom prst="rect">
             <a:avLst/>
@@ -51941,7 +51941,7 @@
         </p:nvSpPr>
         <p:spPr>
           <a:xfrm>
-            <a:off x="640080" y="5559552"/>
+            <a:off x="640080" y="5623559"/>
             <a:ext cx="5120640" cy="237744"/>
           </a:xfrm>
           <a:prstGeom prst="rect">
@@ -51983,8 +51983,8 @@
         </p:nvSpPr>
         <p:spPr>
           <a:xfrm>
-            <a:off x="640080" y="5815584"/>
-            <a:ext cx="5138928" cy="493776"/>
+            <a:off x="640080" y="5879592"/>
+            <a:ext cx="5138928" cy="392683"/>
           </a:xfrm>
           <a:prstGeom prst="rect">
             <a:avLst/>
@@ -52025,8 +52025,8 @@
         </p:nvSpPr>
         <p:spPr>
           <a:xfrm>
-            <a:off x="6245352" y="5194808"/>
-            <a:ext cx="5486400" cy="1187704"/>
+            <a:off x="6245352" y="5532120"/>
+            <a:ext cx="5486400" cy="813307"/>
           </a:xfrm>
           <a:prstGeom prst="roundRect">
             <a:avLst>
@@ -52071,8 +52071,8 @@
         </p:nvSpPr>
         <p:spPr>
           <a:xfrm>
-            <a:off x="6245352" y="5194808"/>
-            <a:ext cx="68580" cy="1187704"/>
+            <a:off x="6245352" y="5532120"/>
+            <a:ext cx="68580" cy="813307"/>
           </a:xfrm>
           <a:prstGeom prst="rect">
             <a:avLst/>
@@ -52115,7 +52115,7 @@
         </p:nvSpPr>
         <p:spPr>
           <a:xfrm>
-            <a:off x="6428232" y="5286248"/>
+            <a:off x="6428232" y="5623559"/>
             <a:ext cx="5120640" cy="237744"/>
           </a:xfrm>
           <a:prstGeom prst="rect">
@@ -52157,8 +52157,8 @@
         </p:nvSpPr>
         <p:spPr>
           <a:xfrm>
-            <a:off x="6428232" y="5542280"/>
-            <a:ext cx="5138928" cy="767080"/>
+            <a:off x="6428232" y="5879592"/>
+            <a:ext cx="5138928" cy="392683"/>
           </a:xfrm>
           <a:prstGeom prst="rect">
             <a:avLst/>
@@ -52186,7 +52186,7 @@
                 <a:cs typeface="Meiryo"/>
                 <a:ea typeface="Meiryo"/>
               </a:rPr>
-              <a:t>提案書の差別化要因のうち、予約・請求・カルテ・訪問割当の最適化・移動手当(18枚)は次ページでスキーマだけ先に用意してあります。日報AIの3軸の9枚はその次のページで、この一覧の prompt_templates と合わせて既に実装まで進んでいます。</a:t>
+              <a:t>予約・請求・カルテ・訪問割当の最適化・移動手当(18枚)は次ページでスキーマだけ先に用意。日報AIの3軸(9枚)はその次のページで、実装済み。</a:t>
             </a:r>
           </a:p>
         </p:txBody>
